--- a/Fase 2/Evidencias Proyecto/Presentación Proyecto.pptx
+++ b/Fase 2/Evidencias Proyecto/Presentación Proyecto.pptx
@@ -4,21 +4,22 @@
   <p:sldMasterIdLst>
     <p:sldMasterId id="2147483648" r:id="rId1"/>
   </p:sldMasterIdLst>
+  <p:notesMasterIdLst>
+    <p:notesMasterId r:id="rId12"/>
+  </p:notesMasterIdLst>
   <p:sldIdLst>
     <p:sldId id="256" r:id="rId2"/>
     <p:sldId id="257" r:id="rId3"/>
     <p:sldId id="258" r:id="rId4"/>
     <p:sldId id="259" r:id="rId5"/>
-    <p:sldId id="260" r:id="rId6"/>
-    <p:sldId id="261" r:id="rId7"/>
-    <p:sldId id="262" r:id="rId8"/>
-    <p:sldId id="263" r:id="rId9"/>
-    <p:sldId id="264" r:id="rId10"/>
+    <p:sldId id="265" r:id="rId6"/>
+    <p:sldId id="260" r:id="rId7"/>
+    <p:sldId id="261" r:id="rId8"/>
+    <p:sldId id="262" r:id="rId9"/>
+    <p:sldId id="263" r:id="rId10"/>
+    <p:sldId id="264" r:id="rId11"/>
   </p:sldIdLst>
-  <p:notesMasterIdLst>
-    <p:notesMasterId r:id="rId11"/>
-  </p:notesMasterIdLst>
-  <p:sldSz cx="9144000" cy="5143500"/>
+  <p:sldSz cx="9144000" cy="5143500" type="screen16x9"/>
   <p:notesSz cx="5143500" cy="9144000"/>
   <p:defaultTextStyle>
     <a:lvl1pPr marL="0" algn="l" defTabSz="914400" rtl="0" eaLnBrk="1" latinLnBrk="0" hangingPunct="1">
@@ -115,27 +116,28 @@
   <p:extLst>
     <p:ext uri="{521415D9-36F7-43E2-AB2F-B90AF26B5E84}">
       <p14:sectionLst xmlns:p14="http://schemas.microsoft.com/office/powerpoint/2010/main">
-        <p14:section name="Apertura" id="{4a10676a-2cd8-4dbb-510c-712ab73f808c}">
+        <p14:section name="Apertura" id="{4A10676A-2CD8-4DBB-510C-712AB73F808C}">
           <p14:sldIdLst>
             <p14:sldId id="256"/>
           </p14:sldIdLst>
         </p14:section>
-        <p14:section name="Avance" id="{fa6f51d1-0268-3bd9-7f84-5f18f3f54172}">
+        <p14:section name="Avance" id="{FA6F51D1-0268-3BD9-7F84-5F18F3F54172}">
           <p14:sldIdLst>
             <p14:sldId id="257"/>
             <p14:sldId id="258"/>
             <p14:sldId id="259"/>
+            <p14:sldId id="265"/>
             <p14:sldId id="260"/>
           </p14:sldIdLst>
         </p14:section>
-        <p14:section name="Calidad y ajustes" id="{95c91786-b590-98c4-f1b7-d731e6b1e7a4}">
+        <p14:section name="Calidad y ajustes" id="{95C91786-B590-98C4-F1B7-D731E6B1E7A4}">
           <p14:sldIdLst>
             <p14:sldId id="261"/>
             <p14:sldId id="262"/>
             <p14:sldId id="263"/>
           </p14:sldIdLst>
         </p14:section>
-        <p14:section name="Cierre" id="{08bb37ad-1952-5863-1569-234391d3df6f}">
+        <p14:section name="Cierre" id="{08BB37AD-1952-5863-1569-234391D3DF6F}">
           <p14:sldIdLst>
             <p14:sldId id="264"/>
           </p14:sldIdLst>
@@ -150,9 +152,11 @@
 </file>
 
 <file path=ppt/charts/chart1.xml><?xml version="1.0" encoding="utf-8"?>
-<c:chartSpace xmlns:c="http://schemas.openxmlformats.org/drawingml/2006/chart" xmlns:a="http://schemas.openxmlformats.org/drawingml/2006/main" xmlns:r="http://schemas.openxmlformats.org/officeDocument/2006/relationships">
+<c:chartSpace xmlns:c="http://schemas.openxmlformats.org/drawingml/2006/chart" xmlns:a="http://schemas.openxmlformats.org/drawingml/2006/main" xmlns:r="http://schemas.openxmlformats.org/officeDocument/2006/relationships" xmlns:c16r2="http://schemas.microsoft.com/office/drawing/2015/06/chart">
   <c:date1904 val="0"/>
+  <c:lang val="es-ES"/>
   <c:roundedCorners val="1"/>
+  <c:style val="2"/>
   <c:chart>
     <c:title>
       <c:tx>
@@ -160,6 +164,440 @@
           <a:bodyPr/>
           <a:lstStyle/>
           <a:p>
+            <a:r>
+              <a:rPr lang="es-ES" sz="1400" b="0">
+                <a:solidFill>
+                  <a:srgbClr val="12263F"/>
+                </a:solidFill>
+                <a:latin typeface="Calibri"/>
+              </a:rPr>
+              <a:t>Burndown del Sprint 3 (puntos pendientes por día)</a:t>
+            </a:r>
+          </a:p>
+        </c:rich>
+      </c:tx>
+      <c:overlay val="0"/>
+    </c:title>
+    <c:autoTitleDeleted val="0"/>
+    <c:plotArea>
+      <c:layout/>
+      <c:lineChart>
+        <c:grouping val="standard"/>
+        <c:varyColors val="0"/>
+        <c:ser>
+          <c:idx val="0"/>
+          <c:order val="0"/>
+          <c:tx>
+            <c:strRef>
+              <c:f>Sheet1!$B$1</c:f>
+              <c:strCache>
+                <c:ptCount val="1"/>
+                <c:pt idx="0">
+                  <c:v>Ideal</c:v>
+                </c:pt>
+              </c:strCache>
+            </c:strRef>
+          </c:tx>
+          <c:spPr>
+            <a:ln w="22225">
+              <a:solidFill>
+                <a:srgbClr val="5B7083"/>
+              </a:solidFill>
+              <a:prstDash val="dash"/>
+            </a:ln>
+          </c:spPr>
+          <c:marker>
+            <c:symbol val="none"/>
+          </c:marker>
+          <c:cat>
+            <c:strRef>
+              <c:f>Sheet1!$A$2:$A$12</c:f>
+              <c:strCache>
+                <c:ptCount val="11"/>
+                <c:pt idx="0">
+                  <c:v>0</c:v>
+                </c:pt>
+                <c:pt idx="1">
+                  <c:v>1</c:v>
+                </c:pt>
+                <c:pt idx="2">
+                  <c:v>2</c:v>
+                </c:pt>
+                <c:pt idx="3">
+                  <c:v>3</c:v>
+                </c:pt>
+                <c:pt idx="4">
+                  <c:v>4</c:v>
+                </c:pt>
+                <c:pt idx="5">
+                  <c:v>5</c:v>
+                </c:pt>
+                <c:pt idx="6">
+                  <c:v>6</c:v>
+                </c:pt>
+                <c:pt idx="7">
+                  <c:v>7</c:v>
+                </c:pt>
+                <c:pt idx="8">
+                  <c:v>8</c:v>
+                </c:pt>
+                <c:pt idx="9">
+                  <c:v>9</c:v>
+                </c:pt>
+                <c:pt idx="10">
+                  <c:v>10</c:v>
+                </c:pt>
+              </c:strCache>
+            </c:strRef>
+          </c:cat>
+          <c:val>
+            <c:numRef>
+              <c:f>Sheet1!$B$2:$B$12</c:f>
+              <c:numCache>
+                <c:formatCode>General</c:formatCode>
+                <c:ptCount val="11"/>
+                <c:pt idx="0">
+                  <c:v>20</c:v>
+                </c:pt>
+                <c:pt idx="1">
+                  <c:v>18</c:v>
+                </c:pt>
+                <c:pt idx="2">
+                  <c:v>16</c:v>
+                </c:pt>
+                <c:pt idx="3">
+                  <c:v>14</c:v>
+                </c:pt>
+                <c:pt idx="4">
+                  <c:v>12</c:v>
+                </c:pt>
+                <c:pt idx="5">
+                  <c:v>10</c:v>
+                </c:pt>
+                <c:pt idx="6">
+                  <c:v>8</c:v>
+                </c:pt>
+                <c:pt idx="7">
+                  <c:v>6</c:v>
+                </c:pt>
+                <c:pt idx="8">
+                  <c:v>4</c:v>
+                </c:pt>
+                <c:pt idx="9">
+                  <c:v>2</c:v>
+                </c:pt>
+                <c:pt idx="10">
+                  <c:v>0</c:v>
+                </c:pt>
+              </c:numCache>
+            </c:numRef>
+          </c:val>
+          <c:smooth val="0"/>
+          <c:extLst>
+            <c:ext xmlns:c16="http://schemas.microsoft.com/office/drawing/2014/chart" uri="{C3380CC4-5D6E-409C-BE32-E72D297353CC}">
+              <c16:uniqueId val="{00000000-5237-4DFD-BA0F-D4652942394A}"/>
+            </c:ext>
+          </c:extLst>
+        </c:ser>
+        <c:ser>
+          <c:idx val="1"/>
+          <c:order val="1"/>
+          <c:tx>
+            <c:strRef>
+              <c:f>Sheet1!$C$1</c:f>
+              <c:strCache>
+                <c:ptCount val="1"/>
+                <c:pt idx="0">
+                  <c:v>Real</c:v>
+                </c:pt>
+              </c:strCache>
+            </c:strRef>
+          </c:tx>
+          <c:spPr>
+            <a:ln w="31750">
+              <a:solidFill>
+                <a:srgbClr val="1F6F8B"/>
+              </a:solidFill>
+            </a:ln>
+          </c:spPr>
+          <c:marker>
+            <c:symbol val="circle"/>
+            <c:size val="7"/>
+            <c:spPr>
+              <a:solidFill>
+                <a:srgbClr val="1F6F8B"/>
+              </a:solidFill>
+              <a:ln>
+                <a:solidFill>
+                  <a:srgbClr val="1F6F8B"/>
+                </a:solidFill>
+              </a:ln>
+            </c:spPr>
+          </c:marker>
+          <c:cat>
+            <c:strRef>
+              <c:f>Sheet1!$A$2:$A$12</c:f>
+              <c:strCache>
+                <c:ptCount val="11"/>
+                <c:pt idx="0">
+                  <c:v>0</c:v>
+                </c:pt>
+                <c:pt idx="1">
+                  <c:v>1</c:v>
+                </c:pt>
+                <c:pt idx="2">
+                  <c:v>2</c:v>
+                </c:pt>
+                <c:pt idx="3">
+                  <c:v>3</c:v>
+                </c:pt>
+                <c:pt idx="4">
+                  <c:v>4</c:v>
+                </c:pt>
+                <c:pt idx="5">
+                  <c:v>5</c:v>
+                </c:pt>
+                <c:pt idx="6">
+                  <c:v>6</c:v>
+                </c:pt>
+                <c:pt idx="7">
+                  <c:v>7</c:v>
+                </c:pt>
+                <c:pt idx="8">
+                  <c:v>8</c:v>
+                </c:pt>
+                <c:pt idx="9">
+                  <c:v>9</c:v>
+                </c:pt>
+                <c:pt idx="10">
+                  <c:v>10</c:v>
+                </c:pt>
+              </c:strCache>
+            </c:strRef>
+          </c:cat>
+          <c:val>
+            <c:numRef>
+              <c:f>Sheet1!$C$2:$C$12</c:f>
+              <c:numCache>
+                <c:formatCode>General</c:formatCode>
+                <c:ptCount val="11"/>
+                <c:pt idx="0">
+                  <c:v>20</c:v>
+                </c:pt>
+                <c:pt idx="1">
+                  <c:v>20</c:v>
+                </c:pt>
+                <c:pt idx="2">
+                  <c:v>19</c:v>
+                </c:pt>
+                <c:pt idx="3">
+                  <c:v>17</c:v>
+                </c:pt>
+                <c:pt idx="4">
+                  <c:v>15</c:v>
+                </c:pt>
+                <c:pt idx="5">
+                  <c:v>12</c:v>
+                </c:pt>
+                <c:pt idx="6">
+                  <c:v>10</c:v>
+                </c:pt>
+                <c:pt idx="7">
+                  <c:v>7</c:v>
+                </c:pt>
+                <c:pt idx="8">
+                  <c:v>4</c:v>
+                </c:pt>
+                <c:pt idx="9">
+                  <c:v>2</c:v>
+                </c:pt>
+                <c:pt idx="10">
+                  <c:v>0</c:v>
+                </c:pt>
+              </c:numCache>
+            </c:numRef>
+          </c:val>
+          <c:smooth val="0"/>
+          <c:extLst>
+            <c:ext xmlns:c16="http://schemas.microsoft.com/office/drawing/2014/chart" uri="{C3380CC4-5D6E-409C-BE32-E72D297353CC}">
+              <c16:uniqueId val="{00000001-5237-4DFD-BA0F-D4652942394A}"/>
+            </c:ext>
+          </c:extLst>
+        </c:ser>
+        <c:dLbls>
+          <c:showLegendKey val="0"/>
+          <c:showVal val="0"/>
+          <c:showCatName val="0"/>
+          <c:showSerName val="0"/>
+          <c:showPercent val="0"/>
+          <c:showBubbleSize val="0"/>
+        </c:dLbls>
+        <c:smooth val="0"/>
+        <c:axId val="2118791784"/>
+        <c:axId val="2140495176"/>
+      </c:lineChart>
+      <c:catAx>
+        <c:axId val="2118791784"/>
+        <c:scaling>
+          <c:orientation val="minMax"/>
+        </c:scaling>
+        <c:delete val="0"/>
+        <c:axPos val="b"/>
+        <c:title>
+          <c:tx>
+            <c:rich>
+              <a:bodyPr/>
+              <a:lstStyle/>
+              <a:p>
+                <a:r>
+                  <a:rPr lang="es-ES" sz="1200" b="0">
+                    <a:solidFill>
+                      <a:srgbClr val="5B7083"/>
+                    </a:solidFill>
+                    <a:latin typeface="Calibri"/>
+                  </a:rPr>
+                  <a:t>Día hábil del sprint (semanas 9 y 10)</a:t>
+                </a:r>
+              </a:p>
+            </c:rich>
+          </c:tx>
+          <c:overlay val="0"/>
+        </c:title>
+        <c:numFmt formatCode="General" sourceLinked="0"/>
+        <c:majorTickMark val="out"/>
+        <c:minorTickMark val="none"/>
+        <c:tickLblPos val="nextTo"/>
+        <c:spPr>
+          <a:ln>
+            <a:solidFill>
+              <a:srgbClr val="888888"/>
+            </a:solidFill>
+          </a:ln>
+        </c:spPr>
+        <c:txPr>
+          <a:bodyPr/>
+          <a:lstStyle/>
+          <a:p>
+            <a:pPr>
+              <a:defRPr sz="1200">
+                <a:solidFill>
+                  <a:srgbClr val="5B7083"/>
+                </a:solidFill>
+                <a:latin typeface="Calibri"/>
+              </a:defRPr>
+            </a:pPr>
+            <a:endParaRPr lang="es-CL"/>
+          </a:p>
+        </c:txPr>
+        <c:crossAx val="2140495176"/>
+        <c:crosses val="autoZero"/>
+        <c:auto val="1"/>
+        <c:lblAlgn val="ctr"/>
+        <c:lblOffset val="100"/>
+        <c:noMultiLvlLbl val="0"/>
+      </c:catAx>
+      <c:valAx>
+        <c:axId val="2140495176"/>
+        <c:scaling>
+          <c:orientation val="minMax"/>
+          <c:max val="20"/>
+          <c:min val="0"/>
+        </c:scaling>
+        <c:delete val="0"/>
+        <c:axPos val="l"/>
+        <c:majorGridlines>
+          <c:spPr>
+            <a:ln w="6350">
+              <a:solidFill>
+                <a:srgbClr val="D5DCE3"/>
+              </a:solidFill>
+            </a:ln>
+          </c:spPr>
+        </c:majorGridlines>
+        <c:numFmt formatCode="General" sourceLinked="1"/>
+        <c:majorTickMark val="out"/>
+        <c:minorTickMark val="none"/>
+        <c:tickLblPos val="nextTo"/>
+        <c:spPr>
+          <a:ln>
+            <a:solidFill>
+              <a:srgbClr val="888888"/>
+            </a:solidFill>
+          </a:ln>
+        </c:spPr>
+        <c:txPr>
+          <a:bodyPr/>
+          <a:lstStyle/>
+          <a:p>
+            <a:pPr>
+              <a:defRPr sz="1200">
+                <a:solidFill>
+                  <a:srgbClr val="5B7083"/>
+                </a:solidFill>
+                <a:latin typeface="Calibri"/>
+              </a:defRPr>
+            </a:pPr>
+            <a:endParaRPr lang="es-CL"/>
+          </a:p>
+        </c:txPr>
+        <c:crossAx val="2118791784"/>
+        <c:crosses val="autoZero"/>
+        <c:crossBetween val="between"/>
+        <c:majorUnit val="5"/>
+      </c:valAx>
+    </c:plotArea>
+    <c:legend>
+      <c:legendPos val="b"/>
+      <c:overlay val="0"/>
+      <c:txPr>
+        <a:bodyPr/>
+        <a:lstStyle/>
+        <a:p>
+          <a:pPr>
+            <a:defRPr sz="1200">
+              <a:solidFill>
+                <a:srgbClr val="14202E"/>
+              </a:solidFill>
+              <a:latin typeface="Calibri"/>
+            </a:defRPr>
+          </a:pPr>
+          <a:endParaRPr lang="es-CL"/>
+        </a:p>
+      </c:txPr>
+    </c:legend>
+    <c:plotVisOnly val="1"/>
+    <c:dispBlanksAs val="gap"/>
+    <c:showDLblsOverMax val="0"/>
+  </c:chart>
+  <c:txPr>
+    <a:bodyPr/>
+    <a:lstStyle/>
+    <a:p>
+      <a:pPr>
+        <a:defRPr sz="1800"/>
+      </a:pPr>
+      <a:endParaRPr lang="es-CL"/>
+    </a:p>
+  </c:txPr>
+  <c:externalData r:id="rId1">
+    <c:autoUpdate val="0"/>
+  </c:externalData>
+</c:chartSpace>
+</file>
+
+<file path=ppt/charts/chart2.xml><?xml version="1.0" encoding="utf-8"?>
+<c:chartSpace xmlns:c="http://schemas.openxmlformats.org/drawingml/2006/chart" xmlns:a="http://schemas.openxmlformats.org/drawingml/2006/main" xmlns:r="http://schemas.openxmlformats.org/officeDocument/2006/relationships" xmlns:c16r2="http://schemas.microsoft.com/office/drawing/2015/06/chart">
+  <c:date1904 val="0"/>
+  <c:lang val="es-ES"/>
+  <c:roundedCorners val="1"/>
+  <c:style val="2"/>
+  <c:chart>
+    <c:title>
+      <c:tx>
+        <c:rich>
+          <a:bodyPr/>
+          <a:lstStyle/>
+          <a:p>
             <a:pPr>
               <a:defRPr sz="1400" b="0" i="0" u="none" strike="noStrike">
                 <a:solidFill>
@@ -169,25 +607,24 @@
               </a:defRPr>
             </a:pPr>
             <a:r>
-              <a:rPr sz="1400" b="0" i="0" u="none" strike="noStrike">
+              <a:rPr lang="es-CL" sz="1400" b="0" i="0" u="none" strike="noStrike">
                 <a:solidFill>
                   <a:srgbClr val="12263F"/>
                 </a:solidFill>
                 <a:latin typeface="+mn-lt"/>
               </a:rPr>
-              <a:t>Casos automatizados</a:t>
+              <a:t>38 pruebas de backend (PyTest)</a:t>
             </a:r>
           </a:p>
         </c:rich>
       </c:tx>
-      <c:layout/>
       <c:overlay val="0"/>
     </c:title>
     <c:autoTitleDeleted val="0"/>
     <c:plotArea>
       <c:layout/>
       <c:barChart>
-        <c:barDir val="col"/>
+        <c:barDir val="bar"/>
         <c:grouping val="clustered"/>
         <c:varyColors val="0"/>
         <c:ser>
@@ -213,18 +650,26 @@
           <c:invertIfNegative val="0"/>
           <c:dLbls>
             <c:numFmt formatCode="#,##0" sourceLinked="0"/>
+            <c:spPr>
+              <a:noFill/>
+              <a:ln>
+                <a:noFill/>
+              </a:ln>
+              <a:effectLst/>
+            </c:spPr>
             <c:txPr>
               <a:bodyPr/>
               <a:lstStyle/>
               <a:p>
                 <a:pPr>
-                  <a:defRPr b="0" i="0" strike="noStrike" sz="1400" u="none">
+                  <a:defRPr sz="1400" b="0" i="0" u="none" strike="noStrike">
                     <a:solidFill>
                       <a:srgbClr val="14202E"/>
                     </a:solidFill>
                     <a:latin typeface="+mn-lt"/>
                   </a:defRPr>
                 </a:pPr>
+                <a:endParaRPr lang="es-CL"/>
               </a:p>
             </c:txPr>
             <c:showLegendKey val="0"/>
@@ -234,98 +679,84 @@
             <c:showPercent val="0"/>
             <c:showBubbleSize val="0"/>
             <c:showLeaderLines val="0"/>
+            <c:extLst>
+              <c:ext xmlns:c15="http://schemas.microsoft.com/office/drawing/2012/chart" uri="{CE6537A1-D6FC-4f65-9D91-7224C49458BB}">
+                <c15:showLeaderLines val="0"/>
+              </c:ext>
+            </c:extLst>
           </c:dLbls>
-          <c:dPt>
-            <c:idx val="0"/>
-            <c:invertIfNegative val="0"/>
-            <c:bubble3D val="0"/>
-            <c:spPr>
-              <a:solidFill>
-                <a:srgbClr val="1F6F8B"/>
-              </a:solidFill>
-              <a:effectLst/>
-            </c:spPr>
-          </c:dPt>
-          <c:dPt>
-            <c:idx val="1"/>
-            <c:invertIfNegative val="0"/>
-            <c:bubble3D val="0"/>
-            <c:spPr>
-              <a:solidFill>
-                <a:srgbClr val="F5A524"/>
-              </a:solidFill>
-              <a:effectLst/>
-            </c:spPr>
-          </c:dPt>
           <c:cat>
-            <c:multiLvlStrRef>
-              <c:f>Sheet1!$A$2:$A$3</c:f>
-              <c:multiLvlStrCache>
-                <c:ptCount val="2"/>
-                <c:lvl>
-                  <c:pt idx="0">
-                    <c:v>Backend (PyTest)</c:v>
-                  </c:pt>
-                  <c:pt idx="1">
-                    <c:v>Frontend (node:test)</c:v>
-                  </c:pt>
-                </c:lvl>
-              </c:multiLvlStrCache>
-            </c:multiLvlStrRef>
+            <c:strRef>
+              <c:f>Sheet1!$A$2:$A$6</c:f>
+              <c:strCache>
+                <c:ptCount val="5"/>
+                <c:pt idx="0">
+                  <c:v>Motor de auditoría</c:v>
+                </c:pt>
+                <c:pt idx="1">
+                  <c:v>Mapeo de columnas</c:v>
+                </c:pt>
+                <c:pt idx="2">
+                  <c:v>Carga de archivos</c:v>
+                </c:pt>
+                <c:pt idx="3">
+                  <c:v>Auditoría vía API</c:v>
+                </c:pt>
+                <c:pt idx="4">
+                  <c:v>Consultas</c:v>
+                </c:pt>
+              </c:strCache>
+            </c:strRef>
           </c:cat>
           <c:val>
             <c:numRef>
-              <c:f>Sheet1!$B$2:$B$3</c:f>
+              <c:f>Sheet1!$B$2:$B$6</c:f>
               <c:numCache>
                 <c:formatCode>General</c:formatCode>
-                <c:ptCount val="2"/>
+                <c:ptCount val="5"/>
                 <c:pt idx="0">
-                  <c:v>53</c:v>
+                  <c:v>20</c:v>
                 </c:pt>
                 <c:pt idx="1">
-                  <c:v>13</c:v>
+                  <c:v>6</c:v>
+                </c:pt>
+                <c:pt idx="2">
+                  <c:v>4</c:v>
+                </c:pt>
+                <c:pt idx="3">
+                  <c:v>3</c:v>
+                </c:pt>
+                <c:pt idx="4">
+                  <c:v>5</c:v>
                 </c:pt>
               </c:numCache>
             </c:numRef>
           </c:val>
+          <c:extLst>
+            <c:ext xmlns:c16="http://schemas.microsoft.com/office/drawing/2014/chart" uri="{C3380CC4-5D6E-409C-BE32-E72D297353CC}">
+              <c16:uniqueId val="{00000000-C0E6-475C-B570-BF1358747015}"/>
+            </c:ext>
+          </c:extLst>
         </c:ser>
         <c:dLbls>
-          <c:numFmt formatCode="#,##0" sourceLinked="0"/>
-          <c:txPr>
-            <a:bodyPr/>
-            <a:lstStyle/>
-            <a:p>
-              <a:pPr>
-                <a:defRPr b="0" i="0" strike="noStrike" sz="1400" u="none">
-                  <a:solidFill>
-                    <a:srgbClr val="14202E"/>
-                  </a:solidFill>
-                  <a:latin typeface="+mn-lt"/>
-                </a:defRPr>
-              </a:pPr>
-            </a:p>
-          </c:txPr>
           <c:showLegendKey val="0"/>
           <c:showVal val="1"/>
           <c:showCatName val="0"/>
           <c:showSerName val="0"/>
           <c:showPercent val="0"/>
           <c:showBubbleSize val="0"/>
-          <c:showLeaderLines val="0"/>
         </c:dLbls>
         <c:gapWidth val="150"/>
-        <c:overlap val="0"/>
         <c:axId val="2094734554"/>
         <c:axId val="2094734552"/>
-        <c:axId val="2094734556"/>
       </c:barChart>
       <c:catAx>
         <c:axId val="2094734554"/>
         <c:scaling>
-          <c:orientation val="minMax"/>
+          <c:orientation val="maxMin"/>
         </c:scaling>
         <c:delete val="0"/>
-        <c:axPos val="b"/>
+        <c:axPos val="l"/>
         <c:numFmt formatCode="General" sourceLinked="1"/>
         <c:majorTickMark val="out"/>
         <c:minorTickMark val="none"/>
@@ -351,63 +782,29 @@
                 <a:latin typeface="+mn-lt"/>
               </a:defRPr>
             </a:pPr>
-            <a:endParaRPr lang="en-US"/>
+            <a:endParaRPr lang="es-CL"/>
           </a:p>
         </c:txPr>
         <c:crossAx val="2094734552"/>
         <c:crosses val="autoZero"/>
         <c:auto val="1"/>
         <c:lblAlgn val="ctr"/>
+        <c:lblOffset val="100"/>
         <c:noMultiLvlLbl val="1"/>
       </c:catAx>
       <c:valAx>
         <c:axId val="2094734552"/>
         <c:scaling>
           <c:orientation val="minMax"/>
-          <c:max val="60"/>
+          <c:max val="25"/>
           <c:min val="0"/>
         </c:scaling>
-        <c:delete val="0"/>
-        <c:axPos val="l"/>
-        <c:majorGridlines>
-          <c:spPr>
-            <a:ln w="6350" cap="flat">
-              <a:solidFill>
-                <a:srgbClr val="D5DCE3"/>
-              </a:solidFill>
-              <a:prstDash val="solid"/>
-              <a:round/>
-            </a:ln>
-          </c:spPr>
-        </c:majorGridlines>
+        <c:delete val="1"/>
+        <c:axPos val="t"/>
         <c:numFmt formatCode="General" sourceLinked="0"/>
         <c:majorTickMark val="out"/>
         <c:minorTickMark val="none"/>
         <c:tickLblPos val="nextTo"/>
-        <c:spPr>
-          <a:ln w="12700" cap="flat">
-            <a:solidFill>
-              <a:srgbClr val="888888"/>
-            </a:solidFill>
-            <a:prstDash val="solid"/>
-            <a:round/>
-          </a:ln>
-        </c:spPr>
-        <c:txPr>
-          <a:bodyPr/>
-          <a:lstStyle/>
-          <a:p>
-            <a:pPr>
-              <a:defRPr sz="1200" b="0" i="0" u="none" strike="noStrike">
-                <a:solidFill>
-                  <a:srgbClr val="5B7083"/>
-                </a:solidFill>
-                <a:latin typeface="+mn-lt"/>
-              </a:defRPr>
-            </a:pPr>
-            <a:endParaRPr lang="en-US"/>
-          </a:p>
-        </c:txPr>
         <c:crossAx val="2094734554"/>
         <c:crosses val="autoZero"/>
         <c:crossBetween val="between"/>
@@ -422,6 +819,7 @@
     </c:plotArea>
     <c:plotVisOnly val="1"/>
     <c:dispBlanksAs val="span"/>
+    <c:showDLblsOverMax val="1"/>
   </c:chart>
   <c:spPr>
     <a:noFill/>
@@ -458,234 +856,10 @@
           <a:chExt cx="0" cy="0"/>
         </a:xfrm>
       </p:grpSpPr>
-      <p:sp>
-        <p:nvSpPr>
-          <p:cNvPr id="2" name="Header Placeholder 1"/>
-          <p:cNvSpPr>
-            <a:spLocks noGrp="1"/>
-          </p:cNvSpPr>
-          <p:nvPr>
-            <p:ph type="hdr" sz="quarter"/>
-          </p:nvPr>
-        </p:nvSpPr>
-        <p:spPr>
-          <a:xfrm>
-            <a:off x="0" y="0"/>
-            <a:ext cx="2971800" cy="458788"/>
-          </a:xfrm>
-          <a:prstGeom prst="rect">
-            <a:avLst/>
-          </a:prstGeom>
-        </p:spPr>
-        <p:txBody>
-          <a:bodyPr vert="horz" lIns="91440" tIns="45720" rIns="91440" bIns="45720" rtlCol="0"/>
-          <a:lstStyle>
-            <a:lvl1pPr algn="l">
-              <a:defRPr sz="1200"/>
-            </a:lvl1pPr>
-          </a:lstStyle>
-          <a:p>
-            <a:endParaRPr lang="en-US"/>
-          </a:p>
-        </p:txBody>
-      </p:sp>
-      <p:sp>
-        <p:nvSpPr>
-          <p:cNvPr id="3" name="Date Placeholder 2"/>
-          <p:cNvSpPr>
-            <a:spLocks noGrp="1"/>
-          </p:cNvSpPr>
-          <p:nvPr>
-            <p:ph type="dt" idx="1"/>
-          </p:nvPr>
-        </p:nvSpPr>
-        <p:spPr>
-          <a:xfrm>
-            <a:off x="3884613" y="0"/>
-            <a:ext cx="2971800" cy="458788"/>
-          </a:xfrm>
-          <a:prstGeom prst="rect">
-            <a:avLst/>
-          </a:prstGeom>
-        </p:spPr>
-        <p:txBody>
-          <a:bodyPr vert="horz" lIns="91440" tIns="45720" rIns="91440" bIns="45720" rtlCol="0"/>
-          <a:lstStyle>
-            <a:lvl1pPr algn="r">
-              <a:defRPr sz="1200"/>
-            </a:lvl1pPr>
-          </a:lstStyle>
-          <a:p>
-            <a:fld id="{5282F153-3F37-0F45-9E97-73ACFA13230C}" type="datetimeFigureOut">
-              <a:rPr lang="en-US"/>
-              <a:t>7/23/19</a:t>
-            </a:fld>
-            <a:endParaRPr lang="en-US"/>
-          </a:p>
-        </p:txBody>
-      </p:sp>
-      <p:sp>
-        <p:nvSpPr>
-          <p:cNvPr id="4" name="Slide Image Placeholder 3"/>
-          <p:cNvSpPr>
-            <a:spLocks noGrp="1" noRot="1" noChangeAspect="1"/>
-          </p:cNvSpPr>
-          <p:nvPr>
-            <p:ph type="sldImg" idx="2"/>
-          </p:nvPr>
-        </p:nvSpPr>
-        <p:spPr>
-          <a:xfrm>
-            <a:off x="685800" y="1143000"/>
-            <a:ext cx="5486400" cy="3086100"/>
-          </a:xfrm>
-          <a:prstGeom prst="rect">
-            <a:avLst/>
-          </a:prstGeom>
-          <a:noFill/>
-          <a:ln w="12700">
-            <a:solidFill>
-              <a:prstClr val="black"/>
-            </a:solidFill>
-          </a:ln>
-        </p:spPr>
-        <p:txBody>
-          <a:bodyPr vert="horz" lIns="91440" tIns="45720" rIns="91440" bIns="45720" rtlCol="0" anchor="ctr"/>
-          <a:lstStyle/>
-          <a:p>
-            <a:endParaRPr lang="en-US"/>
-          </a:p>
-        </p:txBody>
-      </p:sp>
-      <p:sp>
-        <p:nvSpPr>
-          <p:cNvPr id="5" name="Notes Placeholder 4"/>
-          <p:cNvSpPr>
-            <a:spLocks noGrp="1"/>
-          </p:cNvSpPr>
-          <p:nvPr>
-            <p:ph type="body" sz="quarter" idx="3"/>
-          </p:nvPr>
-        </p:nvSpPr>
-        <p:spPr>
-          <a:xfrm>
-            <a:off x="685800" y="4400550"/>
-            <a:ext cx="5486400" cy="3600450"/>
-          </a:xfrm>
-          <a:prstGeom prst="rect">
-            <a:avLst/>
-          </a:prstGeom>
-        </p:spPr>
-        <p:txBody>
-          <a:bodyPr vert="horz" lIns="91440" tIns="45720" rIns="91440" bIns="45720" rtlCol="0"/>
-          <a:lstStyle/>
-          <a:p>
-            <a:pPr lvl="0"/>
-            <a:r>
-              <a:rPr lang="en-US"/>
-              <a:t>Click to edit Master text styles</a:t>
-            </a:r>
-          </a:p>
-          <a:p>
-            <a:pPr lvl="1"/>
-            <a:r>
-              <a:rPr lang="en-US"/>
-              <a:t>Second level</a:t>
-            </a:r>
-          </a:p>
-          <a:p>
-            <a:pPr lvl="2"/>
-            <a:r>
-              <a:rPr lang="en-US"/>
-              <a:t>Third level</a:t>
-            </a:r>
-          </a:p>
-          <a:p>
-            <a:pPr lvl="3"/>
-            <a:r>
-              <a:rPr lang="en-US"/>
-              <a:t>Fourth level</a:t>
-            </a:r>
-          </a:p>
-          <a:p>
-            <a:pPr lvl="4"/>
-            <a:r>
-              <a:rPr lang="en-US"/>
-              <a:t>Fifth level</a:t>
-            </a:r>
-          </a:p>
-        </p:txBody>
-      </p:sp>
-      <p:sp>
-        <p:nvSpPr>
-          <p:cNvPr id="6" name="Footer Placeholder 5"/>
-          <p:cNvSpPr>
-            <a:spLocks noGrp="1"/>
-          </p:cNvSpPr>
-          <p:nvPr>
-            <p:ph type="ftr" sz="quarter" idx="4"/>
-          </p:nvPr>
-        </p:nvSpPr>
-        <p:spPr>
-          <a:xfrm>
-            <a:off x="0" y="8685213"/>
-            <a:ext cx="2971800" cy="458787"/>
-          </a:xfrm>
-          <a:prstGeom prst="rect">
-            <a:avLst/>
-          </a:prstGeom>
-        </p:spPr>
-        <p:txBody>
-          <a:bodyPr vert="horz" lIns="91440" tIns="45720" rIns="91440" bIns="45720" rtlCol="0" anchor="b"/>
-          <a:lstStyle>
-            <a:lvl1pPr algn="l">
-              <a:defRPr sz="1200"/>
-            </a:lvl1pPr>
-          </a:lstStyle>
-          <a:p>
-            <a:endParaRPr lang="en-US"/>
-          </a:p>
-        </p:txBody>
-      </p:sp>
-      <p:sp>
-        <p:nvSpPr>
-          <p:cNvPr id="7" name="Slide Number Placeholder 6"/>
-          <p:cNvSpPr>
-            <a:spLocks noGrp="1"/>
-          </p:cNvSpPr>
-          <p:nvPr>
-            <p:ph type="sldNum" sz="quarter" idx="5"/>
-          </p:nvPr>
-        </p:nvSpPr>
-        <p:spPr>
-          <a:xfrm>
-            <a:off x="3884613" y="8685213"/>
-            <a:ext cx="2971800" cy="458787"/>
-          </a:xfrm>
-          <a:prstGeom prst="rect">
-            <a:avLst/>
-          </a:prstGeom>
-        </p:spPr>
-        <p:txBody>
-          <a:bodyPr vert="horz" lIns="91440" tIns="45720" rIns="91440" bIns="45720" rtlCol="0" anchor="b"/>
-          <a:lstStyle>
-            <a:lvl1pPr algn="r">
-              <a:defRPr sz="1200"/>
-            </a:lvl1pPr>
-          </a:lstStyle>
-          <a:p>
-            <a:fld id="{CE5E9CC1-C706-0F49-92D6-E571CC5EEA8F}" type="slidenum">
-              <a:rPr lang="en-US"/>
-              <a:t>‹#›</a:t>
-            </a:fld>
-            <a:endParaRPr lang="en-US"/>
-          </a:p>
-        </p:txBody>
-      </p:sp>
     </p:spTree>
     <p:extLst>
       <p:ext uri="{BB962C8B-B14F-4D97-AF65-F5344CB8AC3E}">
-        <p14:creationId xmlns:p14="http://schemas.microsoft.com/office/powerpoint/2010/main" val="1024086991"/>
+        <p14:creationId xmlns:p14="http://schemas.microsoft.com/office/powerpoint/2010/main" val="3995427736"/>
       </p:ext>
     </p:extLst>
   </p:cSld>
@@ -830,10 +1004,8 @@
           <a:lstStyle/>
           <a:p>
             <a:r>
-              <a:rPr lang="en-US" dirty="0"/>
-              <a:t>Presentamos el avance de LogiSLA al cierre de la semana 10. Se completaron los tres primeros sprints del plan de la Fase 1.</a:t>
-            </a:r>
-            <a:endParaRPr lang="en-US" dirty="0"/>
+              <a:t>Presentamos el avance de LogiSLA al cierre de la Fase 2. Se completaron los tres primeros sprints: ingesta, motor de auditoría y dashboard.</a:t>
+            </a:r>
           </a:p>
         </p:txBody>
       </p:sp>
@@ -855,6 +1027,92 @@
             <a:fld id="{F7021451-1387-4CA6-816F-3879F97B5CBC}" type="slidenum">
               <a:rPr lang="en-US"/>
               <a:t>1</a:t>
+            </a:fld>
+            <a:endParaRPr lang="en-US"/>
+          </a:p>
+        </p:txBody>
+      </p:sp>
+    </p:spTree>
+    <p:extLst>
+      <p:ext uri="{BB962C8B-B14F-4D97-AF65-F5344CB8AC3E}">
+        <p14:creationId xmlns:p14="http://schemas.microsoft.com/office/powerpoint/2010/main" val="1024086991"/>
+      </p:ext>
+    </p:extLst>
+  </p:cSld>
+  <p:clrMapOvr>
+    <a:masterClrMapping/>
+  </p:clrMapOvr>
+</p:notes>
+</file>
+
+<file path=ppt/notesSlides/notesSlide10.xml><?xml version="1.0" encoding="utf-8"?>
+<p:notes xmlns:a="http://schemas.openxmlformats.org/drawingml/2006/main" xmlns:r="http://schemas.openxmlformats.org/officeDocument/2006/relationships" xmlns:p="http://schemas.openxmlformats.org/presentationml/2006/main">
+  <p:cSld>
+    <p:spTree>
+      <p:nvGrpSpPr>
+        <p:cNvPr id="1" name=""/>
+        <p:cNvGrpSpPr/>
+        <p:nvPr/>
+      </p:nvGrpSpPr>
+      <p:grpSpPr>
+        <a:xfrm>
+          <a:off x="0" y="0"/>
+          <a:ext cx="0" cy="0"/>
+          <a:chOff x="0" y="0"/>
+          <a:chExt cx="0" cy="0"/>
+        </a:xfrm>
+      </p:grpSpPr>
+      <p:sp>
+        <p:nvSpPr>
+          <p:cNvPr id="2" name="Slide Image Placeholder 1"/>
+          <p:cNvSpPr>
+            <a:spLocks noGrp="1" noRot="1" noChangeAspect="1"/>
+          </p:cNvSpPr>
+          <p:nvPr>
+            <p:ph type="sldImg"/>
+          </p:nvPr>
+        </p:nvSpPr>
+        <p:spPr/>
+      </p:sp>
+      <p:sp>
+        <p:nvSpPr>
+          <p:cNvPr id="3" name="Notes Placeholder 2"/>
+          <p:cNvSpPr>
+            <a:spLocks noGrp="1"/>
+          </p:cNvSpPr>
+          <p:nvPr>
+            <p:ph type="body" idx="1"/>
+          </p:nvPr>
+        </p:nvSpPr>
+        <p:spPr/>
+        <p:txBody>
+          <a:bodyPr/>
+          <a:lstStyle/>
+          <a:p>
+            <a:r>
+              <a:t>Los Sprints 4 y 5 concentran el mayor riesgo: la API de IA, la curva de aprendizaje de GCP y un plazo corto: el 17 de noviembre el proyecto debe estar terminado y funcionando sin errores. Si el Sprint 5 no alcanza, se prioriza CI/CD y pruebas E2E, luego el informe y al final el despliegue, con la demo local como respaldo.</a:t>
+            </a:r>
+          </a:p>
+        </p:txBody>
+      </p:sp>
+      <p:sp>
+        <p:nvSpPr>
+          <p:cNvPr id="4" name="Slide Number Placeholder 3"/>
+          <p:cNvSpPr>
+            <a:spLocks noGrp="1"/>
+          </p:cNvSpPr>
+          <p:nvPr>
+            <p:ph type="sldNum" sz="quarter" idx="10"/>
+          </p:nvPr>
+        </p:nvSpPr>
+        <p:spPr/>
+        <p:txBody>
+          <a:bodyPr/>
+          <a:lstStyle/>
+          <a:p>
+            <a:fld id="{F7021451-1387-4CA6-816F-3879F97B5CBC}" type="slidenum">
+              <a:rPr lang="en-US"/>
+              <a:t>10</a:t>
             </a:fld>
             <a:endParaRPr lang="en-US"/>
           </a:p>
@@ -918,10 +1176,8 @@
           <a:lstStyle/>
           <a:p>
             <a:r>
-              <a:rPr lang="en-US" dirty="0"/>
-              <a:t>Tres de cinco sprints completados. Los seis objetivos específicos de la Fase 1 se mantienen; solo ajustamos la metodología y lo justificamos en la guía 2.4.</a:t>
-            </a:r>
-            <a:endParaRPr lang="en-US" dirty="0"/>
+              <a:t>Tres de cinco sprints completados. Los seis objetivos específicos de la Fase 1 se mantienen. Hay 38 pruebas automatizadas en el backend; las pruebas del frontend llegan en el Sprint 4. Los ajustes de metodología y calendario se justifican en la guía 2.4.</a:t>
+            </a:r>
           </a:p>
         </p:txBody>
       </p:sp>
@@ -1006,10 +1262,8 @@
           <a:lstStyle/>
           <a:p>
             <a:r>
-              <a:rPr lang="en-US" dirty="0"/>
-              <a:t>Flujo completo del prototipo: cargar el archivo, auditarlo contra las reglas SLA, revisar resultados y generar el reclamo. La IA nunca modifica montos.</a:t>
-            </a:r>
-            <a:endParaRPr lang="en-US" dirty="0"/>
+              <a:t>Flujo actual del prototipo: cargar el archivo, auditarlo contra las reglas SLA, revisar resultados y descargar los incumplimientos. La carta de reclamo con IA se construye en el Sprint 4 y nunca modificará los montos.</a:t>
+            </a:r>
           </a:p>
         </p:txBody>
       </p:sp>
@@ -1094,10 +1348,8 @@
           <a:lstStyle/>
           <a:p>
             <a:r>
-              <a:rPr lang="en-US" dirty="0"/>
-              <a:t>El Sprint 1 se extendió a seis semanas, como ya preveía el plan de la Fase 1, porque el backend se retomó desde cero. No hay actividades retrasadas: los Sprints 4 y 5 corresponden a las semanas 11 a 15.</a:t>
-            </a:r>
-            <a:endParaRPr lang="en-US" dirty="0"/>
+              <a:t>El Sprint 1 se extendió a seis semanas porque el backend se retomó desde cero. El Sprint 3 se planificó con 36 puntos y se completaron 20: los gráficos y la IA pasan al Sprint 4. La clase del 13 de octubre se suspendió por un temporal de lluvia y viento, y la del 20 de octubre fue en línea, con las instrucciones para esta presentación. Por eso las semanas 11 y 12 se destinaron al cierre de la Fase 2 y la IA y la migración a PostgreSQL se corrieron: el Sprint 4 va del 28 de octubre al 9 de noviembre y el Sprint 5 del 10 al 16 de noviembre, porque el martes 17 de noviembre (semana 15) el proyecto debe estar terminado y funcionando sin errores. Defensa: 1 de diciembre.</a:t>
+            </a:r>
           </a:p>
         </p:txBody>
       </p:sp>
@@ -1161,7 +1413,7 @@
             <a:spLocks noGrp="1" noRot="1" noChangeAspect="1"/>
           </p:cNvSpPr>
           <p:nvPr>
-            <p:ph type="sldImg"/>
+            <p:ph type="sldImg" idx="2"/>
           </p:nvPr>
         </p:nvSpPr>
         <p:spPr/>
@@ -1173,7 +1425,7 @@
             <a:spLocks noGrp="1"/>
           </p:cNvSpPr>
           <p:nvPr>
-            <p:ph type="body" idx="1"/>
+            <p:ph type="body" sz="quarter" idx="3"/>
           </p:nvPr>
         </p:nvSpPr>
         <p:spPr/>
@@ -1182,10 +1434,8 @@
           <a:lstStyle/>
           <a:p>
             <a:r>
-              <a:rPr lang="en-US" dirty="0"/>
-              <a:t>Diagrama entidad-relación completo en el Anexo A de la guía 2.4 y en la carpeta de evidencias de base de datos.</a:t>
-            </a:r>
-            <a:endParaRPr lang="en-US" dirty="0"/>
+              <a:t>El Sprint 3 empezó lento porque definimos el contrato de cada endpoint antes de programar, para que backend y frontend avanzaran en paralelo. Cerramos con 0 puntos pendientes de los 20 comprometidos. Los 16 puntos de gráficos e IA pasaron al Sprint 4. Nuestra velocidad real está entre 20 y 24 puntos por sprint de dos semanas.</a:t>
+            </a:r>
           </a:p>
         </p:txBody>
       </p:sp>
@@ -1196,28 +1446,12 @@
             <a:spLocks noGrp="1"/>
           </p:cNvSpPr>
           <p:nvPr>
-            <p:ph type="sldNum" sz="quarter" idx="10"/>
+            <p:ph type="sldNum" sz="quarter" idx="5"/>
           </p:nvPr>
         </p:nvSpPr>
         <p:spPr/>
-        <p:txBody>
-          <a:bodyPr/>
-          <a:lstStyle/>
-          <a:p>
-            <a:fld id="{F7021451-1387-4CA6-816F-3879F97B5CBC}" type="slidenum">
-              <a:rPr lang="en-US"/>
-              <a:t>5</a:t>
-            </a:fld>
-            <a:endParaRPr lang="en-US"/>
-          </a:p>
-        </p:txBody>
       </p:sp>
     </p:spTree>
-    <p:extLst>
-      <p:ext uri="{BB962C8B-B14F-4D97-AF65-F5344CB8AC3E}">
-        <p14:creationId xmlns:p14="http://schemas.microsoft.com/office/powerpoint/2010/main" val="1024086991"/>
-      </p:ext>
-    </p:extLst>
   </p:cSld>
   <p:clrMapOvr>
     <a:masterClrMapping/>
@@ -1271,9 +1505,8 @@
           <a:p>
             <a:r>
               <a:rPr lang="en-US" dirty="0"/>
-              <a:t>Las pruebas se escribieron junto al código en cada sprint. Faltan las pruebas end-to-end con Playwright, que corresponden al Sprint 4.</a:t>
-            </a:r>
-            <a:endParaRPr lang="en-US" dirty="0"/>
+              <a:t>Diagrama entidad-relación completo en el Anexo A de la guía 2.4 y en la carpeta de evidencias de base de datos.</a:t>
+            </a:r>
           </a:p>
         </p:txBody>
       </p:sp>
@@ -1358,10 +1591,8 @@
           <a:lstStyle/>
           <a:p>
             <a:r>
-              <a:rPr lang="en-US" dirty="0"/>
-              <a:t>Cada ajuste está justificado en la sección 3 de la guía 2.4. Los objetivos no cambian; los cambios son de metodología y alcance acotado.</a:t>
-            </a:r>
-            <a:endParaRPr lang="en-US" dirty="0"/>
+              <a:t>Las 38 pruebas se escribieron junto al código en cada sprint y no dependen de red ni de una base de datos externa. Las pruebas del frontend con node:test se agregan en el Sprint 4 y las end-to-end con Playwright en el Sprint 5.</a:t>
+            </a:r>
           </a:p>
         </p:txBody>
       </p:sp>
@@ -1446,10 +1677,8 @@
           <a:lstStyle/>
           <a:p>
             <a:r>
-              <a:rPr lang="en-US" dirty="0"/>
-              <a:t>Cada dificultad tiene una acción concreta ya aplicada. El bloqueo del computador de la práctica profesional se resolvió probando en equipos personales.</a:t>
-            </a:r>
-            <a:endParaRPr lang="en-US" dirty="0"/>
+              <a:t>Cada ajuste está justificado en la sección 3 de la guía 2.4. Los objetivos no cambian. El ajuste más importante es la replanificación del Sprint 3 por sobrecompromiso: se mueven los gráficos y la IA al Sprint 4. Además, por la clase suspendida del 13 de octubre y la clase en línea del 20 de octubre, el Sprint 4 parte el 28 de octubre y el Sprint 5 termina el 16 de noviembre, un día antes de la entrega.</a:t>
+            </a:r>
           </a:p>
         </p:txBody>
       </p:sp>
@@ -1534,10 +1763,8 @@
           <a:lstStyle/>
           <a:p>
             <a:r>
-              <a:rPr lang="en-US" dirty="0"/>
-              <a:t>El Sprint 4 concentra el mayor riesgo técnico por la curva de aprendizaje de GCP. Las medidas permiten que las pruebas automáticas corran desde el inicio y que la demostración no dependa de la nube.</a:t>
-            </a:r>
-            <a:endParaRPr lang="en-US" dirty="0"/>
+              <a:t>Cada dificultad tiene una acción concreta. El bloqueo del computador de la práctica se resolvió probando en equipos personales. El sobrecompromiso del Sprint 3 nos llevó a planificar con la velocidad real del equipo, entre 20 y 24 puntos por sprint.</a:t>
+            </a:r>
           </a:p>
         </p:txBody>
       </p:sp>
@@ -1615,6 +1842,7 @@
         <a:solidFill>
           <a:srgbClr val="12263F"/>
         </a:solidFill>
+        <a:effectLst/>
       </p:bgPr>
     </p:bg>
     <p:spTree>
@@ -1647,6 +1875,7 @@
         <a:solidFill>
           <a:srgbClr val="FFFFFF"/>
         </a:solidFill>
+        <a:effectLst/>
       </p:bgPr>
     </p:bg>
     <p:spTree>
@@ -1684,7 +1913,7 @@
           <a:bodyPr wrap="square" lIns="0" tIns="0" rIns="0" bIns="0" rtlCol="0" anchor="ctr"/>
           <a:lstStyle/>
           <a:p>
-            <a:pPr indent="0" marL="0">
+            <a:pPr marL="0" indent="0">
               <a:buNone/>
             </a:pPr>
             <a:r>
@@ -1702,9 +1931,11 @@
       <p:sp>
         <p:nvSpPr>
           <p:cNvPr id="3" name="Text 1"/>
-          <p:cNvSpPr/>
+          <p:cNvSpPr>
+            <a:spLocks noGrp="1"/>
+          </p:cNvSpPr>
           <p:nvPr>
-            <p:ph idx="101" type="title" hasCustomPrompt="1"/>
+            <p:ph type="title" idx="101" hasCustomPrompt="1"/>
           </p:nvPr>
         </p:nvSpPr>
         <p:spPr>
@@ -1721,7 +1952,7 @@
         <p:txBody>
           <a:bodyPr wrap="square" rtlCol="0"/>
           <a:lstStyle>
-            <a:lvl1pPr indent="0" marL="0">
+            <a:lvl1pPr marL="0" indent="0">
               <a:buNone/>
               <a:defRPr lang="en-US" sz="3400" b="1" dirty="0">
                 <a:solidFill>
@@ -1731,7 +1962,7 @@
             </a:lvl1pPr>
           </a:lstStyle>
           <a:p>
-            <a:pPr indent="0" marL="0">
+            <a:pPr marL="0" indent="0">
               <a:buNone/>
             </a:pPr>
             <a:endParaRPr lang="en-US" sz="3400" dirty="0"/>
@@ -1758,7 +1989,7 @@
           </a:prstGeom>
           <a:extLst>
             <a:ext uri="{C572A759-6A51-4108-AA02-DFA0A04FC94B}">
-              <ma14:wrappingTextBoxFlag xmlns:ma14="http://schemas.microsoft.com/office/mac/drawingml/2011/main" val="0"/>
+              <ma14:wrappingTextBoxFlag xmlns:ma14="http://schemas.microsoft.com/office/mac/drawingml/2011/main" xmlns="" val="0"/>
             </a:ext>
           </a:extLst>
         </p:spPr>
@@ -1776,8 +2007,8 @@
           <a:p>
             <a:pPr algn="r"/>
             <a:fld id="{F7021451-1387-4CA6-816F-3879F97B5CBC}" type="slidenum">
-              <a:rPr b="0" lang="en-US"/>
-              <a:t>1003</a:t>
+              <a:rPr lang="en-US" b="0"/>
+              <a:t>‹Nº›</a:t>
             </a:fld>
             <a:endParaRPr lang="en-US"/>
           </a:p>
@@ -1794,6 +2025,11 @@
 <file path=ppt/slideMasters/slideMaster1.xml><?xml version="1.0" encoding="utf-8"?>
 <p:sldMaster xmlns:a="http://schemas.openxmlformats.org/drawingml/2006/main" xmlns:r="http://schemas.openxmlformats.org/officeDocument/2006/relationships" xmlns:p="http://schemas.openxmlformats.org/presentationml/2006/main">
   <p:cSld>
+    <p:bg>
+      <p:bgRef idx="1001">
+        <a:schemeClr val="bg1"/>
+      </p:bgRef>
+    </p:bg>
     <p:spTree>
       <p:nvGrpSpPr>
         <p:cNvPr id="1" name=""/>
@@ -1828,7 +2064,7 @@
           </a:prstGeom>
           <a:extLst>
             <a:ext uri="{C572A759-6A51-4108-AA02-DFA0A04FC94B}">
-              <ma14:wrappingTextBoxFlag xmlns:ma14="http://schemas.microsoft.com/office/mac/drawingml/2011/main" val="0"/>
+              <ma14:wrappingTextBoxFlag xmlns:ma14="http://schemas.microsoft.com/office/mac/drawingml/2011/main" xmlns="" val="0"/>
             </a:ext>
           </a:extLst>
         </p:spPr>
@@ -1846,8 +2082,8 @@
           <a:p>
             <a:pPr algn="r"/>
             <a:fld id="{F7021451-1387-4CA6-816F-3879F97B5CBC}" type="slidenum">
-              <a:rPr b="0" lang="en-US"/>
-              <a:t>null</a:t>
+              <a:rPr lang="en-US" b="0"/>
+              <a:t>‹Nº›</a:t>
             </a:fld>
             <a:endParaRPr lang="en-US"/>
           </a:p>
@@ -2153,7 +2389,7 @@
           <a:bodyPr wrap="square" lIns="0" tIns="0" rIns="0" bIns="0" rtlCol="0" anchor="ctr"/>
           <a:lstStyle/>
           <a:p>
-            <a:pPr indent="0" marL="0">
+            <a:pPr marL="0" indent="0">
               <a:buNone/>
             </a:pPr>
             <a:r>
@@ -2192,7 +2428,7 @@
           <a:bodyPr wrap="square" lIns="0" tIns="0" rIns="0" bIns="0" rtlCol="0" anchor="t"/>
           <a:lstStyle/>
           <a:p>
-            <a:pPr indent="0" marL="0">
+            <a:pPr marL="0" indent="0">
               <a:buNone/>
             </a:pPr>
             <a:r>
@@ -2228,7 +2464,7 @@
           <a:bodyPr wrap="square" lIns="0" tIns="0" rIns="0" bIns="0" rtlCol="0" anchor="ctr"/>
           <a:lstStyle/>
           <a:p>
-            <a:pPr indent="0" marL="0">
+            <a:pPr marL="0" indent="0">
               <a:buNone/>
             </a:pPr>
             <a:r>
@@ -2264,7 +2500,7 @@
           <a:bodyPr wrap="square" lIns="0" tIns="0" rIns="0" bIns="0" rtlCol="0" anchor="t"/>
           <a:lstStyle/>
           <a:p>
-            <a:pPr indent="0" marL="0">
+            <a:pPr marL="0" indent="0">
               <a:buNone/>
             </a:pPr>
             <a:r>
@@ -2278,7 +2514,7 @@
             <a:endParaRPr lang="en-US" sz="1400" dirty="0"/>
           </a:p>
           <a:p>
-            <a:pPr indent="0" marL="0">
+            <a:pPr marL="0" indent="0">
               <a:buNone/>
             </a:pPr>
             <a:r>
@@ -2293,25 +2529,236 @@
           </a:p>
         </p:txBody>
       </p:sp>
-      <p:sp>
-        <p:nvSpPr>
-          <p:cNvPr id="6" name="Circulo avance"/>
+      <p:pic>
+        <p:nvPicPr>
+          <p:cNvPr id="10" name="Imagen 9">
+            <a:extLst>
+              <a:ext uri="{FF2B5EF4-FFF2-40B4-BE49-F238E27FC236}">
+                <a16:creationId xmlns:a16="http://schemas.microsoft.com/office/drawing/2014/main" id="{8F3F884F-B5E2-F6D0-67FF-BBE4D45A3777}"/>
+              </a:ext>
+            </a:extLst>
+          </p:cNvPr>
+          <p:cNvPicPr>
+            <a:picLocks noChangeAspect="1"/>
+          </p:cNvPicPr>
+          <p:nvPr/>
+        </p:nvPicPr>
+        <p:blipFill>
+          <a:blip r:embed="rId3"/>
+          <a:stretch>
+            <a:fillRect/>
+          </a:stretch>
+        </p:blipFill>
+        <p:spPr>
+          <a:xfrm>
+            <a:off x="5119782" y="1911231"/>
+            <a:ext cx="3475578" cy="1115299"/>
+          </a:xfrm>
+          <a:prstGeom prst="rect">
+            <a:avLst/>
+          </a:prstGeom>
+          <a:ln>
+            <a:noFill/>
+          </a:ln>
+          <a:effectLst>
+            <a:softEdge rad="112500"/>
+          </a:effectLst>
+        </p:spPr>
+      </p:pic>
+    </p:spTree>
+  </p:cSld>
+  <p:clrMapOvr>
+    <a:masterClrMapping/>
+  </p:clrMapOvr>
+</p:sld>
+</file>
+
+<file path=ppt/slides/slide10.xml><?xml version="1.0" encoding="utf-8"?>
+<p:sld xmlns:a="http://schemas.openxmlformats.org/drawingml/2006/main" xmlns:r="http://schemas.openxmlformats.org/officeDocument/2006/relationships" xmlns:p="http://schemas.openxmlformats.org/presentationml/2006/main">
+  <p:cSld name="Slide 9">
+    <p:spTree>
+      <p:nvGrpSpPr>
+        <p:cNvPr id="1" name=""/>
+        <p:cNvGrpSpPr/>
+        <p:nvPr/>
+      </p:nvGrpSpPr>
+      <p:grpSpPr>
+        <a:xfrm>
+          <a:off x="0" y="0"/>
+          <a:ext cx="0" cy="0"/>
+          <a:chOff x="0" y="0"/>
+          <a:chExt cx="0" cy="0"/>
+        </a:xfrm>
+      </p:grpSpPr>
+      <p:sp>
+        <p:nvSpPr>
+          <p:cNvPr id="2" name="Text 1"/>
+          <p:cNvSpPr>
+            <a:spLocks noGrp="1"/>
+          </p:cNvSpPr>
+          <p:nvPr>
+            <p:ph type="title" idx="101" hasCustomPrompt="1"/>
+          </p:nvPr>
+        </p:nvSpPr>
+        <p:spPr>
+          <a:xfrm>
+            <a:off x="457200" y="320040"/>
+            <a:ext cx="8229600" cy="685800"/>
+          </a:xfrm>
+          <a:prstGeom prst="rect">
+            <a:avLst/>
+          </a:prstGeom>
+          <a:noFill/>
+          <a:ln/>
+        </p:spPr>
+        <p:txBody>
+          <a:bodyPr wrap="square" lIns="0" tIns="0" rIns="0" bIns="0" rtlCol="0" anchor="ctr"/>
+          <a:lstStyle/>
+          <a:p>
+            <a:pPr marL="0" indent="0">
+              <a:buNone/>
+            </a:pPr>
+            <a:r>
+              <a:rPr lang="en-US" sz="3400" b="1" dirty="0">
+                <a:solidFill>
+                  <a:schemeClr val="tx2"/>
+                </a:solidFill>
+              </a:rPr>
+              <a:t>Próximos pasos: Sprints 4 y 5</a:t>
+            </a:r>
+            <a:endParaRPr lang="en-US" sz="3400" dirty="0"/>
+          </a:p>
+        </p:txBody>
+      </p:sp>
+      <p:sp>
+        <p:nvSpPr>
+          <p:cNvPr id="3" name="Tarjeta Sprint 4 · Semanas 11 y 12"/>
           <p:cNvSpPr/>
           <p:nvPr/>
         </p:nvSpPr>
         <p:spPr>
           <a:xfrm>
-            <a:off x="5760720" y="1051560"/>
-            <a:ext cx="2926080" cy="2926080"/>
-          </a:xfrm>
-          <a:prstGeom prst="ellipse">
-            <a:avLst/>
+            <a:off x="457200" y="1188720"/>
+            <a:ext cx="4114800" cy="1691640"/>
+          </a:xfrm>
+          <a:prstGeom prst="roundRect">
+            <a:avLst>
+              <a:gd name="adj" fmla="val 5405"/>
+            </a:avLst>
           </a:prstGeom>
           <a:solidFill>
-            <a:schemeClr val="accent1"/>
+            <a:schemeClr val="bg2"/>
           </a:solidFill>
           <a:ln/>
         </p:spPr>
+        <p:txBody>
+          <a:bodyPr/>
+          <a:lstStyle/>
+          <a:p>
+            <a:endParaRPr/>
+          </a:p>
+        </p:txBody>
+      </p:sp>
+      <p:sp>
+        <p:nvSpPr>
+          <p:cNvPr id="4" name="Text 2"/>
+          <p:cNvSpPr txBox="1"/>
+          <p:nvPr/>
+        </p:nvSpPr>
+        <p:spPr>
+          <a:xfrm>
+            <a:off x="640080" y="1298448"/>
+            <a:ext cx="3749040" cy="365760"/>
+          </a:xfrm>
+          <a:prstGeom prst="rect">
+            <a:avLst/>
+          </a:prstGeom>
+          <a:noFill/>
+          <a:ln/>
+        </p:spPr>
+        <p:txBody>
+          <a:bodyPr wrap="square" lIns="0" tIns="0" rIns="0" bIns="0" rtlCol="0" anchor="ctr"/>
+          <a:lstStyle/>
+          <a:p>
+            <a:pPr marL="0" indent="0">
+              <a:buNone/>
+            </a:pPr>
+            <a:r>
+              <a:rPr lang="en-US" sz="1600" b="1" dirty="0">
+                <a:solidFill>
+                  <a:schemeClr val="tx2"/>
+                </a:solidFill>
+              </a:rPr>
+              <a:t>Sprint 4 · 28 de octubre al 9 de noviembre</a:t>
+            </a:r>
+            <a:endParaRPr lang="en-US" sz="1600" dirty="0"/>
+          </a:p>
+        </p:txBody>
+      </p:sp>
+      <p:sp>
+        <p:nvSpPr>
+          <p:cNvPr id="5" name="Text 3"/>
+          <p:cNvSpPr txBox="1"/>
+          <p:nvPr/>
+        </p:nvSpPr>
+        <p:spPr>
+          <a:xfrm>
+            <a:off x="640080" y="1737360"/>
+            <a:ext cx="3749040" cy="1051560"/>
+          </a:xfrm>
+          <a:prstGeom prst="rect">
+            <a:avLst/>
+          </a:prstGeom>
+          <a:noFill/>
+          <a:ln/>
+        </p:spPr>
+        <p:txBody>
+          <a:bodyPr wrap="square" lIns="0" tIns="0" rIns="0" bIns="0" rtlCol="0" anchor="t"/>
+          <a:lstStyle/>
+          <a:p>
+            <a:pPr marL="0" indent="0">
+              <a:buNone/>
+            </a:pPr>
+            <a:r>
+              <a:rPr lang="en-US" sz="1400" dirty="0">
+                <a:solidFill>
+                  <a:schemeClr val="tx1"/>
+                </a:solidFill>
+              </a:rPr>
+              <a:t>Carta de reclamo y resumen ejecutivo con IA (con plantilla de respaldo), gráficos de multa y atraso, PostgreSQL con Alembic, Docker y pruebas del frontend.</a:t>
+            </a:r>
+            <a:endParaRPr lang="en-US" sz="1400" dirty="0"/>
+          </a:p>
+        </p:txBody>
+      </p:sp>
+      <p:sp>
+        <p:nvSpPr>
+          <p:cNvPr id="6" name="Tarjeta Sprint 5 · Semanas 13 a 15"/>
+          <p:cNvSpPr/>
+          <p:nvPr/>
+        </p:nvSpPr>
+        <p:spPr>
+          <a:xfrm>
+            <a:off x="457200" y="3017520"/>
+            <a:ext cx="4114800" cy="1691640"/>
+          </a:xfrm>
+          <a:prstGeom prst="roundRect">
+            <a:avLst>
+              <a:gd name="adj" fmla="val 5405"/>
+            </a:avLst>
+          </a:prstGeom>
+          <a:solidFill>
+            <a:schemeClr val="bg2"/>
+          </a:solidFill>
+          <a:ln/>
+        </p:spPr>
+        <p:txBody>
+          <a:bodyPr/>
+          <a:lstStyle/>
+          <a:p>
+            <a:endParaRPr/>
+          </a:p>
+        </p:txBody>
       </p:sp>
       <p:sp>
         <p:nvSpPr>
@@ -2321,8 +2768,8 @@
         </p:nvSpPr>
         <p:spPr>
           <a:xfrm>
-            <a:off x="5760720" y="1828800"/>
-            <a:ext cx="2926080" cy="822960"/>
+            <a:off x="640080" y="3127248"/>
+            <a:ext cx="3749040" cy="365760"/>
           </a:xfrm>
           <a:prstGeom prst="rect">
             <a:avLst/>
@@ -2334,21 +2781,18 @@
           <a:bodyPr wrap="square" lIns="0" tIns="0" rIns="0" bIns="0" rtlCol="0" anchor="ctr"/>
           <a:lstStyle/>
           <a:p>
-            <a:pPr algn="ctr" indent="0" marL="0">
-              <a:buNone/>
-            </a:pPr>
-            <a:r>
-              <a:rPr lang="en-US" sz="4800" b="1" dirty="0">
+            <a:pPr marL="0" indent="0">
+              <a:buNone/>
+            </a:pPr>
+            <a:r>
+              <a:rPr lang="en-US" sz="1600" b="1" dirty="0">
                 <a:solidFill>
                   <a:schemeClr val="tx2"/>
                 </a:solidFill>
-                <a:latin typeface="Cambria" pitchFamily="34" charset="0"/>
-                <a:ea typeface="Cambria" pitchFamily="34" charset="-122"/>
-                <a:cs typeface="Cambria" pitchFamily="34" charset="-120"/>
-              </a:rPr>
-              <a:t>3 de 5</a:t>
-            </a:r>
-            <a:endParaRPr lang="en-US" sz="4800" dirty="0"/>
+              </a:rPr>
+              <a:t>Sprint 5 · 10 al 16 de noviembre</a:t>
+            </a:r>
+            <a:endParaRPr lang="en-US" sz="1600" dirty="0"/>
           </a:p>
         </p:txBody>
       </p:sp>
@@ -2360,8 +2804,8 @@
         </p:nvSpPr>
         <p:spPr>
           <a:xfrm>
-            <a:off x="5760720" y="2606040"/>
-            <a:ext cx="2926080" cy="411480"/>
+            <a:off x="640080" y="3566160"/>
+            <a:ext cx="3749040" cy="1051560"/>
           </a:xfrm>
           <a:prstGeom prst="rect">
             <a:avLst/>
@@ -2373,18 +2817,222 @@
           <a:bodyPr wrap="square" lIns="0" tIns="0" rIns="0" bIns="0" rtlCol="0" anchor="t"/>
           <a:lstStyle/>
           <a:p>
-            <a:pPr algn="ctr" indent="0" marL="0">
-              <a:buNone/>
-            </a:pPr>
-            <a:r>
-              <a:rPr lang="en-US" sz="1800" dirty="0">
-                <a:solidFill>
-                  <a:schemeClr val="tx2"/>
-                </a:solidFill>
-              </a:rPr>
-              <a:t>sprints completados</a:t>
-            </a:r>
-            <a:endParaRPr lang="en-US" sz="1800" dirty="0"/>
+            <a:pPr marL="0" indent="0">
+              <a:buNone/>
+            </a:pPr>
+            <a:r>
+              <a:rPr lang="en-US" sz="1400" dirty="0">
+                <a:solidFill>
+                  <a:schemeClr val="tx1"/>
+                </a:solidFill>
+              </a:rPr>
+              <a:t>CI/CD con GitHub Actions, pruebas E2E con Playwright, despliegue en Cloud Run e informe final. 17 de noviembre: proyecto terminado y funcionando.</a:t>
+            </a:r>
+            <a:endParaRPr lang="en-US" sz="1400" dirty="0"/>
+          </a:p>
+        </p:txBody>
+      </p:sp>
+      <p:sp>
+        <p:nvSpPr>
+          <p:cNvPr id="9" name="Tarjeta riesgo GCP"/>
+          <p:cNvSpPr/>
+          <p:nvPr/>
+        </p:nvSpPr>
+        <p:spPr>
+          <a:xfrm>
+            <a:off x="4800600" y="1188720"/>
+            <a:ext cx="3886200" cy="3520440"/>
+          </a:xfrm>
+          <a:prstGeom prst="roundRect">
+            <a:avLst>
+              <a:gd name="adj" fmla="val 2597"/>
+            </a:avLst>
+          </a:prstGeom>
+          <a:solidFill>
+            <a:schemeClr val="tx2"/>
+          </a:solidFill>
+          <a:ln/>
+        </p:spPr>
+        <p:txBody>
+          <a:bodyPr/>
+          <a:lstStyle/>
+          <a:p>
+            <a:endParaRPr/>
+          </a:p>
+        </p:txBody>
+      </p:sp>
+      <p:sp>
+        <p:nvSpPr>
+          <p:cNvPr id="10" name="Text 8"/>
+          <p:cNvSpPr txBox="1"/>
+          <p:nvPr/>
+        </p:nvSpPr>
+        <p:spPr>
+          <a:xfrm>
+            <a:off x="4983480" y="1298448"/>
+            <a:ext cx="3520440" cy="411480"/>
+          </a:xfrm>
+          <a:prstGeom prst="rect">
+            <a:avLst/>
+          </a:prstGeom>
+          <a:noFill/>
+          <a:ln/>
+        </p:spPr>
+        <p:txBody>
+          <a:bodyPr wrap="square" lIns="0" tIns="0" rIns="0" bIns="0" rtlCol="0" anchor="ctr"/>
+          <a:lstStyle/>
+          <a:p>
+            <a:pPr marL="0" indent="0">
+              <a:buNone/>
+            </a:pPr>
+            <a:r>
+              <a:rPr lang="en-US" sz="1600" b="1" dirty="0">
+                <a:solidFill>
+                  <a:schemeClr val="accent1"/>
+                </a:solidFill>
+              </a:rPr>
+              <a:t>Medidas ante los riesgos</a:t>
+            </a:r>
+            <a:endParaRPr lang="en-US" sz="1600" dirty="0"/>
+          </a:p>
+        </p:txBody>
+      </p:sp>
+      <p:sp>
+        <p:nvSpPr>
+          <p:cNvPr id="11" name="Text 9"/>
+          <p:cNvSpPr txBox="1"/>
+          <p:nvPr/>
+        </p:nvSpPr>
+        <p:spPr>
+          <a:xfrm>
+            <a:off x="4983480" y="1783080"/>
+            <a:ext cx="3520440" cy="2788920"/>
+          </a:xfrm>
+          <a:prstGeom prst="rect">
+            <a:avLst/>
+          </a:prstGeom>
+          <a:noFill/>
+          <a:ln/>
+        </p:spPr>
+        <p:txBody>
+          <a:bodyPr wrap="square" lIns="0" tIns="0" rIns="0" bIns="0" rtlCol="0" anchor="t"/>
+          <a:lstStyle/>
+          <a:p>
+            <a:pPr marL="342900" indent="-342900">
+              <a:spcAft>
+                <a:spcPts val="800"/>
+              </a:spcAft>
+              <a:buSzPct val="100000"/>
+              <a:buChar char="•"/>
+            </a:pPr>
+            <a:r>
+              <a:rPr lang="en-US" sz="1400" dirty="0">
+                <a:solidFill>
+                  <a:schemeClr val="bg1"/>
+                </a:solidFill>
+              </a:rPr>
+              <a:t>Priorizar la IA al inicio del Sprint 4 y revisar el burndown a diario</a:t>
+            </a:r>
+            <a:endParaRPr lang="en-US" sz="1400" dirty="0"/>
+          </a:p>
+          <a:p>
+            <a:pPr marL="342900" indent="-342900">
+              <a:spcAft>
+                <a:spcPts val="800"/>
+              </a:spcAft>
+              <a:buSzPct val="100000"/>
+              <a:buChar char="•"/>
+            </a:pPr>
+            <a:r>
+              <a:rPr lang="en-US" sz="1400" dirty="0">
+                <a:solidFill>
+                  <a:schemeClr val="bg1"/>
+                </a:solidFill>
+              </a:rPr>
+              <a:t>Plantilla de respaldo si la API de IA falla o demora</a:t>
+            </a:r>
+            <a:endParaRPr lang="en-US" sz="1400" dirty="0"/>
+          </a:p>
+          <a:p>
+            <a:pPr marL="342900" indent="-342900">
+              <a:spcAft>
+                <a:spcPts val="800"/>
+              </a:spcAft>
+              <a:buSzPct val="100000"/>
+              <a:buChar char="•"/>
+            </a:pPr>
+            <a:r>
+              <a:rPr lang="en-US" sz="1400" dirty="0">
+                <a:solidFill>
+                  <a:schemeClr val="bg1"/>
+                </a:solidFill>
+              </a:rPr>
+              <a:t>Dockerfile en el Sprint 4 y GitHub Actions antes de configurar Cloud Run</a:t>
+            </a:r>
+            <a:endParaRPr lang="en-US" sz="1400" dirty="0"/>
+          </a:p>
+          <a:p>
+            <a:pPr marL="342900" indent="-342900">
+              <a:spcAft>
+                <a:spcPts val="800"/>
+              </a:spcAft>
+              <a:buSzPct val="100000"/>
+              <a:buChar char="•"/>
+            </a:pPr>
+            <a:r>
+              <a:rPr lang="en-US" sz="1400" dirty="0">
+                <a:solidFill>
+                  <a:schemeClr val="bg1"/>
+                </a:solidFill>
+              </a:rPr>
+              <a:t>Demostración local como respaldo para la defensa</a:t>
+            </a:r>
+            <a:endParaRPr lang="en-US" sz="1400" dirty="0"/>
+          </a:p>
+        </p:txBody>
+      </p:sp>
+      <p:sp>
+        <p:nvSpPr>
+          <p:cNvPr id="25" name="Slide Number Placeholder 0"/>
+          <p:cNvSpPr>
+            <a:spLocks noGrp="1"/>
+          </p:cNvSpPr>
+          <p:nvPr>
+            <p:ph type="sldNum" sz="quarter" idx="4294967295"/>
+          </p:nvPr>
+        </p:nvSpPr>
+        <p:spPr>
+          <a:xfrm>
+            <a:off x="8229600" y="4846320"/>
+            <a:ext cx="457200" cy="228600"/>
+          </a:xfrm>
+          <a:prstGeom prst="rect">
+            <a:avLst/>
+          </a:prstGeom>
+          <a:extLst>
+            <a:ext uri="{C572A759-6A51-4108-AA02-DFA0A04FC94B}">
+              <ma14:wrappingTextBoxFlag xmlns:ma14="http://schemas.microsoft.com/office/mac/drawingml/2011/main" xmlns="" val="0"/>
+            </a:ext>
+          </a:extLst>
+        </p:spPr>
+        <p:txBody>
+          <a:bodyPr/>
+          <a:lstStyle>
+            <a:lvl1pPr>
+              <a:defRPr sz="1000">
+                <a:solidFill>
+                  <a:schemeClr val="accent5"/>
+                </a:solidFill>
+              </a:defRPr>
+            </a:lvl1pPr>
+          </a:lstStyle>
+          <a:p>
+            <a:pPr algn="r"/>
+            <a:fld id="{F7021451-1387-4CA6-816F-3879F97B5CBC}" type="slidenum">
+              <a:rPr lang="en-US" b="0"/>
+              <a:t>10</a:t>
+            </a:fld>
+            <a:endParaRPr lang="en-US"/>
           </a:p>
         </p:txBody>
       </p:sp>
@@ -2416,9 +3064,11 @@
       <p:sp>
         <p:nvSpPr>
           <p:cNvPr id="2" name="Text 1"/>
-          <p:cNvSpPr/>
+          <p:cNvSpPr>
+            <a:spLocks noGrp="1"/>
+          </p:cNvSpPr>
           <p:nvPr>
-            <p:ph idx="101" type="title" hasCustomPrompt="1"/>
+            <p:ph type="title" idx="101" hasCustomPrompt="1"/>
           </p:nvPr>
         </p:nvSpPr>
         <p:spPr>
@@ -2436,7 +3086,7 @@
           <a:bodyPr wrap="square" lIns="0" tIns="0" rIns="0" bIns="0" rtlCol="0" anchor="ctr"/>
           <a:lstStyle/>
           <a:p>
-            <a:pPr indent="0" marL="0">
+            <a:pPr marL="0" indent="0">
               <a:buNone/>
             </a:pPr>
             <a:r>
@@ -2472,7 +3122,7 @@
           <a:bodyPr wrap="square" lIns="0" tIns="0" rIns="0" bIns="0" rtlCol="0" anchor="ctr"/>
           <a:lstStyle/>
           <a:p>
-            <a:pPr indent="0" marL="0">
+            <a:pPr marL="0" indent="0">
               <a:buNone/>
             </a:pPr>
             <a:r>
@@ -2481,7 +3131,7 @@
                   <a:schemeClr val="tx1"/>
                 </a:solidFill>
               </a:rPr>
-              <a:t>Al cierre de la semana 10 se completaron los Sprints 1 a 3 del plan de la Fase 1.</a:t>
+              <a:t>Al cierre de la semana 10 se completaron los Sprints 1 a 3; el Sprint 3 cerró con alcance ajustado.</a:t>
             </a:r>
             <a:endParaRPr lang="en-US" sz="1600" dirty="0"/>
           </a:p>
@@ -2508,13 +3158,20 @@
           </a:solidFill>
           <a:ln/>
           <a:effectLst>
-            <a:outerShdw sx="100000" sy="100000" kx="0" ky="0" algn="bl" rotWithShape="0" blurRad="76200" dist="25400" dir="5400000">
+            <a:outerShdw blurRad="76200" dist="25400" dir="5400000" algn="bl" rotWithShape="0">
               <a:srgbClr val="000000">
                 <a:alpha val="12000"/>
               </a:srgbClr>
             </a:outerShdw>
           </a:effectLst>
         </p:spPr>
+        <p:txBody>
+          <a:bodyPr/>
+          <a:lstStyle/>
+          <a:p>
+            <a:endParaRPr/>
+          </a:p>
+        </p:txBody>
       </p:sp>
       <p:sp>
         <p:nvSpPr>
@@ -2537,7 +3194,7 @@
           <a:bodyPr wrap="square" lIns="0" tIns="0" rIns="0" bIns="0" rtlCol="0" anchor="ctr"/>
           <a:lstStyle/>
           <a:p>
-            <a:pPr algn="ctr" indent="0" marL="0">
+            <a:pPr marL="0" indent="0" algn="ctr">
               <a:buNone/>
             </a:pPr>
             <a:r>
@@ -2576,7 +3233,7 @@
           <a:bodyPr wrap="square" lIns="0" tIns="0" rIns="0" bIns="0" rtlCol="0" anchor="t"/>
           <a:lstStyle/>
           <a:p>
-            <a:pPr algn="ctr" indent="0" marL="0">
+            <a:pPr marL="0" indent="0" algn="ctr">
               <a:buNone/>
             </a:pPr>
             <a:r>
@@ -2585,7 +3242,7 @@
                   <a:schemeClr val="tx1"/>
                 </a:solidFill>
               </a:rPr>
-              <a:t>sprints completados dentro del plan</a:t>
+              <a:t>sprints completados</a:t>
             </a:r>
             <a:endParaRPr lang="en-US" sz="1400" dirty="0"/>
           </a:p>
@@ -2612,13 +3269,20 @@
           </a:solidFill>
           <a:ln/>
           <a:effectLst>
-            <a:outerShdw sx="100000" sy="100000" kx="0" ky="0" algn="bl" rotWithShape="0" blurRad="76200" dist="25400" dir="5400000">
+            <a:outerShdw blurRad="76200" dist="25400" dir="5400000" algn="bl" rotWithShape="0">
               <a:srgbClr val="000000">
                 <a:alpha val="12000"/>
               </a:srgbClr>
             </a:outerShdw>
           </a:effectLst>
         </p:spPr>
+        <p:txBody>
+          <a:bodyPr/>
+          <a:lstStyle/>
+          <a:p>
+            <a:endParaRPr/>
+          </a:p>
+        </p:txBody>
       </p:sp>
       <p:sp>
         <p:nvSpPr>
@@ -2641,7 +3305,7 @@
           <a:bodyPr wrap="square" lIns="0" tIns="0" rIns="0" bIns="0" rtlCol="0" anchor="ctr"/>
           <a:lstStyle/>
           <a:p>
-            <a:pPr algn="ctr" indent="0" marL="0">
+            <a:pPr marL="0" indent="0" algn="ctr">
               <a:buNone/>
             </a:pPr>
             <a:r>
@@ -2680,7 +3344,7 @@
           <a:bodyPr wrap="square" lIns="0" tIns="0" rIns="0" bIns="0" rtlCol="0" anchor="t"/>
           <a:lstStyle/>
           <a:p>
-            <a:pPr algn="ctr" indent="0" marL="0">
+            <a:pPr marL="0" indent="0" algn="ctr">
               <a:buNone/>
             </a:pPr>
             <a:r>
@@ -2716,13 +3380,20 @@
           </a:solidFill>
           <a:ln/>
           <a:effectLst>
-            <a:outerShdw sx="100000" sy="100000" kx="0" ky="0" algn="bl" rotWithShape="0" blurRad="76200" dist="25400" dir="5400000">
+            <a:outerShdw blurRad="76200" dist="25400" dir="5400000" algn="bl" rotWithShape="0">
               <a:srgbClr val="000000">
                 <a:alpha val="12000"/>
               </a:srgbClr>
             </a:outerShdw>
           </a:effectLst>
         </p:spPr>
+        <p:txBody>
+          <a:bodyPr/>
+          <a:lstStyle/>
+          <a:p>
+            <a:endParaRPr/>
+          </a:p>
+        </p:txBody>
       </p:sp>
       <p:sp>
         <p:nvSpPr>
@@ -2745,7 +3416,7 @@
           <a:bodyPr wrap="square" lIns="0" tIns="0" rIns="0" bIns="0" rtlCol="0" anchor="ctr"/>
           <a:lstStyle/>
           <a:p>
-            <a:pPr algn="ctr" indent="0" marL="0">
+            <a:pPr marL="0" indent="0" algn="ctr">
               <a:buNone/>
             </a:pPr>
             <a:r>
@@ -2757,7 +3428,7 @@
                 <a:ea typeface="Cambria" pitchFamily="34" charset="-122"/>
                 <a:cs typeface="Cambria" pitchFamily="34" charset="-120"/>
               </a:rPr>
-              <a:t>66</a:t>
+              <a:t>38</a:t>
             </a:r>
             <a:endParaRPr lang="en-US" sz="4000" dirty="0"/>
           </a:p>
@@ -2784,7 +3455,7 @@
           <a:bodyPr wrap="square" lIns="0" tIns="0" rIns="0" bIns="0" rtlCol="0" anchor="t"/>
           <a:lstStyle/>
           <a:p>
-            <a:pPr algn="ctr" indent="0" marL="0">
+            <a:pPr marL="0" indent="0" algn="ctr">
               <a:buNone/>
             </a:pPr>
             <a:r>
@@ -2793,7 +3464,7 @@
                   <a:schemeClr val="tx1"/>
                 </a:solidFill>
               </a:rPr>
-              <a:t>pruebas automatizadas: 53 en backend y 13 en frontend</a:t>
+              <a:t>pruebas automatizadas en el backend (PyTest)</a:t>
             </a:r>
             <a:endParaRPr lang="en-US" sz="1400" dirty="0"/>
           </a:p>
@@ -2820,13 +3491,20 @@
           </a:solidFill>
           <a:ln/>
           <a:effectLst>
-            <a:outerShdw sx="100000" sy="100000" kx="0" ky="0" algn="bl" rotWithShape="0" blurRad="76200" dist="25400" dir="5400000">
+            <a:outerShdw blurRad="76200" dist="25400" dir="5400000" algn="bl" rotWithShape="0">
               <a:srgbClr val="000000">
                 <a:alpha val="12000"/>
               </a:srgbClr>
             </a:outerShdw>
           </a:effectLst>
         </p:spPr>
+        <p:txBody>
+          <a:bodyPr/>
+          <a:lstStyle/>
+          <a:p>
+            <a:endParaRPr/>
+          </a:p>
+        </p:txBody>
       </p:sp>
       <p:sp>
         <p:nvSpPr>
@@ -2849,7 +3527,7 @@
           <a:bodyPr wrap="square" lIns="0" tIns="0" rIns="0" bIns="0" rtlCol="0" anchor="ctr"/>
           <a:lstStyle/>
           <a:p>
-            <a:pPr algn="ctr" indent="0" marL="0">
+            <a:pPr marL="0" indent="0" algn="ctr">
               <a:buNone/>
             </a:pPr>
             <a:r>
@@ -2888,7 +3566,7 @@
           <a:bodyPr wrap="square" lIns="0" tIns="0" rIns="0" bIns="0" rtlCol="0" anchor="t"/>
           <a:lstStyle/>
           <a:p>
-            <a:pPr algn="ctr" indent="0" marL="0">
+            <a:pPr marL="0" indent="0" algn="ctr">
               <a:buNone/>
             </a:pPr>
             <a:r>
@@ -2923,7 +3601,7 @@
           </a:prstGeom>
           <a:extLst>
             <a:ext uri="{C572A759-6A51-4108-AA02-DFA0A04FC94B}">
-              <ma14:wrappingTextBoxFlag xmlns:ma14="http://schemas.microsoft.com/office/mac/drawingml/2011/main" val="0"/>
+              <ma14:wrappingTextBoxFlag xmlns:ma14="http://schemas.microsoft.com/office/mac/drawingml/2011/main" xmlns="" val="0"/>
             </a:ext>
           </a:extLst>
         </p:spPr>
@@ -2941,7 +3619,7 @@
           <a:p>
             <a:pPr algn="r"/>
             <a:fld id="{F7021451-1387-4CA6-816F-3879F97B5CBC}" type="slidenum">
-              <a:rPr b="0" lang="en-US"/>
+              <a:rPr lang="en-US" b="0"/>
               <a:t>2</a:t>
             </a:fld>
             <a:endParaRPr lang="en-US"/>
@@ -2976,9 +3654,11 @@
       <p:sp>
         <p:nvSpPr>
           <p:cNvPr id="2" name="Text 1"/>
-          <p:cNvSpPr/>
+          <p:cNvSpPr>
+            <a:spLocks noGrp="1"/>
+          </p:cNvSpPr>
           <p:nvPr>
-            <p:ph idx="101" type="title" hasCustomPrompt="1"/>
+            <p:ph type="title" idx="101" hasCustomPrompt="1"/>
           </p:nvPr>
         </p:nvSpPr>
         <p:spPr>
@@ -2996,7 +3676,7 @@
           <a:bodyPr wrap="square" lIns="0" tIns="0" rIns="0" bIns="0" rtlCol="0" anchor="ctr"/>
           <a:lstStyle/>
           <a:p>
-            <a:pPr indent="0" marL="0">
+            <a:pPr marL="0" indent="0">
               <a:buNone/>
             </a:pPr>
             <a:r>
@@ -3032,6 +3712,13 @@
           </a:solidFill>
           <a:ln/>
         </p:spPr>
+        <p:txBody>
+          <a:bodyPr/>
+          <a:lstStyle/>
+          <a:p>
+            <a:endParaRPr/>
+          </a:p>
+        </p:txBody>
       </p:sp>
       <p:sp>
         <p:nvSpPr>
@@ -3052,326 +3739,17 @@
           </a:solidFill>
           <a:ln/>
         </p:spPr>
+        <p:txBody>
+          <a:bodyPr/>
+          <a:lstStyle/>
+          <a:p>
+            <a:endParaRPr/>
+          </a:p>
+        </p:txBody>
       </p:sp>
       <p:pic>
         <p:nvPicPr>
-          <p:cNvPr id="5" name="Image 0" descr="Cargar">    </p:cNvPr>
-          <p:cNvPicPr>
-            <a:picLocks noChangeAspect="1"/>
-          </p:cNvPicPr>
-          <p:nvPr/>
-        </p:nvPicPr>
-        <p:blipFill>
-          <a:blip r:embed="rId1"/>
-          <a:stretch>
-            <a:fillRect/>
-          </a:stretch>
-        </p:blipFill>
-        <p:spPr>
-          <a:xfrm>
-            <a:off x="1234440" y="1645920"/>
-            <a:ext cx="365760" cy="365760"/>
-          </a:xfrm>
-          <a:prstGeom prst="rect">
-            <a:avLst/>
-          </a:prstGeom>
-        </p:spPr>
-      </p:pic>
-      <p:sp>
-        <p:nvSpPr>
-          <p:cNvPr id="6" name="Text 3"/>
-          <p:cNvSpPr txBox="1"/>
-          <p:nvPr/>
-        </p:nvSpPr>
-        <p:spPr>
-          <a:xfrm>
-            <a:off x="457200" y="2286000"/>
-            <a:ext cx="1920240" cy="365760"/>
-          </a:xfrm>
-          <a:prstGeom prst="rect">
-            <a:avLst/>
-          </a:prstGeom>
-          <a:noFill/>
-          <a:ln/>
-        </p:spPr>
-        <p:txBody>
-          <a:bodyPr wrap="square" lIns="0" tIns="0" rIns="0" bIns="0" rtlCol="0" anchor="ctr"/>
-          <a:lstStyle/>
-          <a:p>
-            <a:pPr algn="ctr" indent="0" marL="0">
-              <a:buNone/>
-            </a:pPr>
-            <a:r>
-              <a:rPr lang="en-US" sz="1800" b="1" dirty="0">
-                <a:solidFill>
-                  <a:schemeClr val="tx2"/>
-                </a:solidFill>
-              </a:rPr>
-              <a:t>Cargar</a:t>
-            </a:r>
-            <a:endParaRPr lang="en-US" sz="1800" dirty="0"/>
-          </a:p>
-        </p:txBody>
-      </p:sp>
-      <p:sp>
-        <p:nvSpPr>
-          <p:cNvPr id="7" name="Text 4"/>
-          <p:cNvSpPr txBox="1"/>
-          <p:nvPr/>
-        </p:nvSpPr>
-        <p:spPr>
-          <a:xfrm>
-            <a:off x="594360" y="2697480"/>
-            <a:ext cx="1645920" cy="1051560"/>
-          </a:xfrm>
-          <a:prstGeom prst="rect">
-            <a:avLst/>
-          </a:prstGeom>
-          <a:noFill/>
-          <a:ln/>
-        </p:spPr>
-        <p:txBody>
-          <a:bodyPr wrap="square" lIns="0" tIns="0" rIns="0" bIns="0" rtlCol="0" anchor="t"/>
-          <a:lstStyle/>
-          <a:p>
-            <a:pPr algn="l" indent="0" marL="0">
-              <a:buNone/>
-            </a:pPr>
-            <a:r>
-              <a:rPr lang="en-US" sz="1400" dirty="0">
-                <a:solidFill>
-                  <a:schemeClr val="tx1"/>
-                </a:solidFill>
-              </a:rPr>
-              <a:t>Archivo CSV o Excel; reconoce las columnas aunque cambien de nombre.</a:t>
-            </a:r>
-            <a:endParaRPr lang="en-US" sz="1400" dirty="0"/>
-          </a:p>
-        </p:txBody>
-      </p:sp>
-      <p:sp>
-        <p:nvSpPr>
-          <p:cNvPr id="8" name="Flecha 1"/>
-          <p:cNvSpPr/>
-          <p:nvPr/>
-        </p:nvSpPr>
-        <p:spPr>
-          <a:xfrm>
-            <a:off x="2395728" y="2468880"/>
-            <a:ext cx="155448" cy="228600"/>
-          </a:xfrm>
-          <a:prstGeom prst="rightArrow">
-            <a:avLst/>
-          </a:prstGeom>
-          <a:solidFill>
-            <a:schemeClr val="accent1"/>
-          </a:solidFill>
-          <a:ln/>
-        </p:spPr>
-      </p:sp>
-      <p:sp>
-        <p:nvSpPr>
-          <p:cNvPr id="9" name="Tarjeta paso 2"/>
-          <p:cNvSpPr/>
-          <p:nvPr/>
-        </p:nvSpPr>
-        <p:spPr>
-          <a:xfrm>
-            <a:off x="2569464" y="1325880"/>
-            <a:ext cx="1920240" cy="2514600"/>
-          </a:xfrm>
-          <a:prstGeom prst="roundRect">
-            <a:avLst>
-              <a:gd name="adj" fmla="val 4762"/>
-            </a:avLst>
-          </a:prstGeom>
-          <a:solidFill>
-            <a:schemeClr val="bg2"/>
-          </a:solidFill>
-          <a:ln/>
-        </p:spPr>
-      </p:sp>
-      <p:sp>
-        <p:nvSpPr>
-          <p:cNvPr id="10" name="Circulo icono 2"/>
-          <p:cNvSpPr/>
-          <p:nvPr/>
-        </p:nvSpPr>
-        <p:spPr>
-          <a:xfrm>
-            <a:off x="3209544" y="1508760"/>
-            <a:ext cx="640080" cy="640080"/>
-          </a:xfrm>
-          <a:prstGeom prst="ellipse">
-            <a:avLst/>
-          </a:prstGeom>
-          <a:solidFill>
-            <a:schemeClr val="tx2"/>
-          </a:solidFill>
-          <a:ln/>
-        </p:spPr>
-      </p:sp>
-      <p:pic>
-        <p:nvPicPr>
-          <p:cNvPr id="11" name="Image 1" descr="Auditar">    </p:cNvPr>
-          <p:cNvPicPr>
-            <a:picLocks noChangeAspect="1"/>
-          </p:cNvPicPr>
-          <p:nvPr/>
-        </p:nvPicPr>
-        <p:blipFill>
-          <a:blip r:embed="rId2"/>
-          <a:stretch>
-            <a:fillRect/>
-          </a:stretch>
-        </p:blipFill>
-        <p:spPr>
-          <a:xfrm>
-            <a:off x="3346704" y="1645920"/>
-            <a:ext cx="365760" cy="365760"/>
-          </a:xfrm>
-          <a:prstGeom prst="rect">
-            <a:avLst/>
-          </a:prstGeom>
-        </p:spPr>
-      </p:pic>
-      <p:sp>
-        <p:nvSpPr>
-          <p:cNvPr id="12" name="Text 8"/>
-          <p:cNvSpPr txBox="1"/>
-          <p:nvPr/>
-        </p:nvSpPr>
-        <p:spPr>
-          <a:xfrm>
-            <a:off x="2569464" y="2286000"/>
-            <a:ext cx="1920240" cy="365760"/>
-          </a:xfrm>
-          <a:prstGeom prst="rect">
-            <a:avLst/>
-          </a:prstGeom>
-          <a:noFill/>
-          <a:ln/>
-        </p:spPr>
-        <p:txBody>
-          <a:bodyPr wrap="square" lIns="0" tIns="0" rIns="0" bIns="0" rtlCol="0" anchor="ctr"/>
-          <a:lstStyle/>
-          <a:p>
-            <a:pPr algn="ctr" indent="0" marL="0">
-              <a:buNone/>
-            </a:pPr>
-            <a:r>
-              <a:rPr lang="en-US" sz="1800" b="1" dirty="0">
-                <a:solidFill>
-                  <a:schemeClr val="tx2"/>
-                </a:solidFill>
-              </a:rPr>
-              <a:t>Auditar</a:t>
-            </a:r>
-            <a:endParaRPr lang="en-US" sz="1800" dirty="0"/>
-          </a:p>
-        </p:txBody>
-      </p:sp>
-      <p:sp>
-        <p:nvSpPr>
-          <p:cNvPr id="13" name="Text 9"/>
-          <p:cNvSpPr txBox="1"/>
-          <p:nvPr/>
-        </p:nvSpPr>
-        <p:spPr>
-          <a:xfrm>
-            <a:off x="2706624" y="2697480"/>
-            <a:ext cx="1645920" cy="1051560"/>
-          </a:xfrm>
-          <a:prstGeom prst="rect">
-            <a:avLst/>
-          </a:prstGeom>
-          <a:noFill/>
-          <a:ln/>
-        </p:spPr>
-        <p:txBody>
-          <a:bodyPr wrap="square" lIns="0" tIns="0" rIns="0" bIns="0" rtlCol="0" anchor="t"/>
-          <a:lstStyle/>
-          <a:p>
-            <a:pPr algn="l" indent="0" marL="0">
-              <a:buNone/>
-            </a:pPr>
-            <a:r>
-              <a:rPr lang="en-US" sz="1400" dirty="0">
-                <a:solidFill>
-                  <a:schemeClr val="tx1"/>
-                </a:solidFill>
-              </a:rPr>
-              <a:t>Horas hábiles, feriados chilenos y multa según la regla SLA.</a:t>
-            </a:r>
-            <a:endParaRPr lang="en-US" sz="1400" dirty="0"/>
-          </a:p>
-        </p:txBody>
-      </p:sp>
-      <p:sp>
-        <p:nvSpPr>
-          <p:cNvPr id="14" name="Flecha 2"/>
-          <p:cNvSpPr/>
-          <p:nvPr/>
-        </p:nvSpPr>
-        <p:spPr>
-          <a:xfrm>
-            <a:off x="4507992" y="2468880"/>
-            <a:ext cx="155448" cy="228600"/>
-          </a:xfrm>
-          <a:prstGeom prst="rightArrow">
-            <a:avLst/>
-          </a:prstGeom>
-          <a:solidFill>
-            <a:schemeClr val="accent1"/>
-          </a:solidFill>
-          <a:ln/>
-        </p:spPr>
-      </p:sp>
-      <p:sp>
-        <p:nvSpPr>
-          <p:cNvPr id="15" name="Tarjeta paso 3"/>
-          <p:cNvSpPr/>
-          <p:nvPr/>
-        </p:nvSpPr>
-        <p:spPr>
-          <a:xfrm>
-            <a:off x="4681728" y="1325880"/>
-            <a:ext cx="1920240" cy="2514600"/>
-          </a:xfrm>
-          <a:prstGeom prst="roundRect">
-            <a:avLst>
-              <a:gd name="adj" fmla="val 4762"/>
-            </a:avLst>
-          </a:prstGeom>
-          <a:solidFill>
-            <a:schemeClr val="bg2"/>
-          </a:solidFill>
-          <a:ln/>
-        </p:spPr>
-      </p:sp>
-      <p:sp>
-        <p:nvSpPr>
-          <p:cNvPr id="16" name="Circulo icono 3"/>
-          <p:cNvSpPr/>
-          <p:nvPr/>
-        </p:nvSpPr>
-        <p:spPr>
-          <a:xfrm>
-            <a:off x="5321808" y="1508760"/>
-            <a:ext cx="640080" cy="640080"/>
-          </a:xfrm>
-          <a:prstGeom prst="ellipse">
-            <a:avLst/>
-          </a:prstGeom>
-          <a:solidFill>
-            <a:schemeClr val="tx2"/>
-          </a:solidFill>
-          <a:ln/>
-        </p:spPr>
-      </p:sp>
-      <p:pic>
-        <p:nvPicPr>
-          <p:cNvPr id="17" name="Image 2" descr="Revisar">    </p:cNvPr>
+          <p:cNvPr id="5" name="Image 0" descr="Cargar"/>
           <p:cNvPicPr>
             <a:picLocks noChangeAspect="1"/>
           </p:cNvPicPr>
@@ -3385,7 +3763,7 @@
         </p:blipFill>
         <p:spPr>
           <a:xfrm>
-            <a:off x="5458968" y="1645920"/>
+            <a:off x="1234440" y="1645920"/>
             <a:ext cx="365760" cy="365760"/>
           </a:xfrm>
           <a:prstGeom prst="rect">
@@ -3395,13 +3773,13 @@
       </p:pic>
       <p:sp>
         <p:nvSpPr>
-          <p:cNvPr id="18" name="Text 13"/>
+          <p:cNvPr id="6" name="Text 3"/>
           <p:cNvSpPr txBox="1"/>
           <p:nvPr/>
         </p:nvSpPr>
         <p:spPr>
           <a:xfrm>
-            <a:off x="4681728" y="2286000"/>
+            <a:off x="457200" y="2286000"/>
             <a:ext cx="1920240" cy="365760"/>
           </a:xfrm>
           <a:prstGeom prst="rect">
@@ -3414,7 +3792,7 @@
           <a:bodyPr wrap="square" lIns="0" tIns="0" rIns="0" bIns="0" rtlCol="0" anchor="ctr"/>
           <a:lstStyle/>
           <a:p>
-            <a:pPr algn="ctr" indent="0" marL="0">
+            <a:pPr marL="0" indent="0" algn="ctr">
               <a:buNone/>
             </a:pPr>
             <a:r>
@@ -3423,7 +3801,7 @@
                   <a:schemeClr val="tx2"/>
                 </a:solidFill>
               </a:rPr>
-              <a:t>Revisar</a:t>
+              <a:t>Cargar</a:t>
             </a:r>
             <a:endParaRPr lang="en-US" sz="1800" dirty="0"/>
           </a:p>
@@ -3431,13 +3809,13 @@
       </p:sp>
       <p:sp>
         <p:nvSpPr>
-          <p:cNvPr id="19" name="Text 14"/>
+          <p:cNvPr id="7" name="Text 4"/>
           <p:cNvSpPr txBox="1"/>
           <p:nvPr/>
         </p:nvSpPr>
         <p:spPr>
           <a:xfrm>
-            <a:off x="4818888" y="2697480"/>
+            <a:off x="594360" y="2697480"/>
             <a:ext cx="1645920" cy="1051560"/>
           </a:xfrm>
           <a:prstGeom prst="rect">
@@ -3450,7 +3828,7 @@
           <a:bodyPr wrap="square" lIns="0" tIns="0" rIns="0" bIns="0" rtlCol="0" anchor="t"/>
           <a:lstStyle/>
           <a:p>
-            <a:pPr algn="l" indent="0" marL="0">
+            <a:pPr marL="0" indent="0" algn="l">
               <a:buNone/>
             </a:pPr>
             <a:r>
@@ -3459,7 +3837,7 @@
                   <a:schemeClr val="tx1"/>
                 </a:solidFill>
               </a:rPr>
-              <a:t>Dashboard con gráficos, filtros, búsqueda y descarga en CSV.</a:t>
+              <a:t>Archivo CSV o Excel; reconoce las columnas aunque cambien de nombre.</a:t>
             </a:r>
             <a:endParaRPr lang="en-US" sz="1400" dirty="0"/>
           </a:p>
@@ -3467,13 +3845,13 @@
       </p:sp>
       <p:sp>
         <p:nvSpPr>
-          <p:cNvPr id="20" name="Flecha 3"/>
+          <p:cNvPr id="8" name="Flecha 1"/>
           <p:cNvSpPr/>
           <p:nvPr/>
         </p:nvSpPr>
         <p:spPr>
           <a:xfrm>
-            <a:off x="6620256" y="2468880"/>
+            <a:off x="2395728" y="2468880"/>
             <a:ext cx="155448" cy="228600"/>
           </a:xfrm>
           <a:prstGeom prst="rightArrow">
@@ -3484,16 +3862,23 @@
           </a:solidFill>
           <a:ln/>
         </p:spPr>
-      </p:sp>
-      <p:sp>
-        <p:nvSpPr>
-          <p:cNvPr id="21" name="Tarjeta paso 4"/>
+        <p:txBody>
+          <a:bodyPr/>
+          <a:lstStyle/>
+          <a:p>
+            <a:endParaRPr/>
+          </a:p>
+        </p:txBody>
+      </p:sp>
+      <p:sp>
+        <p:nvSpPr>
+          <p:cNvPr id="9" name="Tarjeta paso 2"/>
           <p:cNvSpPr/>
           <p:nvPr/>
         </p:nvSpPr>
         <p:spPr>
           <a:xfrm>
-            <a:off x="6793992" y="1325880"/>
+            <a:off x="2569464" y="1325880"/>
             <a:ext cx="1920240" cy="2514600"/>
           </a:xfrm>
           <a:prstGeom prst="roundRect">
@@ -3506,16 +3891,23 @@
           </a:solidFill>
           <a:ln/>
         </p:spPr>
-      </p:sp>
-      <p:sp>
-        <p:nvSpPr>
-          <p:cNvPr id="22" name="Circulo icono 4"/>
+        <p:txBody>
+          <a:bodyPr/>
+          <a:lstStyle/>
+          <a:p>
+            <a:endParaRPr/>
+          </a:p>
+        </p:txBody>
+      </p:sp>
+      <p:sp>
+        <p:nvSpPr>
+          <p:cNvPr id="10" name="Circulo icono 2"/>
           <p:cNvSpPr/>
           <p:nvPr/>
         </p:nvSpPr>
         <p:spPr>
           <a:xfrm>
-            <a:off x="7434072" y="1508760"/>
+            <a:off x="3209544" y="1508760"/>
             <a:ext cx="640080" cy="640080"/>
           </a:xfrm>
           <a:prstGeom prst="ellipse">
@@ -3526,10 +3918,17 @@
           </a:solidFill>
           <a:ln/>
         </p:spPr>
+        <p:txBody>
+          <a:bodyPr/>
+          <a:lstStyle/>
+          <a:p>
+            <a:endParaRPr/>
+          </a:p>
+        </p:txBody>
       </p:sp>
       <p:pic>
         <p:nvPicPr>
-          <p:cNvPr id="23" name="Image 3" descr="Reclamar">    </p:cNvPr>
+          <p:cNvPr id="11" name="Image 1" descr="Auditar"/>
           <p:cNvPicPr>
             <a:picLocks noChangeAspect="1"/>
           </p:cNvPicPr>
@@ -3543,6 +3942,364 @@
         </p:blipFill>
         <p:spPr>
           <a:xfrm>
+            <a:off x="3346704" y="1645920"/>
+            <a:ext cx="365760" cy="365760"/>
+          </a:xfrm>
+          <a:prstGeom prst="rect">
+            <a:avLst/>
+          </a:prstGeom>
+        </p:spPr>
+      </p:pic>
+      <p:sp>
+        <p:nvSpPr>
+          <p:cNvPr id="12" name="Text 8"/>
+          <p:cNvSpPr txBox="1"/>
+          <p:nvPr/>
+        </p:nvSpPr>
+        <p:spPr>
+          <a:xfrm>
+            <a:off x="2569464" y="2286000"/>
+            <a:ext cx="1920240" cy="365760"/>
+          </a:xfrm>
+          <a:prstGeom prst="rect">
+            <a:avLst/>
+          </a:prstGeom>
+          <a:noFill/>
+          <a:ln/>
+        </p:spPr>
+        <p:txBody>
+          <a:bodyPr wrap="square" lIns="0" tIns="0" rIns="0" bIns="0" rtlCol="0" anchor="ctr"/>
+          <a:lstStyle/>
+          <a:p>
+            <a:pPr marL="0" indent="0" algn="ctr">
+              <a:buNone/>
+            </a:pPr>
+            <a:r>
+              <a:rPr lang="en-US" sz="1800" b="1" dirty="0">
+                <a:solidFill>
+                  <a:schemeClr val="tx2"/>
+                </a:solidFill>
+              </a:rPr>
+              <a:t>Auditar</a:t>
+            </a:r>
+            <a:endParaRPr lang="en-US" sz="1800" dirty="0"/>
+          </a:p>
+        </p:txBody>
+      </p:sp>
+      <p:sp>
+        <p:nvSpPr>
+          <p:cNvPr id="13" name="Text 9"/>
+          <p:cNvSpPr txBox="1"/>
+          <p:nvPr/>
+        </p:nvSpPr>
+        <p:spPr>
+          <a:xfrm>
+            <a:off x="2706624" y="2697480"/>
+            <a:ext cx="1645920" cy="1051560"/>
+          </a:xfrm>
+          <a:prstGeom prst="rect">
+            <a:avLst/>
+          </a:prstGeom>
+          <a:noFill/>
+          <a:ln/>
+        </p:spPr>
+        <p:txBody>
+          <a:bodyPr wrap="square" lIns="0" tIns="0" rIns="0" bIns="0" rtlCol="0" anchor="t"/>
+          <a:lstStyle/>
+          <a:p>
+            <a:pPr marL="0" indent="0" algn="l">
+              <a:buNone/>
+            </a:pPr>
+            <a:r>
+              <a:rPr lang="en-US" sz="1400" dirty="0">
+                <a:solidFill>
+                  <a:schemeClr val="tx1"/>
+                </a:solidFill>
+              </a:rPr>
+              <a:t>Horas hábiles, feriados chilenos y multa según la regla SLA.</a:t>
+            </a:r>
+            <a:endParaRPr lang="en-US" sz="1400" dirty="0"/>
+          </a:p>
+        </p:txBody>
+      </p:sp>
+      <p:sp>
+        <p:nvSpPr>
+          <p:cNvPr id="14" name="Flecha 2"/>
+          <p:cNvSpPr/>
+          <p:nvPr/>
+        </p:nvSpPr>
+        <p:spPr>
+          <a:xfrm>
+            <a:off x="4507992" y="2468880"/>
+            <a:ext cx="155448" cy="228600"/>
+          </a:xfrm>
+          <a:prstGeom prst="rightArrow">
+            <a:avLst/>
+          </a:prstGeom>
+          <a:solidFill>
+            <a:schemeClr val="accent1"/>
+          </a:solidFill>
+          <a:ln/>
+        </p:spPr>
+        <p:txBody>
+          <a:bodyPr/>
+          <a:lstStyle/>
+          <a:p>
+            <a:endParaRPr/>
+          </a:p>
+        </p:txBody>
+      </p:sp>
+      <p:sp>
+        <p:nvSpPr>
+          <p:cNvPr id="15" name="Tarjeta paso 3"/>
+          <p:cNvSpPr/>
+          <p:nvPr/>
+        </p:nvSpPr>
+        <p:spPr>
+          <a:xfrm>
+            <a:off x="4681728" y="1325880"/>
+            <a:ext cx="1920240" cy="2514600"/>
+          </a:xfrm>
+          <a:prstGeom prst="roundRect">
+            <a:avLst>
+              <a:gd name="adj" fmla="val 4762"/>
+            </a:avLst>
+          </a:prstGeom>
+          <a:solidFill>
+            <a:schemeClr val="bg2"/>
+          </a:solidFill>
+          <a:ln/>
+        </p:spPr>
+        <p:txBody>
+          <a:bodyPr/>
+          <a:lstStyle/>
+          <a:p>
+            <a:endParaRPr/>
+          </a:p>
+        </p:txBody>
+      </p:sp>
+      <p:sp>
+        <p:nvSpPr>
+          <p:cNvPr id="16" name="Circulo icono 3"/>
+          <p:cNvSpPr/>
+          <p:nvPr/>
+        </p:nvSpPr>
+        <p:spPr>
+          <a:xfrm>
+            <a:off x="5321808" y="1508760"/>
+            <a:ext cx="640080" cy="640080"/>
+          </a:xfrm>
+          <a:prstGeom prst="ellipse">
+            <a:avLst/>
+          </a:prstGeom>
+          <a:solidFill>
+            <a:schemeClr val="tx2"/>
+          </a:solidFill>
+          <a:ln/>
+        </p:spPr>
+        <p:txBody>
+          <a:bodyPr/>
+          <a:lstStyle/>
+          <a:p>
+            <a:endParaRPr/>
+          </a:p>
+        </p:txBody>
+      </p:sp>
+      <p:pic>
+        <p:nvPicPr>
+          <p:cNvPr id="17" name="Image 2" descr="Revisar"/>
+          <p:cNvPicPr>
+            <a:picLocks noChangeAspect="1"/>
+          </p:cNvPicPr>
+          <p:nvPr/>
+        </p:nvPicPr>
+        <p:blipFill>
+          <a:blip r:embed="rId5"/>
+          <a:stretch>
+            <a:fillRect/>
+          </a:stretch>
+        </p:blipFill>
+        <p:spPr>
+          <a:xfrm>
+            <a:off x="5458968" y="1645920"/>
+            <a:ext cx="365760" cy="365760"/>
+          </a:xfrm>
+          <a:prstGeom prst="rect">
+            <a:avLst/>
+          </a:prstGeom>
+        </p:spPr>
+      </p:pic>
+      <p:sp>
+        <p:nvSpPr>
+          <p:cNvPr id="18" name="Text 13"/>
+          <p:cNvSpPr txBox="1"/>
+          <p:nvPr/>
+        </p:nvSpPr>
+        <p:spPr>
+          <a:xfrm>
+            <a:off x="4681728" y="2286000"/>
+            <a:ext cx="1920240" cy="365760"/>
+          </a:xfrm>
+          <a:prstGeom prst="rect">
+            <a:avLst/>
+          </a:prstGeom>
+          <a:noFill/>
+          <a:ln/>
+        </p:spPr>
+        <p:txBody>
+          <a:bodyPr wrap="square" lIns="0" tIns="0" rIns="0" bIns="0" rtlCol="0" anchor="ctr"/>
+          <a:lstStyle/>
+          <a:p>
+            <a:pPr marL="0" indent="0" algn="ctr">
+              <a:buNone/>
+            </a:pPr>
+            <a:r>
+              <a:rPr lang="en-US" sz="1800" b="1" dirty="0">
+                <a:solidFill>
+                  <a:schemeClr val="tx2"/>
+                </a:solidFill>
+              </a:rPr>
+              <a:t>Revisar</a:t>
+            </a:r>
+            <a:endParaRPr lang="en-US" sz="1800" dirty="0"/>
+          </a:p>
+        </p:txBody>
+      </p:sp>
+      <p:sp>
+        <p:nvSpPr>
+          <p:cNvPr id="19" name="Text 14"/>
+          <p:cNvSpPr txBox="1"/>
+          <p:nvPr/>
+        </p:nvSpPr>
+        <p:spPr>
+          <a:xfrm>
+            <a:off x="4818888" y="2697480"/>
+            <a:ext cx="1645920" cy="1051560"/>
+          </a:xfrm>
+          <a:prstGeom prst="rect">
+            <a:avLst/>
+          </a:prstGeom>
+          <a:noFill/>
+          <a:ln/>
+        </p:spPr>
+        <p:txBody>
+          <a:bodyPr wrap="square" lIns="0" tIns="0" rIns="0" bIns="0" rtlCol="0" anchor="t"/>
+          <a:lstStyle/>
+          <a:p>
+            <a:pPr marL="0" indent="0" algn="l">
+              <a:buNone/>
+            </a:pPr>
+            <a:r>
+              <a:rPr lang="en-US" sz="1400" dirty="0">
+                <a:solidFill>
+                  <a:schemeClr val="tx1"/>
+                </a:solidFill>
+              </a:rPr>
+              <a:t>Dashboard con franja de cumplimiento y desglose por transportista.</a:t>
+            </a:r>
+            <a:endParaRPr lang="en-US" sz="1400" dirty="0"/>
+          </a:p>
+        </p:txBody>
+      </p:sp>
+      <p:sp>
+        <p:nvSpPr>
+          <p:cNvPr id="20" name="Flecha 3"/>
+          <p:cNvSpPr/>
+          <p:nvPr/>
+        </p:nvSpPr>
+        <p:spPr>
+          <a:xfrm>
+            <a:off x="6620256" y="2468880"/>
+            <a:ext cx="155448" cy="228600"/>
+          </a:xfrm>
+          <a:prstGeom prst="rightArrow">
+            <a:avLst/>
+          </a:prstGeom>
+          <a:solidFill>
+            <a:schemeClr val="accent1"/>
+          </a:solidFill>
+          <a:ln/>
+        </p:spPr>
+        <p:txBody>
+          <a:bodyPr/>
+          <a:lstStyle/>
+          <a:p>
+            <a:endParaRPr/>
+          </a:p>
+        </p:txBody>
+      </p:sp>
+      <p:sp>
+        <p:nvSpPr>
+          <p:cNvPr id="21" name="Tarjeta paso 4"/>
+          <p:cNvSpPr/>
+          <p:nvPr/>
+        </p:nvSpPr>
+        <p:spPr>
+          <a:xfrm>
+            <a:off x="6793992" y="1325880"/>
+            <a:ext cx="1920240" cy="2514600"/>
+          </a:xfrm>
+          <a:prstGeom prst="roundRect">
+            <a:avLst>
+              <a:gd name="adj" fmla="val 4762"/>
+            </a:avLst>
+          </a:prstGeom>
+          <a:solidFill>
+            <a:schemeClr val="bg2"/>
+          </a:solidFill>
+          <a:ln/>
+        </p:spPr>
+        <p:txBody>
+          <a:bodyPr/>
+          <a:lstStyle/>
+          <a:p>
+            <a:endParaRPr/>
+          </a:p>
+        </p:txBody>
+      </p:sp>
+      <p:sp>
+        <p:nvSpPr>
+          <p:cNvPr id="22" name="Circulo icono 4"/>
+          <p:cNvSpPr/>
+          <p:nvPr/>
+        </p:nvSpPr>
+        <p:spPr>
+          <a:xfrm>
+            <a:off x="7434072" y="1508760"/>
+            <a:ext cx="640080" cy="640080"/>
+          </a:xfrm>
+          <a:prstGeom prst="ellipse">
+            <a:avLst/>
+          </a:prstGeom>
+          <a:solidFill>
+            <a:schemeClr val="tx2"/>
+          </a:solidFill>
+          <a:ln/>
+        </p:spPr>
+        <p:txBody>
+          <a:bodyPr/>
+          <a:lstStyle/>
+          <a:p>
+            <a:endParaRPr/>
+          </a:p>
+        </p:txBody>
+      </p:sp>
+      <p:pic>
+        <p:nvPicPr>
+          <p:cNvPr id="23" name="Image 3" descr="Reclamar"/>
+          <p:cNvPicPr>
+            <a:picLocks noChangeAspect="1"/>
+          </p:cNvPicPr>
+          <p:nvPr/>
+        </p:nvPicPr>
+        <p:blipFill>
+          <a:blip r:embed="rId6"/>
+          <a:stretch>
+            <a:fillRect/>
+          </a:stretch>
+        </p:blipFill>
+        <p:spPr>
+          <a:xfrm>
             <a:off x="7571232" y="1645920"/>
             <a:ext cx="365760" cy="365760"/>
           </a:xfrm>
@@ -3572,7 +4329,7 @@
           <a:bodyPr wrap="square" lIns="0" tIns="0" rIns="0" bIns="0" rtlCol="0" anchor="ctr"/>
           <a:lstStyle/>
           <a:p>
-            <a:pPr algn="ctr" indent="0" marL="0">
+            <a:pPr marL="0" indent="0" algn="ctr">
               <a:buNone/>
             </a:pPr>
             <a:r>
@@ -3581,7 +4338,7 @@
                   <a:schemeClr val="tx2"/>
                 </a:solidFill>
               </a:rPr>
-              <a:t>Reclamar</a:t>
+              <a:t>Descargar</a:t>
             </a:r>
             <a:endParaRPr lang="en-US" sz="1800" dirty="0"/>
           </a:p>
@@ -3608,7 +4365,7 @@
           <a:bodyPr wrap="square" lIns="0" tIns="0" rIns="0" bIns="0" rtlCol="0" anchor="t"/>
           <a:lstStyle/>
           <a:p>
-            <a:pPr algn="l" indent="0" marL="0">
+            <a:pPr marL="0" indent="0" algn="l">
               <a:buNone/>
             </a:pPr>
             <a:r>
@@ -3617,7 +4374,7 @@
                   <a:schemeClr val="tx1"/>
                 </a:solidFill>
               </a:rPr>
-              <a:t>Carta de reclamo y resumen ejecutivo redactados con IA.</a:t>
+              <a:t>Tabla de guías con filtros y búsqueda; incumplimientos en CSV.</a:t>
             </a:r>
             <a:endParaRPr lang="en-US" sz="1400" dirty="0"/>
           </a:p>
@@ -3644,6 +4401,13 @@
           </a:solidFill>
           <a:ln/>
         </p:spPr>
+        <p:txBody>
+          <a:bodyPr/>
+          <a:lstStyle/>
+          <a:p>
+            <a:endParaRPr/>
+          </a:p>
+        </p:txBody>
       </p:sp>
       <p:sp>
         <p:nvSpPr>
@@ -3666,7 +4430,7 @@
           <a:bodyPr wrap="square" lIns="0" tIns="0" rIns="0" bIns="0" rtlCol="0" anchor="ctr"/>
           <a:lstStyle/>
           <a:p>
-            <a:pPr indent="0" marL="0">
+            <a:pPr marL="0" indent="0">
               <a:buNone/>
             </a:pPr>
             <a:r>
@@ -3675,7 +4439,7 @@
                   <a:schemeClr val="bg1"/>
                 </a:solidFill>
               </a:rPr>
-              <a:t>La IA solo redacta el texto. Las cifras y el anexo de guías y multas los genera siempre el sistema.</a:t>
+              <a:t>Próximo (Sprint 4): carta de reclamo y resumen ejecutivo con IA. La IA solo redactará el texto; las cifras las genera siempre el sistema.</a:t>
             </a:r>
             <a:endParaRPr lang="en-US" sz="1400" dirty="0"/>
           </a:p>
@@ -3683,7 +4447,7 @@
       </p:sp>
       <p:sp>
         <p:nvSpPr>
-          <p:cNvPr id="25" name="Slide Number Placeholder 0"/>
+          <p:cNvPr id="28" name="Slide Number Placeholder 0"/>
           <p:cNvSpPr>
             <a:spLocks noGrp="1"/>
           </p:cNvSpPr>
@@ -3701,7 +4465,7 @@
           </a:prstGeom>
           <a:extLst>
             <a:ext uri="{C572A759-6A51-4108-AA02-DFA0A04FC94B}">
-              <ma14:wrappingTextBoxFlag xmlns:ma14="http://schemas.microsoft.com/office/mac/drawingml/2011/main" val="0"/>
+              <ma14:wrappingTextBoxFlag xmlns:ma14="http://schemas.microsoft.com/office/mac/drawingml/2011/main" xmlns="" val="0"/>
             </a:ext>
           </a:extLst>
         </p:spPr>
@@ -3719,7 +4483,7 @@
           <a:p>
             <a:pPr algn="r"/>
             <a:fld id="{F7021451-1387-4CA6-816F-3879F97B5CBC}" type="slidenum">
-              <a:rPr b="0" lang="en-US"/>
+              <a:rPr lang="en-US" b="0"/>
               <a:t>3</a:t>
             </a:fld>
             <a:endParaRPr lang="en-US"/>
@@ -3754,9 +4518,11 @@
       <p:sp>
         <p:nvSpPr>
           <p:cNvPr id="2" name="Text 1"/>
-          <p:cNvSpPr/>
+          <p:cNvSpPr>
+            <a:spLocks noGrp="1"/>
+          </p:cNvSpPr>
           <p:nvPr>
-            <p:ph idx="101" type="title" hasCustomPrompt="1"/>
+            <p:ph type="title" idx="101" hasCustomPrompt="1"/>
           </p:nvPr>
         </p:nvSpPr>
         <p:spPr>
@@ -3774,7 +4540,7 @@
           <a:bodyPr wrap="square" lIns="0" tIns="0" rIns="0" bIns="0" rtlCol="0" anchor="ctr"/>
           <a:lstStyle/>
           <a:p>
-            <a:pPr indent="0" marL="0">
+            <a:pPr marL="0" indent="0">
               <a:buNone/>
             </a:pPr>
             <a:r>
@@ -3810,6 +4576,13 @@
           </a:solidFill>
           <a:ln/>
         </p:spPr>
+        <p:txBody>
+          <a:bodyPr/>
+          <a:lstStyle/>
+          <a:p>
+            <a:endParaRPr/>
+          </a:p>
+        </p:txBody>
       </p:sp>
       <p:sp>
         <p:nvSpPr>
@@ -3832,7 +4605,7 @@
           <a:bodyPr wrap="square" lIns="0" tIns="0" rIns="0" bIns="0" rtlCol="0" anchor="ctr"/>
           <a:lstStyle/>
           <a:p>
-            <a:pPr indent="0" marL="0">
+            <a:pPr marL="0" indent="0">
               <a:buNone/>
             </a:pPr>
             <a:r>
@@ -3868,7 +4641,7 @@
           <a:bodyPr wrap="square" lIns="0" tIns="0" rIns="0" bIns="0" rtlCol="0" anchor="ctr"/>
           <a:lstStyle/>
           <a:p>
-            <a:pPr indent="0" marL="0">
+            <a:pPr marL="0" indent="0">
               <a:buNone/>
             </a:pPr>
             <a:r>
@@ -3904,7 +4677,7 @@
           <a:bodyPr wrap="square" lIns="0" tIns="0" rIns="0" bIns="0" rtlCol="0" anchor="ctr"/>
           <a:lstStyle/>
           <a:p>
-            <a:pPr indent="0" marL="0">
+            <a:pPr marL="0" indent="0">
               <a:buNone/>
             </a:pPr>
             <a:r>
@@ -3940,6 +4713,13 @@
           </a:solidFill>
           <a:ln/>
         </p:spPr>
+        <p:txBody>
+          <a:bodyPr/>
+          <a:lstStyle/>
+          <a:p>
+            <a:endParaRPr/>
+          </a:p>
+        </p:txBody>
       </p:sp>
       <p:sp>
         <p:nvSpPr>
@@ -3962,7 +4742,7 @@
           <a:bodyPr wrap="square" lIns="0" tIns="0" rIns="0" bIns="0" rtlCol="0" anchor="ctr"/>
           <a:lstStyle/>
           <a:p>
-            <a:pPr algn="ctr" indent="0" marL="0">
+            <a:pPr marL="0" indent="0" algn="ctr">
               <a:buNone/>
             </a:pPr>
             <a:r>
@@ -3998,6 +4778,13 @@
           </a:solidFill>
           <a:ln/>
         </p:spPr>
+        <p:txBody>
+          <a:bodyPr/>
+          <a:lstStyle/>
+          <a:p>
+            <a:endParaRPr/>
+          </a:p>
+        </p:txBody>
       </p:sp>
       <p:sp>
         <p:nvSpPr>
@@ -4020,7 +4807,7 @@
           <a:bodyPr wrap="square" lIns="0" tIns="0" rIns="0" bIns="0" rtlCol="0" anchor="ctr"/>
           <a:lstStyle/>
           <a:p>
-            <a:pPr indent="0" marL="0">
+            <a:pPr marL="0" indent="0">
               <a:buNone/>
             </a:pPr>
             <a:r>
@@ -4056,7 +4843,7 @@
           <a:bodyPr wrap="square" lIns="0" tIns="0" rIns="0" bIns="0" rtlCol="0" anchor="ctr"/>
           <a:lstStyle/>
           <a:p>
-            <a:pPr indent="0" marL="0">
+            <a:pPr marL="0" indent="0">
               <a:buNone/>
             </a:pPr>
             <a:r>
@@ -4092,7 +4879,7 @@
           <a:bodyPr wrap="square" lIns="0" tIns="0" rIns="0" bIns="0" rtlCol="0" anchor="ctr"/>
           <a:lstStyle/>
           <a:p>
-            <a:pPr indent="0" marL="0">
+            <a:pPr marL="0" indent="0">
               <a:buNone/>
             </a:pPr>
             <a:r>
@@ -4128,6 +4915,13 @@
           </a:solidFill>
           <a:ln/>
         </p:spPr>
+        <p:txBody>
+          <a:bodyPr/>
+          <a:lstStyle/>
+          <a:p>
+            <a:endParaRPr/>
+          </a:p>
+        </p:txBody>
       </p:sp>
       <p:sp>
         <p:nvSpPr>
@@ -4150,7 +4944,7 @@
           <a:bodyPr wrap="square" lIns="0" tIns="0" rIns="0" bIns="0" rtlCol="0" anchor="ctr"/>
           <a:lstStyle/>
           <a:p>
-            <a:pPr algn="ctr" indent="0" marL="0">
+            <a:pPr marL="0" indent="0" algn="ctr">
               <a:buNone/>
             </a:pPr>
             <a:r>
@@ -4186,6 +4980,13 @@
           </a:solidFill>
           <a:ln/>
         </p:spPr>
+        <p:txBody>
+          <a:bodyPr/>
+          <a:lstStyle/>
+          <a:p>
+            <a:endParaRPr/>
+          </a:p>
+        </p:txBody>
       </p:sp>
       <p:sp>
         <p:nvSpPr>
@@ -4208,7 +5009,7 @@
           <a:bodyPr wrap="square" lIns="0" tIns="0" rIns="0" bIns="0" rtlCol="0" anchor="ctr"/>
           <a:lstStyle/>
           <a:p>
-            <a:pPr indent="0" marL="0">
+            <a:pPr marL="0" indent="0">
               <a:buNone/>
             </a:pPr>
             <a:r>
@@ -4244,7 +5045,7 @@
           <a:bodyPr wrap="square" lIns="0" tIns="0" rIns="0" bIns="0" rtlCol="0" anchor="ctr"/>
           <a:lstStyle/>
           <a:p>
-            <a:pPr indent="0" marL="0">
+            <a:pPr marL="0" indent="0">
               <a:buNone/>
             </a:pPr>
             <a:r>
@@ -4280,7 +5081,7 @@
           <a:bodyPr wrap="square" lIns="0" tIns="0" rIns="0" bIns="0" rtlCol="0" anchor="ctr"/>
           <a:lstStyle/>
           <a:p>
-            <a:pPr indent="0" marL="0">
+            <a:pPr marL="0" indent="0">
               <a:buNone/>
             </a:pPr>
             <a:r>
@@ -4289,7 +5090,7 @@
                   <a:schemeClr val="tx1"/>
                 </a:solidFill>
               </a:rPr>
-              <a:t>Dashboard con gráficos y módulo de IA para el reclamo</a:t>
+              <a:t>Consultas, dashboard y tabla de guías (gráficos e IA pasan al Sprint 4)</a:t>
             </a:r>
             <a:endParaRPr lang="en-US" sz="1400" dirty="0"/>
           </a:p>
@@ -4316,6 +5117,13 @@
           </a:solidFill>
           <a:ln/>
         </p:spPr>
+        <p:txBody>
+          <a:bodyPr/>
+          <a:lstStyle/>
+          <a:p>
+            <a:endParaRPr/>
+          </a:p>
+        </p:txBody>
       </p:sp>
       <p:sp>
         <p:nvSpPr>
@@ -4338,7 +5146,7 @@
           <a:bodyPr wrap="square" lIns="0" tIns="0" rIns="0" bIns="0" rtlCol="0" anchor="ctr"/>
           <a:lstStyle/>
           <a:p>
-            <a:pPr algn="ctr" indent="0" marL="0">
+            <a:pPr marL="0" indent="0" algn="ctr">
               <a:buNone/>
             </a:pPr>
             <a:r>
@@ -4374,6 +5182,13 @@
           </a:solidFill>
           <a:ln/>
         </p:spPr>
+        <p:txBody>
+          <a:bodyPr/>
+          <a:lstStyle/>
+          <a:p>
+            <a:endParaRPr/>
+          </a:p>
+        </p:txBody>
       </p:sp>
       <p:sp>
         <p:nvSpPr>
@@ -4396,7 +5211,7 @@
           <a:bodyPr wrap="square" lIns="0" tIns="0" rIns="0" bIns="0" rtlCol="0" anchor="ctr"/>
           <a:lstStyle/>
           <a:p>
-            <a:pPr indent="0" marL="0">
+            <a:pPr marL="0" indent="0">
               <a:buNone/>
             </a:pPr>
             <a:r>
@@ -4432,7 +5247,7 @@
           <a:bodyPr wrap="square" lIns="0" tIns="0" rIns="0" bIns="0" rtlCol="0" anchor="ctr"/>
           <a:lstStyle/>
           <a:p>
-            <a:pPr indent="0" marL="0">
+            <a:pPr marL="0" indent="0">
               <a:buNone/>
             </a:pPr>
             <a:r>
@@ -4441,7 +5256,7 @@
                   <a:schemeClr val="accent5"/>
                 </a:solidFill>
               </a:rPr>
-              <a:t>Semanas 11 y 12</a:t>
+              <a:t>Semanas 12 y 13</a:t>
             </a:r>
             <a:endParaRPr lang="en-US" sz="1400" dirty="0"/>
           </a:p>
@@ -4468,7 +5283,7 @@
           <a:bodyPr wrap="square" lIns="0" tIns="0" rIns="0" bIns="0" rtlCol="0" anchor="ctr"/>
           <a:lstStyle/>
           <a:p>
-            <a:pPr indent="0" marL="0">
+            <a:pPr marL="0" indent="0">
               <a:buNone/>
             </a:pPr>
             <a:r>
@@ -4477,7 +5292,7 @@
                   <a:schemeClr val="tx1"/>
                 </a:solidFill>
               </a:rPr>
-              <a:t>Despliegue en GCP, CI/CD y pruebas E2E</a:t>
+              <a:t>IA generativa, gráficos, PostgreSQL con Alembic, Docker y pruebas del frontend</a:t>
             </a:r>
             <a:endParaRPr lang="en-US" sz="1400" dirty="0"/>
           </a:p>
@@ -4504,6 +5319,13 @@
           </a:solidFill>
           <a:ln/>
         </p:spPr>
+        <p:txBody>
+          <a:bodyPr/>
+          <a:lstStyle/>
+          <a:p>
+            <a:endParaRPr/>
+          </a:p>
+        </p:txBody>
       </p:sp>
       <p:sp>
         <p:nvSpPr>
@@ -4526,7 +5348,7 @@
           <a:bodyPr wrap="square" lIns="0" tIns="0" rIns="0" bIns="0" rtlCol="0" anchor="ctr"/>
           <a:lstStyle/>
           <a:p>
-            <a:pPr algn="ctr" indent="0" marL="0">
+            <a:pPr marL="0" indent="0" algn="ctr">
               <a:buNone/>
             </a:pPr>
             <a:r>
@@ -4535,7 +5357,7 @@
                   <a:schemeClr val="bg1"/>
                 </a:solidFill>
               </a:rPr>
-              <a:t>No iniciado</a:t>
+              <a:t>Por iniciar</a:t>
             </a:r>
             <a:endParaRPr lang="en-US" sz="1200" dirty="0"/>
           </a:p>
@@ -4562,6 +5384,13 @@
           </a:solidFill>
           <a:ln/>
         </p:spPr>
+        <p:txBody>
+          <a:bodyPr/>
+          <a:lstStyle/>
+          <a:p>
+            <a:endParaRPr/>
+          </a:p>
+        </p:txBody>
       </p:sp>
       <p:sp>
         <p:nvSpPr>
@@ -4584,7 +5413,7 @@
           <a:bodyPr wrap="square" lIns="0" tIns="0" rIns="0" bIns="0" rtlCol="0" anchor="ctr"/>
           <a:lstStyle/>
           <a:p>
-            <a:pPr indent="0" marL="0">
+            <a:pPr marL="0" indent="0">
               <a:buNone/>
             </a:pPr>
             <a:r>
@@ -4620,7 +5449,7 @@
           <a:bodyPr wrap="square" lIns="0" tIns="0" rIns="0" bIns="0" rtlCol="0" anchor="ctr"/>
           <a:lstStyle/>
           <a:p>
-            <a:pPr indent="0" marL="0">
+            <a:pPr marL="0" indent="0">
               <a:buNone/>
             </a:pPr>
             <a:r>
@@ -4629,7 +5458,7 @@
                   <a:schemeClr val="accent5"/>
                 </a:solidFill>
               </a:rPr>
-              <a:t>Semanas 13 a 15</a:t>
+              <a:t>Semana 14</a:t>
             </a:r>
             <a:endParaRPr lang="en-US" sz="1400" dirty="0"/>
           </a:p>
@@ -4656,7 +5485,7 @@
           <a:bodyPr wrap="square" lIns="0" tIns="0" rIns="0" bIns="0" rtlCol="0" anchor="ctr"/>
           <a:lstStyle/>
           <a:p>
-            <a:pPr indent="0" marL="0">
+            <a:pPr marL="0" indent="0">
               <a:buNone/>
             </a:pPr>
             <a:r>
@@ -4665,7 +5494,7 @@
                   <a:schemeClr val="tx1"/>
                 </a:solidFill>
               </a:rPr>
-              <a:t>Cierre, documentación y defensa</a:t>
+              <a:t>CI/CD, pruebas E2E, despliegue en Cloud Run y cierre</a:t>
             </a:r>
             <a:endParaRPr lang="en-US" sz="1400" dirty="0"/>
           </a:p>
@@ -4692,6 +5521,13 @@
           </a:solidFill>
           <a:ln/>
         </p:spPr>
+        <p:txBody>
+          <a:bodyPr/>
+          <a:lstStyle/>
+          <a:p>
+            <a:endParaRPr/>
+          </a:p>
+        </p:txBody>
       </p:sp>
       <p:sp>
         <p:nvSpPr>
@@ -4714,7 +5550,7 @@
           <a:bodyPr wrap="square" lIns="0" tIns="0" rIns="0" bIns="0" rtlCol="0" anchor="ctr"/>
           <a:lstStyle/>
           <a:p>
-            <a:pPr algn="ctr" indent="0" marL="0">
+            <a:pPr marL="0" indent="0" algn="ctr">
               <a:buNone/>
             </a:pPr>
             <a:r>
@@ -4723,7 +5559,7 @@
                   <a:schemeClr val="bg1"/>
                 </a:solidFill>
               </a:rPr>
-              <a:t>No iniciado</a:t>
+              <a:t>Por iniciar</a:t>
             </a:r>
             <a:endParaRPr lang="en-US" sz="1200" dirty="0"/>
           </a:p>
@@ -4731,7 +5567,7 @@
       </p:sp>
       <p:sp>
         <p:nvSpPr>
-          <p:cNvPr id="25" name="Slide Number Placeholder 0"/>
+          <p:cNvPr id="33" name="Slide Number Placeholder 0"/>
           <p:cNvSpPr>
             <a:spLocks noGrp="1"/>
           </p:cNvSpPr>
@@ -4749,7 +5585,7 @@
           </a:prstGeom>
           <a:extLst>
             <a:ext uri="{C572A759-6A51-4108-AA02-DFA0A04FC94B}">
-              <ma14:wrappingTextBoxFlag xmlns:ma14="http://schemas.microsoft.com/office/mac/drawingml/2011/main" val="0"/>
+              <ma14:wrappingTextBoxFlag xmlns:ma14="http://schemas.microsoft.com/office/mac/drawingml/2011/main" xmlns="" val="0"/>
             </a:ext>
           </a:extLst>
         </p:spPr>
@@ -4767,7 +5603,7 @@
           <a:p>
             <a:pPr algn="r"/>
             <a:fld id="{F7021451-1387-4CA6-816F-3879F97B5CBC}" type="slidenum">
-              <a:rPr b="0" lang="en-US"/>
+              <a:rPr lang="en-US" b="0"/>
               <a:t>4</a:t>
             </a:fld>
             <a:endParaRPr lang="en-US"/>
@@ -4783,6 +5619,467 @@
 </file>
 
 <file path=ppt/slides/slide5.xml><?xml version="1.0" encoding="utf-8"?>
+<p:sld xmlns:a="http://schemas.openxmlformats.org/drawingml/2006/main" xmlns:r="http://schemas.openxmlformats.org/officeDocument/2006/relationships" xmlns:p="http://schemas.openxmlformats.org/presentationml/2006/main">
+  <p:cSld>
+    <p:spTree>
+      <p:nvGrpSpPr>
+        <p:cNvPr id="1" name=""/>
+        <p:cNvGrpSpPr/>
+        <p:nvPr/>
+      </p:nvGrpSpPr>
+      <p:grpSpPr>
+        <a:xfrm>
+          <a:off x="0" y="0"/>
+          <a:ext cx="0" cy="0"/>
+          <a:chOff x="0" y="0"/>
+          <a:chExt cx="0" cy="0"/>
+        </a:xfrm>
+      </p:grpSpPr>
+      <p:sp>
+        <p:nvSpPr>
+          <p:cNvPr id="2" name="Text 1"/>
+          <p:cNvSpPr>
+            <a:spLocks noGrp="1"/>
+          </p:cNvSpPr>
+          <p:nvPr>
+            <p:ph type="title" idx="101" hasCustomPrompt="1"/>
+          </p:nvPr>
+        </p:nvSpPr>
+        <p:spPr>
+          <a:xfrm>
+            <a:off x="457200" y="320040"/>
+            <a:ext cx="8229600" cy="685800"/>
+          </a:xfrm>
+          <a:prstGeom prst="rect">
+            <a:avLst/>
+          </a:prstGeom>
+          <a:noFill/>
+          <a:ln/>
+        </p:spPr>
+        <p:txBody>
+          <a:bodyPr wrap="square" lIns="0" tIns="0" rIns="0" bIns="0" rtlCol="0" anchor="ctr"/>
+          <a:lstStyle/>
+          <a:p>
+            <a:pPr marL="0" indent="0">
+              <a:buNone/>
+            </a:pPr>
+            <a:r>
+              <a:rPr lang="en-US" sz="3400" b="1" dirty="0">
+                <a:solidFill>
+                  <a:schemeClr val="tx2"/>
+                </a:solidFill>
+              </a:rPr>
+              <a:t>Gestión ágil del Sprint 3</a:t>
+            </a:r>
+            <a:endParaRPr lang="en-US" sz="3400" dirty="0"/>
+          </a:p>
+        </p:txBody>
+      </p:sp>
+      <p:sp>
+        <p:nvSpPr>
+          <p:cNvPr id="25" name="Slide Number Placeholder 0"/>
+          <p:cNvSpPr>
+            <a:spLocks noGrp="1"/>
+          </p:cNvSpPr>
+          <p:nvPr>
+            <p:ph type="sldNum" sz="quarter" idx="4294967295"/>
+          </p:nvPr>
+        </p:nvSpPr>
+        <p:spPr>
+          <a:xfrm>
+            <a:off x="8229600" y="4846320"/>
+            <a:ext cx="457200" cy="228600"/>
+          </a:xfrm>
+          <a:prstGeom prst="rect">
+            <a:avLst/>
+          </a:prstGeom>
+          <a:extLst>
+            <a:ext uri="{C572A759-6A51-4108-AA02-DFA0A04FC94B}">
+              <ma14:wrappingTextBoxFlag xmlns:ma14="http://schemas.microsoft.com/office/mac/drawingml/2011/main" xmlns="" val="0"/>
+            </a:ext>
+          </a:extLst>
+        </p:spPr>
+        <p:txBody>
+          <a:bodyPr/>
+          <a:lstStyle>
+            <a:lvl1pPr>
+              <a:defRPr sz="1000">
+                <a:solidFill>
+                  <a:schemeClr val="accent5"/>
+                </a:solidFill>
+              </a:defRPr>
+            </a:lvl1pPr>
+          </a:lstStyle>
+          <a:p>
+            <a:pPr algn="r"/>
+            <a:fld id="{F7021451-1387-4CA6-816F-3879F97B5CBC}" type="slidenum">
+              <a:rPr lang="en-US" b="0"/>
+              <a:t>5</a:t>
+            </a:fld>
+            <a:endParaRPr lang="en-US"/>
+          </a:p>
+        </p:txBody>
+      </p:sp>
+      <p:graphicFrame>
+        <p:nvGraphicFramePr>
+          <p:cNvPr id="26" name="Burndown Sprint 3"/>
+          <p:cNvGraphicFramePr>
+            <a:graphicFrameLocks noGrp="1"/>
+          </p:cNvGraphicFramePr>
+          <p:nvPr/>
+        </p:nvGraphicFramePr>
+        <p:xfrm>
+          <a:off x="457200" y="1188720"/>
+          <a:ext cx="5120640" cy="3474720"/>
+        </p:xfrm>
+        <a:graphic>
+          <a:graphicData uri="http://schemas.openxmlformats.org/drawingml/2006/chart">
+            <c:chart xmlns:c="http://schemas.openxmlformats.org/drawingml/2006/chart" xmlns:r="http://schemas.openxmlformats.org/officeDocument/2006/relationships" r:id="rId3"/>
+          </a:graphicData>
+        </a:graphic>
+      </p:graphicFrame>
+      <p:sp>
+        <p:nvSpPr>
+          <p:cNvPr id="4" name="Tarjeta cifra 1"/>
+          <p:cNvSpPr/>
+          <p:nvPr/>
+        </p:nvSpPr>
+        <p:spPr>
+          <a:xfrm>
+            <a:off x="5852160" y="1188720"/>
+            <a:ext cx="2834640" cy="1051560"/>
+          </a:xfrm>
+          <a:prstGeom prst="roundRect">
+            <a:avLst>
+              <a:gd name="adj" fmla="val 4762"/>
+            </a:avLst>
+          </a:prstGeom>
+          <a:solidFill>
+            <a:schemeClr val="bg2"/>
+          </a:solidFill>
+          <a:ln/>
+          <a:effectLst>
+            <a:outerShdw blurRad="76200" dist="25400" dir="5400000" algn="bl" rotWithShape="0">
+              <a:srgbClr val="000000">
+                <a:alpha val="12000"/>
+              </a:srgbClr>
+            </a:outerShdw>
+          </a:effectLst>
+        </p:spPr>
+        <p:txBody>
+          <a:bodyPr/>
+          <a:lstStyle/>
+          <a:p>
+            <a:endParaRPr/>
+          </a:p>
+        </p:txBody>
+      </p:sp>
+      <p:sp>
+        <p:nvSpPr>
+          <p:cNvPr id="5" name="Text 3"/>
+          <p:cNvSpPr txBox="1"/>
+          <p:nvPr/>
+        </p:nvSpPr>
+        <p:spPr>
+          <a:xfrm>
+            <a:off x="5852160" y="1261872"/>
+            <a:ext cx="2834640" cy="566928"/>
+          </a:xfrm>
+          <a:prstGeom prst="rect">
+            <a:avLst/>
+          </a:prstGeom>
+          <a:noFill/>
+          <a:ln/>
+        </p:spPr>
+        <p:txBody>
+          <a:bodyPr wrap="square" lIns="0" tIns="0" rIns="0" bIns="0" rtlCol="0" anchor="ctr"/>
+          <a:lstStyle/>
+          <a:p>
+            <a:pPr marL="0" indent="0" algn="ctr">
+              <a:buNone/>
+            </a:pPr>
+            <a:r>
+              <a:rPr lang="en-US" sz="3000" b="1" dirty="0">
+                <a:solidFill>
+                  <a:schemeClr val="tx2"/>
+                </a:solidFill>
+                <a:latin typeface="Cambria" pitchFamily="34" charset="0"/>
+                <a:ea typeface="Cambria" pitchFamily="34" charset="-122"/>
+                <a:cs typeface="Cambria" pitchFamily="34" charset="-120"/>
+              </a:rPr>
+              <a:t>20 de 20</a:t>
+            </a:r>
+            <a:endParaRPr lang="en-US" sz="3000" dirty="0"/>
+          </a:p>
+        </p:txBody>
+      </p:sp>
+      <p:sp>
+        <p:nvSpPr>
+          <p:cNvPr id="6" name="Text 4"/>
+          <p:cNvSpPr txBox="1"/>
+          <p:nvPr/>
+        </p:nvSpPr>
+        <p:spPr>
+          <a:xfrm>
+            <a:off x="5989320" y="1810512"/>
+            <a:ext cx="2560320" cy="393192"/>
+          </a:xfrm>
+          <a:prstGeom prst="rect">
+            <a:avLst/>
+          </a:prstGeom>
+          <a:noFill/>
+          <a:ln/>
+        </p:spPr>
+        <p:txBody>
+          <a:bodyPr wrap="square" lIns="0" tIns="0" rIns="0" bIns="0" rtlCol="0" anchor="t"/>
+          <a:lstStyle/>
+          <a:p>
+            <a:pPr marL="0" indent="0" algn="ctr">
+              <a:buNone/>
+            </a:pPr>
+            <a:r>
+              <a:rPr lang="en-US" sz="1400" dirty="0">
+                <a:solidFill>
+                  <a:schemeClr val="tx1"/>
+                </a:solidFill>
+              </a:rPr>
+              <a:t>puntos completados del compromiso final</a:t>
+            </a:r>
+            <a:endParaRPr lang="en-US" sz="1400" dirty="0"/>
+          </a:p>
+        </p:txBody>
+      </p:sp>
+      <p:sp>
+        <p:nvSpPr>
+          <p:cNvPr id="100" name="Tarjeta cifra 1"/>
+          <p:cNvSpPr/>
+          <p:nvPr/>
+        </p:nvSpPr>
+        <p:spPr>
+          <a:xfrm>
+            <a:off x="5852160" y="2377440"/>
+            <a:ext cx="2834640" cy="1051560"/>
+          </a:xfrm>
+          <a:prstGeom prst="roundRect">
+            <a:avLst>
+              <a:gd name="adj" fmla="val 4762"/>
+            </a:avLst>
+          </a:prstGeom>
+          <a:solidFill>
+            <a:schemeClr val="bg2"/>
+          </a:solidFill>
+          <a:ln/>
+          <a:effectLst>
+            <a:outerShdw blurRad="76200" dist="25400" dir="5400000" algn="bl" rotWithShape="0">
+              <a:srgbClr val="000000">
+                <a:alpha val="12000"/>
+              </a:srgbClr>
+            </a:outerShdw>
+          </a:effectLst>
+        </p:spPr>
+        <p:txBody>
+          <a:bodyPr/>
+          <a:lstStyle/>
+          <a:p>
+            <a:endParaRPr/>
+          </a:p>
+        </p:txBody>
+      </p:sp>
+      <p:sp>
+        <p:nvSpPr>
+          <p:cNvPr id="101" name="Text 3"/>
+          <p:cNvSpPr txBox="1"/>
+          <p:nvPr/>
+        </p:nvSpPr>
+        <p:spPr>
+          <a:xfrm>
+            <a:off x="5852160" y="2450592"/>
+            <a:ext cx="2834640" cy="566928"/>
+          </a:xfrm>
+          <a:prstGeom prst="rect">
+            <a:avLst/>
+          </a:prstGeom>
+          <a:noFill/>
+          <a:ln/>
+        </p:spPr>
+        <p:txBody>
+          <a:bodyPr wrap="square" lIns="0" tIns="0" rIns="0" bIns="0" rtlCol="0" anchor="ctr"/>
+          <a:lstStyle/>
+          <a:p>
+            <a:pPr marL="0" indent="0" algn="ctr">
+              <a:buNone/>
+            </a:pPr>
+            <a:r>
+              <a:rPr lang="en-US" sz="3000" b="1" dirty="0">
+                <a:solidFill>
+                  <a:schemeClr val="tx2"/>
+                </a:solidFill>
+                <a:latin typeface="Cambria" pitchFamily="34" charset="0"/>
+                <a:ea typeface="Cambria" pitchFamily="34" charset="-122"/>
+                <a:cs typeface="Cambria" pitchFamily="34" charset="-120"/>
+              </a:rPr>
+              <a:t>16</a:t>
+            </a:r>
+            <a:endParaRPr lang="en-US" sz="3000" dirty="0"/>
+          </a:p>
+        </p:txBody>
+      </p:sp>
+      <p:sp>
+        <p:nvSpPr>
+          <p:cNvPr id="102" name="Text 4"/>
+          <p:cNvSpPr txBox="1"/>
+          <p:nvPr/>
+        </p:nvSpPr>
+        <p:spPr>
+          <a:xfrm>
+            <a:off x="5989320" y="2999232"/>
+            <a:ext cx="2560320" cy="393192"/>
+          </a:xfrm>
+          <a:prstGeom prst="rect">
+            <a:avLst/>
+          </a:prstGeom>
+          <a:noFill/>
+          <a:ln/>
+        </p:spPr>
+        <p:txBody>
+          <a:bodyPr wrap="square" lIns="0" tIns="0" rIns="0" bIns="0" rtlCol="0" anchor="t"/>
+          <a:lstStyle/>
+          <a:p>
+            <a:pPr marL="0" indent="0" algn="ctr">
+              <a:buNone/>
+            </a:pPr>
+            <a:r>
+              <a:rPr lang="en-US" sz="1400" dirty="0">
+                <a:solidFill>
+                  <a:schemeClr val="tx1"/>
+                </a:solidFill>
+              </a:rPr>
+              <a:t>puntos (gráficos e IA) trasladados al Sprint 4</a:t>
+            </a:r>
+            <a:endParaRPr lang="en-US" sz="1400" dirty="0"/>
+          </a:p>
+        </p:txBody>
+      </p:sp>
+      <p:sp>
+        <p:nvSpPr>
+          <p:cNvPr id="103" name="Tarjeta cifra 1"/>
+          <p:cNvSpPr/>
+          <p:nvPr/>
+        </p:nvSpPr>
+        <p:spPr>
+          <a:xfrm>
+            <a:off x="5852160" y="3566160"/>
+            <a:ext cx="2834640" cy="1097280"/>
+          </a:xfrm>
+          <a:prstGeom prst="roundRect">
+            <a:avLst>
+              <a:gd name="adj" fmla="val 4762"/>
+            </a:avLst>
+          </a:prstGeom>
+          <a:solidFill>
+            <a:schemeClr val="bg2"/>
+          </a:solidFill>
+          <a:ln/>
+          <a:effectLst>
+            <a:outerShdw blurRad="76200" dist="25400" dir="5400000" algn="bl" rotWithShape="0">
+              <a:srgbClr val="000000">
+                <a:alpha val="12000"/>
+              </a:srgbClr>
+            </a:outerShdw>
+          </a:effectLst>
+        </p:spPr>
+        <p:txBody>
+          <a:bodyPr/>
+          <a:lstStyle/>
+          <a:p>
+            <a:endParaRPr/>
+          </a:p>
+        </p:txBody>
+      </p:sp>
+      <p:sp>
+        <p:nvSpPr>
+          <p:cNvPr id="104" name="Text 3"/>
+          <p:cNvSpPr txBox="1"/>
+          <p:nvPr/>
+        </p:nvSpPr>
+        <p:spPr>
+          <a:xfrm>
+            <a:off x="5852160" y="3639312"/>
+            <a:ext cx="2834640" cy="566928"/>
+          </a:xfrm>
+          <a:prstGeom prst="rect">
+            <a:avLst/>
+          </a:prstGeom>
+          <a:noFill/>
+          <a:ln/>
+        </p:spPr>
+        <p:txBody>
+          <a:bodyPr wrap="square" lIns="0" tIns="0" rIns="0" bIns="0" rtlCol="0" anchor="ctr"/>
+          <a:lstStyle/>
+          <a:p>
+            <a:pPr marL="0" indent="0" algn="ctr">
+              <a:buNone/>
+            </a:pPr>
+            <a:r>
+              <a:rPr lang="en-US" sz="3000" b="1" dirty="0">
+                <a:solidFill>
+                  <a:schemeClr val="tx2"/>
+                </a:solidFill>
+                <a:latin typeface="Cambria" pitchFamily="34" charset="0"/>
+                <a:ea typeface="Cambria" pitchFamily="34" charset="-122"/>
+                <a:cs typeface="Cambria" pitchFamily="34" charset="-120"/>
+              </a:rPr>
+              <a:t>27 · 24 · 20</a:t>
+            </a:r>
+            <a:endParaRPr lang="en-US" sz="3000" dirty="0"/>
+          </a:p>
+        </p:txBody>
+      </p:sp>
+      <p:sp>
+        <p:nvSpPr>
+          <p:cNvPr id="105" name="Text 4"/>
+          <p:cNvSpPr txBox="1"/>
+          <p:nvPr/>
+        </p:nvSpPr>
+        <p:spPr>
+          <a:xfrm>
+            <a:off x="5989320" y="4187952"/>
+            <a:ext cx="2560320" cy="438912"/>
+          </a:xfrm>
+          <a:prstGeom prst="rect">
+            <a:avLst/>
+          </a:prstGeom>
+          <a:noFill/>
+          <a:ln/>
+        </p:spPr>
+        <p:txBody>
+          <a:bodyPr wrap="square" lIns="0" tIns="0" rIns="0" bIns="0" rtlCol="0" anchor="t"/>
+          <a:lstStyle/>
+          <a:p>
+            <a:pPr marL="0" indent="0" algn="ctr">
+              <a:buNone/>
+            </a:pPr>
+            <a:r>
+              <a:rPr lang="en-US" sz="1400" dirty="0">
+                <a:solidFill>
+                  <a:schemeClr val="tx1"/>
+                </a:solidFill>
+              </a:rPr>
+              <a:t>velocidad en los Sprints 1, 2 y 3 (puntos)</a:t>
+            </a:r>
+            <a:endParaRPr lang="en-US" sz="1400" dirty="0"/>
+          </a:p>
+        </p:txBody>
+      </p:sp>
+    </p:spTree>
+  </p:cSld>
+  <p:clrMapOvr>
+    <a:masterClrMapping/>
+  </p:clrMapOvr>
+</p:sld>
+</file>
+
+<file path=ppt/slides/slide6.xml><?xml version="1.0" encoding="utf-8"?>
 <p:sld xmlns:a="http://schemas.openxmlformats.org/drawingml/2006/main" xmlns:r="http://schemas.openxmlformats.org/officeDocument/2006/relationships" xmlns:p="http://schemas.openxmlformats.org/presentationml/2006/main">
   <p:cSld name="Slide 5">
     <p:spTree>
@@ -4802,9 +6099,11 @@
       <p:sp>
         <p:nvSpPr>
           <p:cNvPr id="2" name="Text 1"/>
-          <p:cNvSpPr/>
+          <p:cNvSpPr>
+            <a:spLocks noGrp="1"/>
+          </p:cNvSpPr>
           <p:nvPr>
-            <p:ph idx="101" type="title" hasCustomPrompt="1"/>
+            <p:ph type="title" idx="101" hasCustomPrompt="1"/>
           </p:nvPr>
         </p:nvSpPr>
         <p:spPr>
@@ -4822,7 +6121,7 @@
           <a:bodyPr wrap="square" lIns="0" tIns="0" rIns="0" bIns="0" rtlCol="0" anchor="ctr"/>
           <a:lstStyle/>
           <a:p>
-            <a:pPr indent="0" marL="0">
+            <a:pPr marL="0" indent="0">
               <a:buNone/>
             </a:pPr>
             <a:r>
@@ -4955,14 +6254,14 @@
       </p:sp>
       <p:pic>
         <p:nvPicPr>
-          <p:cNvPr id="5" name="Image 0" descr="Diagrama entidad-relación de LogiSLA">    </p:cNvPr>
+          <p:cNvPr id="5" name="Image 0" descr="Diagrama entidad-relación de LogiSLA"/>
           <p:cNvPicPr>
             <a:picLocks noChangeAspect="1"/>
           </p:cNvPicPr>
           <p:nvPr/>
         </p:nvPicPr>
         <p:blipFill>
-          <a:blip r:embed="rId1"/>
+          <a:blip r:embed="rId3"/>
           <a:stretch>
             <a:fillRect/>
           </a:stretch>
@@ -4997,7 +6296,7 @@
           </a:prstGeom>
           <a:extLst>
             <a:ext uri="{C572A759-6A51-4108-AA02-DFA0A04FC94B}">
-              <ma14:wrappingTextBoxFlag xmlns:ma14="http://schemas.microsoft.com/office/mac/drawingml/2011/main" val="0"/>
+              <ma14:wrappingTextBoxFlag xmlns:ma14="http://schemas.microsoft.com/office/mac/drawingml/2011/main" xmlns="" val="0"/>
             </a:ext>
           </a:extLst>
         </p:spPr>
@@ -5015,8 +6314,8 @@
           <a:p>
             <a:pPr algn="r"/>
             <a:fld id="{F7021451-1387-4CA6-816F-3879F97B5CBC}" type="slidenum">
-              <a:rPr b="0" lang="en-US"/>
-              <a:t>5</a:t>
+              <a:rPr lang="en-US" b="0"/>
+              <a:t>6</a:t>
             </a:fld>
             <a:endParaRPr lang="en-US"/>
           </a:p>
@@ -5030,7 +6329,7 @@
 </p:sld>
 </file>
 
-<file path=ppt/slides/slide6.xml><?xml version="1.0" encoding="utf-8"?>
+<file path=ppt/slides/slide7.xml><?xml version="1.0" encoding="utf-8"?>
 <p:sld xmlns:a="http://schemas.openxmlformats.org/drawingml/2006/main" xmlns:r="http://schemas.openxmlformats.org/officeDocument/2006/relationships" xmlns:p="http://schemas.openxmlformats.org/presentationml/2006/main">
   <p:cSld name="Slide 6">
     <p:spTree>
@@ -5050,9 +6349,11 @@
       <p:sp>
         <p:nvSpPr>
           <p:cNvPr id="2" name="Text 1"/>
-          <p:cNvSpPr/>
+          <p:cNvSpPr>
+            <a:spLocks noGrp="1"/>
+          </p:cNvSpPr>
           <p:nvPr>
-            <p:ph idx="101" type="title" hasCustomPrompt="1"/>
+            <p:ph type="title" idx="101" hasCustomPrompt="1"/>
           </p:nvPr>
         </p:nvSpPr>
         <p:spPr>
@@ -5070,7 +6371,7 @@
           <a:bodyPr wrap="square" lIns="0" tIns="0" rIns="0" bIns="0" rtlCol="0" anchor="ctr"/>
           <a:lstStyle/>
           <a:p>
-            <a:pPr indent="0" marL="0">
+            <a:pPr marL="0" indent="0">
               <a:buNone/>
             </a:pPr>
             <a:r>
@@ -5087,7 +6388,7 @@
       </p:sp>
       <p:graphicFrame>
         <p:nvGraphicFramePr>
-          <p:cNvPr id="3" name="Chart 0" descr=""/>
+          <p:cNvPr id="3" name="Chart 0"/>
           <p:cNvGraphicFramePr/>
           <p:nvPr/>
         </p:nvGraphicFramePr>
@@ -5095,9 +6396,9 @@
           <a:off x="457200" y="1188720"/>
           <a:ext cx="4023360" cy="3474720"/>
         </p:xfrm>
-        <a:graphic xmlns:a="http://schemas.openxmlformats.org/drawingml/2006/main">
+        <a:graphic>
           <a:graphicData uri="http://schemas.openxmlformats.org/drawingml/2006/chart">
-            <c:chart xmlns:c="http://schemas.openxmlformats.org/drawingml/2006/chart" r:id="rId1"/>
+            <c:chart xmlns:c="http://schemas.openxmlformats.org/drawingml/2006/chart" xmlns:r="http://schemas.openxmlformats.org/officeDocument/2006/relationships" r:id="rId3"/>
           </a:graphicData>
         </a:graphic>
       </p:graphicFrame>
@@ -5120,170 +6421,17 @@
           </a:solidFill>
           <a:ln/>
         </p:spPr>
+        <p:txBody>
+          <a:bodyPr/>
+          <a:lstStyle/>
+          <a:p>
+            <a:endParaRPr/>
+          </a:p>
+        </p:txBody>
       </p:sp>
       <p:pic>
         <p:nvPicPr>
-          <p:cNvPr id="5" name="Image 0" descr="Listo">    </p:cNvPr>
-          <p:cNvPicPr>
-            <a:picLocks noChangeAspect="1"/>
-          </p:cNvPicPr>
-          <p:nvPr/>
-        </p:nvPicPr>
-        <p:blipFill>
-          <a:blip r:embed="rId2"/>
-          <a:stretch>
-            <a:fillRect/>
-          </a:stretch>
-        </p:blipFill>
-        <p:spPr>
-          <a:xfrm>
-            <a:off x="4937760" y="1417320"/>
-            <a:ext cx="228600" cy="228600"/>
-          </a:xfrm>
-          <a:prstGeom prst="rect">
-            <a:avLst/>
-          </a:prstGeom>
-        </p:spPr>
-      </p:pic>
-      <p:sp>
-        <p:nvSpPr>
-          <p:cNvPr id="6" name="Text 2"/>
-          <p:cNvSpPr txBox="1"/>
-          <p:nvPr/>
-        </p:nvSpPr>
-        <p:spPr>
-          <a:xfrm>
-            <a:off x="5440680" y="1234440"/>
-            <a:ext cx="3246120" cy="731520"/>
-          </a:xfrm>
-          <a:prstGeom prst="rect">
-            <a:avLst/>
-          </a:prstGeom>
-          <a:noFill/>
-          <a:ln/>
-        </p:spPr>
-        <p:txBody>
-          <a:bodyPr wrap="square" lIns="0" tIns="0" rIns="0" bIns="0" rtlCol="0" anchor="ctr"/>
-          <a:lstStyle/>
-          <a:p>
-            <a:pPr indent="0" marL="0">
-              <a:buNone/>
-            </a:pPr>
-            <a:r>
-              <a:rPr lang="en-US" sz="1400" dirty="0">
-                <a:solidFill>
-                  <a:schemeClr val="tx1"/>
-                </a:solidFill>
-              </a:rPr>
-              <a:t>Pruebas escritas junto con cada módulo, sin depender de red ni de una base de datos externa</a:t>
-            </a:r>
-            <a:endParaRPr lang="en-US" sz="1400" dirty="0"/>
-          </a:p>
-        </p:txBody>
-      </p:sp>
-      <p:sp>
-        <p:nvSpPr>
-          <p:cNvPr id="7" name="Circulo check 2"/>
-          <p:cNvSpPr/>
-          <p:nvPr/>
-        </p:nvSpPr>
-        <p:spPr>
-          <a:xfrm>
-            <a:off x="4846320" y="2194560"/>
-            <a:ext cx="411480" cy="411480"/>
-          </a:xfrm>
-          <a:prstGeom prst="ellipse">
-            <a:avLst/>
-          </a:prstGeom>
-          <a:solidFill>
-            <a:schemeClr val="accent3"/>
-          </a:solidFill>
-          <a:ln/>
-        </p:spPr>
-      </p:sp>
-      <p:pic>
-        <p:nvPicPr>
-          <p:cNvPr id="8" name="Image 1" descr="Listo">    </p:cNvPr>
-          <p:cNvPicPr>
-            <a:picLocks noChangeAspect="1"/>
-          </p:cNvPicPr>
-          <p:nvPr/>
-        </p:nvPicPr>
-        <p:blipFill>
-          <a:blip r:embed="rId3"/>
-          <a:stretch>
-            <a:fillRect/>
-          </a:stretch>
-        </p:blipFill>
-        <p:spPr>
-          <a:xfrm>
-            <a:off x="4937760" y="2286000"/>
-            <a:ext cx="228600" cy="228600"/>
-          </a:xfrm>
-          <a:prstGeom prst="rect">
-            <a:avLst/>
-          </a:prstGeom>
-        </p:spPr>
-      </p:pic>
-      <p:sp>
-        <p:nvSpPr>
-          <p:cNvPr id="9" name="Text 4"/>
-          <p:cNvSpPr txBox="1"/>
-          <p:nvPr/>
-        </p:nvSpPr>
-        <p:spPr>
-          <a:xfrm>
-            <a:off x="5440680" y="2103120"/>
-            <a:ext cx="3246120" cy="731520"/>
-          </a:xfrm>
-          <a:prstGeom prst="rect">
-            <a:avLst/>
-          </a:prstGeom>
-          <a:noFill/>
-          <a:ln/>
-        </p:spPr>
-        <p:txBody>
-          <a:bodyPr wrap="square" lIns="0" tIns="0" rIns="0" bIns="0" rtlCol="0" anchor="ctr"/>
-          <a:lstStyle/>
-          <a:p>
-            <a:pPr indent="0" marL="0">
-              <a:buNone/>
-            </a:pPr>
-            <a:r>
-              <a:rPr lang="en-US" sz="1400" dirty="0">
-                <a:solidFill>
-                  <a:schemeClr val="tx1"/>
-                </a:solidFill>
-              </a:rPr>
-              <a:t>Cálculo determinístico y probado: la IA nunca modifica los montos</a:t>
-            </a:r>
-            <a:endParaRPr lang="en-US" sz="1400" dirty="0"/>
-          </a:p>
-        </p:txBody>
-      </p:sp>
-      <p:sp>
-        <p:nvSpPr>
-          <p:cNvPr id="10" name="Circulo check 3"/>
-          <p:cNvSpPr/>
-          <p:nvPr/>
-        </p:nvSpPr>
-        <p:spPr>
-          <a:xfrm>
-            <a:off x="4846320" y="3063240"/>
-            <a:ext cx="411480" cy="411480"/>
-          </a:xfrm>
-          <a:prstGeom prst="ellipse">
-            <a:avLst/>
-          </a:prstGeom>
-          <a:solidFill>
-            <a:schemeClr val="accent3"/>
-          </a:solidFill>
-          <a:ln/>
-        </p:spPr>
-      </p:sp>
-      <p:pic>
-        <p:nvPicPr>
-          <p:cNvPr id="11" name="Image 2" descr="Listo">    </p:cNvPr>
+          <p:cNvPr id="5" name="Image 0" descr="Listo"/>
           <p:cNvPicPr>
             <a:picLocks noChangeAspect="1"/>
           </p:cNvPicPr>
@@ -5297,7 +6445,7 @@
         </p:blipFill>
         <p:spPr>
           <a:xfrm>
-            <a:off x="4937760" y="3154680"/>
+            <a:off x="4937760" y="1417320"/>
             <a:ext cx="228600" cy="228600"/>
           </a:xfrm>
           <a:prstGeom prst="rect">
@@ -5307,13 +6455,13 @@
       </p:pic>
       <p:sp>
         <p:nvSpPr>
-          <p:cNvPr id="12" name="Text 6"/>
+          <p:cNvPr id="6" name="Text 2"/>
           <p:cNvSpPr txBox="1"/>
           <p:nvPr/>
         </p:nvSpPr>
         <p:spPr>
           <a:xfrm>
-            <a:off x="5440680" y="2971800"/>
+            <a:off x="5440680" y="1234440"/>
             <a:ext cx="3246120" cy="731520"/>
           </a:xfrm>
           <a:prstGeom prst="rect">
@@ -5326,7 +6474,7 @@
           <a:bodyPr wrap="square" lIns="0" tIns="0" rIns="0" bIns="0" rtlCol="0" anchor="ctr"/>
           <a:lstStyle/>
           <a:p>
-            <a:pPr indent="0" marL="0">
+            <a:pPr marL="0" indent="0">
               <a:buNone/>
             </a:pPr>
             <a:r>
@@ -5335,7 +6483,7 @@
                   <a:schemeClr val="tx1"/>
                 </a:solidFill>
               </a:rPr>
-              <a:t>Casos límite: columnas no reconocidas, guías sin fecha, transportista sin regla y caída de la IA</a:t>
+              <a:t>Pruebas escritas junto con cada módulo, sin depender de red ni de una base de datos externa</a:t>
             </a:r>
             <a:endParaRPr lang="en-US" sz="1400" dirty="0"/>
           </a:p>
@@ -5343,13 +6491,13 @@
       </p:sp>
       <p:sp>
         <p:nvSpPr>
-          <p:cNvPr id="13" name="Circulo check 4"/>
+          <p:cNvPr id="7" name="Circulo check 2"/>
           <p:cNvSpPr/>
           <p:nvPr/>
         </p:nvSpPr>
         <p:spPr>
           <a:xfrm>
-            <a:off x="4846320" y="3931920"/>
+            <a:off x="4846320" y="2194560"/>
             <a:ext cx="411480" cy="411480"/>
           </a:xfrm>
           <a:prstGeom prst="ellipse">
@@ -5360,23 +6508,204 @@
           </a:solidFill>
           <a:ln/>
         </p:spPr>
+        <p:txBody>
+          <a:bodyPr/>
+          <a:lstStyle/>
+          <a:p>
+            <a:endParaRPr/>
+          </a:p>
+        </p:txBody>
       </p:sp>
       <p:pic>
         <p:nvPicPr>
-          <p:cNvPr id="14" name="Image 3" descr="Listo">    </p:cNvPr>
+          <p:cNvPr id="8" name="Image 1" descr="Listo"/>
           <p:cNvPicPr>
             <a:picLocks noChangeAspect="1"/>
           </p:cNvPicPr>
           <p:nvPr/>
         </p:nvPicPr>
         <p:blipFill>
-          <a:blip r:embed="rId5"/>
+          <a:blip r:embed="rId4"/>
           <a:stretch>
             <a:fillRect/>
           </a:stretch>
         </p:blipFill>
         <p:spPr>
           <a:xfrm>
+            <a:off x="4937760" y="2286000"/>
+            <a:ext cx="228600" cy="228600"/>
+          </a:xfrm>
+          <a:prstGeom prst="rect">
+            <a:avLst/>
+          </a:prstGeom>
+        </p:spPr>
+      </p:pic>
+      <p:sp>
+        <p:nvSpPr>
+          <p:cNvPr id="9" name="Text 4"/>
+          <p:cNvSpPr txBox="1"/>
+          <p:nvPr/>
+        </p:nvSpPr>
+        <p:spPr>
+          <a:xfrm>
+            <a:off x="5440680" y="2103120"/>
+            <a:ext cx="3246120" cy="731520"/>
+          </a:xfrm>
+          <a:prstGeom prst="rect">
+            <a:avLst/>
+          </a:prstGeom>
+          <a:noFill/>
+          <a:ln/>
+        </p:spPr>
+        <p:txBody>
+          <a:bodyPr wrap="square" lIns="0" tIns="0" rIns="0" bIns="0" rtlCol="0" anchor="ctr"/>
+          <a:lstStyle/>
+          <a:p>
+            <a:pPr marL="0" indent="0">
+              <a:buNone/>
+            </a:pPr>
+            <a:r>
+              <a:rPr lang="en-US" sz="1400" dirty="0">
+                <a:solidFill>
+                  <a:schemeClr val="tx1"/>
+                </a:solidFill>
+              </a:rPr>
+              <a:t>Cálculo determinístico y probado: la IA del Sprint 4 no modificará montos</a:t>
+            </a:r>
+            <a:endParaRPr lang="en-US" sz="1400" dirty="0"/>
+          </a:p>
+        </p:txBody>
+      </p:sp>
+      <p:sp>
+        <p:nvSpPr>
+          <p:cNvPr id="10" name="Circulo check 3"/>
+          <p:cNvSpPr/>
+          <p:nvPr/>
+        </p:nvSpPr>
+        <p:spPr>
+          <a:xfrm>
+            <a:off x="4846320" y="3063240"/>
+            <a:ext cx="411480" cy="411480"/>
+          </a:xfrm>
+          <a:prstGeom prst="ellipse">
+            <a:avLst/>
+          </a:prstGeom>
+          <a:solidFill>
+            <a:schemeClr val="accent3"/>
+          </a:solidFill>
+          <a:ln/>
+        </p:spPr>
+        <p:txBody>
+          <a:bodyPr/>
+          <a:lstStyle/>
+          <a:p>
+            <a:endParaRPr/>
+          </a:p>
+        </p:txBody>
+      </p:sp>
+      <p:pic>
+        <p:nvPicPr>
+          <p:cNvPr id="11" name="Image 2" descr="Listo"/>
+          <p:cNvPicPr>
+            <a:picLocks noChangeAspect="1"/>
+          </p:cNvPicPr>
+          <p:nvPr/>
+        </p:nvPicPr>
+        <p:blipFill>
+          <a:blip r:embed="rId4"/>
+          <a:stretch>
+            <a:fillRect/>
+          </a:stretch>
+        </p:blipFill>
+        <p:spPr>
+          <a:xfrm>
+            <a:off x="4937760" y="3154680"/>
+            <a:ext cx="228600" cy="228600"/>
+          </a:xfrm>
+          <a:prstGeom prst="rect">
+            <a:avLst/>
+          </a:prstGeom>
+        </p:spPr>
+      </p:pic>
+      <p:sp>
+        <p:nvSpPr>
+          <p:cNvPr id="12" name="Text 6"/>
+          <p:cNvSpPr txBox="1"/>
+          <p:nvPr/>
+        </p:nvSpPr>
+        <p:spPr>
+          <a:xfrm>
+            <a:off x="5440680" y="2971800"/>
+            <a:ext cx="3246120" cy="731520"/>
+          </a:xfrm>
+          <a:prstGeom prst="rect">
+            <a:avLst/>
+          </a:prstGeom>
+          <a:noFill/>
+          <a:ln/>
+        </p:spPr>
+        <p:txBody>
+          <a:bodyPr wrap="square" lIns="0" tIns="0" rIns="0" bIns="0" rtlCol="0" anchor="ctr"/>
+          <a:lstStyle/>
+          <a:p>
+            <a:pPr marL="0" indent="0">
+              <a:buNone/>
+            </a:pPr>
+            <a:r>
+              <a:rPr lang="en-US" sz="1400" dirty="0">
+                <a:solidFill>
+                  <a:schemeClr val="tx1"/>
+                </a:solidFill>
+              </a:rPr>
+              <a:t>Casos límite: columnas no reconocidas, guías sin fecha de entrega y transportista sin regla</a:t>
+            </a:r>
+            <a:endParaRPr lang="en-US" sz="1400" dirty="0"/>
+          </a:p>
+        </p:txBody>
+      </p:sp>
+      <p:sp>
+        <p:nvSpPr>
+          <p:cNvPr id="13" name="Circulo check 4"/>
+          <p:cNvSpPr/>
+          <p:nvPr/>
+        </p:nvSpPr>
+        <p:spPr>
+          <a:xfrm>
+            <a:off x="4846320" y="3931920"/>
+            <a:ext cx="411480" cy="411480"/>
+          </a:xfrm>
+          <a:prstGeom prst="ellipse">
+            <a:avLst/>
+          </a:prstGeom>
+          <a:solidFill>
+            <a:schemeClr val="accent3"/>
+          </a:solidFill>
+          <a:ln/>
+        </p:spPr>
+        <p:txBody>
+          <a:bodyPr/>
+          <a:lstStyle/>
+          <a:p>
+            <a:endParaRPr/>
+          </a:p>
+        </p:txBody>
+      </p:sp>
+      <p:pic>
+        <p:nvPicPr>
+          <p:cNvPr id="14" name="Image 3" descr="Listo"/>
+          <p:cNvPicPr>
+            <a:picLocks noChangeAspect="1"/>
+          </p:cNvPicPr>
+          <p:nvPr/>
+        </p:nvPicPr>
+        <p:blipFill>
+          <a:blip r:embed="rId4"/>
+          <a:stretch>
+            <a:fillRect/>
+          </a:stretch>
+        </p:blipFill>
+        <p:spPr>
+          <a:xfrm>
             <a:off x="4937760" y="4023360"/>
             <a:ext cx="228600" cy="228600"/>
           </a:xfrm>
@@ -5406,7 +6735,7 @@
           <a:bodyPr wrap="square" lIns="0" tIns="0" rIns="0" bIns="0" rtlCol="0" anchor="ctr"/>
           <a:lstStyle/>
           <a:p>
-            <a:pPr indent="0" marL="0">
+            <a:pPr marL="0" indent="0">
               <a:buNone/>
             </a:pPr>
             <a:r>
@@ -5441,7 +6770,7 @@
           </a:prstGeom>
           <a:extLst>
             <a:ext uri="{C572A759-6A51-4108-AA02-DFA0A04FC94B}">
-              <ma14:wrappingTextBoxFlag xmlns:ma14="http://schemas.microsoft.com/office/mac/drawingml/2011/main" val="0"/>
+              <ma14:wrappingTextBoxFlag xmlns:ma14="http://schemas.microsoft.com/office/mac/drawingml/2011/main" xmlns="" val="0"/>
             </a:ext>
           </a:extLst>
         </p:spPr>
@@ -5459,8 +6788,8 @@
           <a:p>
             <a:pPr algn="r"/>
             <a:fld id="{F7021451-1387-4CA6-816F-3879F97B5CBC}" type="slidenum">
-              <a:rPr b="0" lang="en-US"/>
-              <a:t>6</a:t>
+              <a:rPr lang="en-US" b="0"/>
+              <a:t>7</a:t>
             </a:fld>
             <a:endParaRPr lang="en-US"/>
           </a:p>
@@ -5474,7 +6803,7 @@
 </p:sld>
 </file>
 
-<file path=ppt/slides/slide7.xml><?xml version="1.0" encoding="utf-8"?>
+<file path=ppt/slides/slide8.xml><?xml version="1.0" encoding="utf-8"?>
 <p:sld xmlns:a="http://schemas.openxmlformats.org/drawingml/2006/main" xmlns:r="http://schemas.openxmlformats.org/officeDocument/2006/relationships" xmlns:p="http://schemas.openxmlformats.org/presentationml/2006/main">
   <p:cSld name="Slide 7">
     <p:spTree>
@@ -5494,9 +6823,11 @@
       <p:sp>
         <p:nvSpPr>
           <p:cNvPr id="2" name="Text 1"/>
-          <p:cNvSpPr/>
+          <p:cNvSpPr>
+            <a:spLocks noGrp="1"/>
+          </p:cNvSpPr>
           <p:nvPr>
-            <p:ph idx="101" type="title" hasCustomPrompt="1"/>
+            <p:ph type="title" idx="101" hasCustomPrompt="1"/>
           </p:nvPr>
         </p:nvSpPr>
         <p:spPr>
@@ -5514,7 +6845,7 @@
           <a:bodyPr wrap="square" lIns="0" tIns="0" rIns="0" bIns="0" rtlCol="0" anchor="ctr"/>
           <a:lstStyle/>
           <a:p>
-            <a:pPr indent="0" marL="0">
+            <a:pPr marL="0" indent="0">
               <a:buNone/>
             </a:pPr>
             <a:r>
@@ -5550,6 +6881,13 @@
           </a:solidFill>
           <a:ln/>
         </p:spPr>
+        <p:txBody>
+          <a:bodyPr/>
+          <a:lstStyle/>
+          <a:p>
+            <a:endParaRPr/>
+          </a:p>
+        </p:txBody>
       </p:sp>
       <p:sp>
         <p:nvSpPr>
@@ -5572,6 +6910,13 @@
           </a:solidFill>
           <a:ln/>
         </p:spPr>
+        <p:txBody>
+          <a:bodyPr/>
+          <a:lstStyle/>
+          <a:p>
+            <a:endParaRPr/>
+          </a:p>
+        </p:txBody>
       </p:sp>
       <p:sp>
         <p:nvSpPr>
@@ -5594,7 +6939,7 @@
           <a:bodyPr wrap="square" lIns="0" tIns="0" rIns="0" bIns="0" rtlCol="0" anchor="ctr"/>
           <a:lstStyle/>
           <a:p>
-            <a:pPr algn="ctr" indent="0" marL="0">
+            <a:pPr marL="0" indent="0" algn="ctr">
               <a:buNone/>
             </a:pPr>
             <a:r>
@@ -5630,7 +6975,7 @@
           <a:bodyPr wrap="square" lIns="0" tIns="0" rIns="0" bIns="0" rtlCol="0" anchor="ctr"/>
           <a:lstStyle/>
           <a:p>
-            <a:pPr indent="0" marL="0">
+            <a:pPr marL="0" indent="0">
               <a:buNone/>
             </a:pPr>
             <a:r>
@@ -5666,7 +7011,7 @@
           <a:bodyPr wrap="square" lIns="0" tIns="0" rIns="0" bIns="0" rtlCol="0" anchor="t"/>
           <a:lstStyle/>
           <a:p>
-            <a:pPr indent="0" marL="0">
+            <a:pPr marL="0" indent="0">
               <a:buNone/>
             </a:pPr>
             <a:r>
@@ -5702,6 +7047,13 @@
           </a:solidFill>
           <a:ln/>
         </p:spPr>
+        <p:txBody>
+          <a:bodyPr/>
+          <a:lstStyle/>
+          <a:p>
+            <a:endParaRPr/>
+          </a:p>
+        </p:txBody>
       </p:sp>
       <p:sp>
         <p:nvSpPr>
@@ -5724,6 +7076,13 @@
           </a:solidFill>
           <a:ln/>
         </p:spPr>
+        <p:txBody>
+          <a:bodyPr/>
+          <a:lstStyle/>
+          <a:p>
+            <a:endParaRPr/>
+          </a:p>
+        </p:txBody>
       </p:sp>
       <p:sp>
         <p:nvSpPr>
@@ -5746,7 +7105,7 @@
           <a:bodyPr wrap="square" lIns="0" tIns="0" rIns="0" bIns="0" rtlCol="0" anchor="ctr"/>
           <a:lstStyle/>
           <a:p>
-            <a:pPr algn="ctr" indent="0" marL="0">
+            <a:pPr marL="0" indent="0" algn="ctr">
               <a:buNone/>
             </a:pPr>
             <a:r>
@@ -5782,7 +7141,7 @@
           <a:bodyPr wrap="square" lIns="0" tIns="0" rIns="0" bIns="0" rtlCol="0" anchor="ctr"/>
           <a:lstStyle/>
           <a:p>
-            <a:pPr indent="0" marL="0">
+            <a:pPr marL="0" indent="0">
               <a:buNone/>
             </a:pPr>
             <a:r>
@@ -5818,7 +7177,7 @@
           <a:bodyPr wrap="square" lIns="0" tIns="0" rIns="0" bIns="0" rtlCol="0" anchor="t"/>
           <a:lstStyle/>
           <a:p>
-            <a:pPr indent="0" marL="0">
+            <a:pPr marL="0" indent="0">
               <a:buNone/>
             </a:pPr>
             <a:r>
@@ -5827,7 +7186,7 @@
                   <a:schemeClr val="tx1"/>
                 </a:solidFill>
               </a:rPr>
-              <a:t>Por transportista y tipo de servicio, con multa fija. La zona queda como mejora.</a:t>
+              <a:t>Por transportista, con multa fija por guía. Zona y tipo de servicio quedan como mejora.</a:t>
             </a:r>
             <a:endParaRPr lang="en-US" sz="1400" dirty="0"/>
           </a:p>
@@ -5854,6 +7213,13 @@
           </a:solidFill>
           <a:ln/>
         </p:spPr>
+        <p:txBody>
+          <a:bodyPr/>
+          <a:lstStyle/>
+          <a:p>
+            <a:endParaRPr/>
+          </a:p>
+        </p:txBody>
       </p:sp>
       <p:sp>
         <p:nvSpPr>
@@ -5876,6 +7242,13 @@
           </a:solidFill>
           <a:ln/>
         </p:spPr>
+        <p:txBody>
+          <a:bodyPr/>
+          <a:lstStyle/>
+          <a:p>
+            <a:endParaRPr/>
+          </a:p>
+        </p:txBody>
       </p:sp>
       <p:sp>
         <p:nvSpPr>
@@ -5898,7 +7271,7 @@
           <a:bodyPr wrap="square" lIns="0" tIns="0" rIns="0" bIns="0" rtlCol="0" anchor="ctr"/>
           <a:lstStyle/>
           <a:p>
-            <a:pPr algn="ctr" indent="0" marL="0">
+            <a:pPr marL="0" indent="0" algn="ctr">
               <a:buNone/>
             </a:pPr>
             <a:r>
@@ -5934,7 +7307,7 @@
           <a:bodyPr wrap="square" lIns="0" tIns="0" rIns="0" bIns="0" rtlCol="0" anchor="ctr"/>
           <a:lstStyle/>
           <a:p>
-            <a:pPr indent="0" marL="0">
+            <a:pPr marL="0" indent="0">
               <a:buNone/>
             </a:pPr>
             <a:r>
@@ -5970,7 +7343,7 @@
           <a:bodyPr wrap="square" lIns="0" tIns="0" rIns="0" bIns="0" rtlCol="0" anchor="t"/>
           <a:lstStyle/>
           <a:p>
-            <a:pPr indent="0" marL="0">
+            <a:pPr marL="0" indent="0">
               <a:buNone/>
             </a:pPr>
             <a:r>
@@ -6006,6 +7379,13 @@
           </a:solidFill>
           <a:ln/>
         </p:spPr>
+        <p:txBody>
+          <a:bodyPr/>
+          <a:lstStyle/>
+          <a:p>
+            <a:endParaRPr/>
+          </a:p>
+        </p:txBody>
       </p:sp>
       <p:sp>
         <p:nvSpPr>
@@ -6028,6 +7408,13 @@
           </a:solidFill>
           <a:ln/>
         </p:spPr>
+        <p:txBody>
+          <a:bodyPr/>
+          <a:lstStyle/>
+          <a:p>
+            <a:endParaRPr/>
+          </a:p>
+        </p:txBody>
       </p:sp>
       <p:sp>
         <p:nvSpPr>
@@ -6050,7 +7437,7 @@
           <a:bodyPr wrap="square" lIns="0" tIns="0" rIns="0" bIns="0" rtlCol="0" anchor="ctr"/>
           <a:lstStyle/>
           <a:p>
-            <a:pPr algn="ctr" indent="0" marL="0">
+            <a:pPr marL="0" indent="0" algn="ctr">
               <a:buNone/>
             </a:pPr>
             <a:r>
@@ -6086,7 +7473,7 @@
           <a:bodyPr wrap="square" lIns="0" tIns="0" rIns="0" bIns="0" rtlCol="0" anchor="ctr"/>
           <a:lstStyle/>
           <a:p>
-            <a:pPr indent="0" marL="0">
+            <a:pPr marL="0" indent="0">
               <a:buNone/>
             </a:pPr>
             <a:r>
@@ -6122,7 +7509,7 @@
           <a:bodyPr wrap="square" lIns="0" tIns="0" rIns="0" bIns="0" rtlCol="0" anchor="t"/>
           <a:lstStyle/>
           <a:p>
-            <a:pPr indent="0" marL="0">
+            <a:pPr marL="0" indent="0">
               <a:buNone/>
             </a:pPr>
             <a:r>
@@ -6131,7 +7518,7 @@
                   <a:schemeClr val="tx1"/>
                 </a:solidFill>
               </a:rPr>
-              <a:t>node:test reemplaza a Jest. Playwright se mantiene para el Sprint 4.</a:t>
+              <a:t>node:test reemplaza a Jest (Sprint 4). Playwright para las E2E en el Sprint 5.</a:t>
             </a:r>
             <a:endParaRPr lang="en-US" sz="1400" dirty="0"/>
           </a:p>
@@ -6158,6 +7545,13 @@
           </a:solidFill>
           <a:ln/>
         </p:spPr>
+        <p:txBody>
+          <a:bodyPr/>
+          <a:lstStyle/>
+          <a:p>
+            <a:endParaRPr/>
+          </a:p>
+        </p:txBody>
       </p:sp>
       <p:sp>
         <p:nvSpPr>
@@ -6180,6 +7574,13 @@
           </a:solidFill>
           <a:ln/>
         </p:spPr>
+        <p:txBody>
+          <a:bodyPr/>
+          <a:lstStyle/>
+          <a:p>
+            <a:endParaRPr/>
+          </a:p>
+        </p:txBody>
       </p:sp>
       <p:sp>
         <p:nvSpPr>
@@ -6202,7 +7603,7 @@
           <a:bodyPr wrap="square" lIns="0" tIns="0" rIns="0" bIns="0" rtlCol="0" anchor="ctr"/>
           <a:lstStyle/>
           <a:p>
-            <a:pPr algn="ctr" indent="0" marL="0">
+            <a:pPr marL="0" indent="0" algn="ctr">
               <a:buNone/>
             </a:pPr>
             <a:r>
@@ -6238,7 +7639,7 @@
           <a:bodyPr wrap="square" lIns="0" tIns="0" rIns="0" bIns="0" rtlCol="0" anchor="ctr"/>
           <a:lstStyle/>
           <a:p>
-            <a:pPr indent="0" marL="0">
+            <a:pPr marL="0" indent="0">
               <a:buNone/>
             </a:pPr>
             <a:r>
@@ -6274,7 +7675,7 @@
           <a:bodyPr wrap="square" lIns="0" tIns="0" rIns="0" bIns="0" rtlCol="0" anchor="t"/>
           <a:lstStyle/>
           <a:p>
-            <a:pPr indent="0" marL="0">
+            <a:pPr marL="0" indent="0">
               <a:buNone/>
             </a:pPr>
             <a:r>
@@ -6310,6 +7711,13 @@
           </a:solidFill>
           <a:ln/>
         </p:spPr>
+        <p:txBody>
+          <a:bodyPr/>
+          <a:lstStyle/>
+          <a:p>
+            <a:endParaRPr/>
+          </a:p>
+        </p:txBody>
       </p:sp>
       <p:sp>
         <p:nvSpPr>
@@ -6332,6 +7740,13 @@
           </a:solidFill>
           <a:ln/>
         </p:spPr>
+        <p:txBody>
+          <a:bodyPr/>
+          <a:lstStyle/>
+          <a:p>
+            <a:endParaRPr/>
+          </a:p>
+        </p:txBody>
       </p:sp>
       <p:sp>
         <p:nvSpPr>
@@ -6354,7 +7769,7 @@
           <a:bodyPr wrap="square" lIns="0" tIns="0" rIns="0" bIns="0" rtlCol="0" anchor="ctr"/>
           <a:lstStyle/>
           <a:p>
-            <a:pPr algn="ctr" indent="0" marL="0">
+            <a:pPr marL="0" indent="0" algn="ctr">
               <a:buNone/>
             </a:pPr>
             <a:r>
@@ -6363,7 +7778,7 @@
                   <a:schemeClr val="bg1"/>
                 </a:solidFill>
               </a:rPr>
-              <a:t>AGREGADO</a:t>
+              <a:t>REPLANIFICADO</a:t>
             </a:r>
             <a:endParaRPr lang="en-US" sz="1000" dirty="0"/>
           </a:p>
@@ -6390,7 +7805,7 @@
           <a:bodyPr wrap="square" lIns="0" tIns="0" rIns="0" bIns="0" rtlCol="0" anchor="ctr"/>
           <a:lstStyle/>
           <a:p>
-            <a:pPr indent="0" marL="0">
+            <a:pPr marL="0" indent="0">
               <a:buNone/>
             </a:pPr>
             <a:r>
@@ -6399,7 +7814,7 @@
                   <a:schemeClr val="tx2"/>
                 </a:solidFill>
               </a:rPr>
-              <a:t>IA con respaldo</a:t>
+              <a:t>Sprint 3 y calendario</a:t>
             </a:r>
             <a:endParaRPr lang="en-US" sz="1400" dirty="0"/>
           </a:p>
@@ -6426,7 +7841,7 @@
           <a:bodyPr wrap="square" lIns="0" tIns="0" rIns="0" bIns="0" rtlCol="0" anchor="t"/>
           <a:lstStyle/>
           <a:p>
-            <a:pPr indent="0" marL="0">
+            <a:pPr marL="0" indent="0">
               <a:buNone/>
             </a:pPr>
             <a:r>
@@ -6435,7 +7850,7 @@
                   <a:schemeClr val="tx1"/>
                 </a:solidFill>
               </a:rPr>
-              <a:t>Si la API falla, el documento se genera con una plantilla.</a:t>
+              <a:t>Gráficos e IA al Sprint 4. Clase del 13/10 suspendida y del 20/10 en línea: Sprint 4 desde el 28/10.</a:t>
             </a:r>
             <a:endParaRPr lang="en-US" sz="1400" dirty="0"/>
           </a:p>
@@ -6443,7 +7858,7 @@
       </p:sp>
       <p:sp>
         <p:nvSpPr>
-          <p:cNvPr id="25" name="Slide Number Placeholder 0"/>
+          <p:cNvPr id="33" name="Slide Number Placeholder 0"/>
           <p:cNvSpPr>
             <a:spLocks noGrp="1"/>
           </p:cNvSpPr>
@@ -6461,7 +7876,7 @@
           </a:prstGeom>
           <a:extLst>
             <a:ext uri="{C572A759-6A51-4108-AA02-DFA0A04FC94B}">
-              <ma14:wrappingTextBoxFlag xmlns:ma14="http://schemas.microsoft.com/office/mac/drawingml/2011/main" val="0"/>
+              <ma14:wrappingTextBoxFlag xmlns:ma14="http://schemas.microsoft.com/office/mac/drawingml/2011/main" xmlns="" val="0"/>
             </a:ext>
           </a:extLst>
         </p:spPr>
@@ -6479,8 +7894,8 @@
           <a:p>
             <a:pPr algn="r"/>
             <a:fld id="{F7021451-1387-4CA6-816F-3879F97B5CBC}" type="slidenum">
-              <a:rPr b="0" lang="en-US"/>
-              <a:t>7</a:t>
+              <a:rPr lang="en-US" b="0"/>
+              <a:t>8</a:t>
             </a:fld>
             <a:endParaRPr lang="en-US"/>
           </a:p>
@@ -6494,7 +7909,7 @@
 </p:sld>
 </file>
 
-<file path=ppt/slides/slide8.xml><?xml version="1.0" encoding="utf-8"?>
+<file path=ppt/slides/slide9.xml><?xml version="1.0" encoding="utf-8"?>
 <p:sld xmlns:a="http://schemas.openxmlformats.org/drawingml/2006/main" xmlns:r="http://schemas.openxmlformats.org/officeDocument/2006/relationships" xmlns:p="http://schemas.openxmlformats.org/presentationml/2006/main">
   <p:cSld name="Slide 8">
     <p:spTree>
@@ -6514,9 +7929,11 @@
       <p:sp>
         <p:nvSpPr>
           <p:cNvPr id="2" name="Text 1"/>
-          <p:cNvSpPr/>
+          <p:cNvSpPr>
+            <a:spLocks noGrp="1"/>
+          </p:cNvSpPr>
           <p:nvPr>
-            <p:ph idx="101" type="title" hasCustomPrompt="1"/>
+            <p:ph type="title" idx="101" hasCustomPrompt="1"/>
           </p:nvPr>
         </p:nvSpPr>
         <p:spPr>
@@ -6534,7 +7951,7 @@
           <a:bodyPr wrap="square" lIns="0" tIns="0" rIns="0" bIns="0" rtlCol="0" anchor="ctr"/>
           <a:lstStyle/>
           <a:p>
-            <a:pPr indent="0" marL="0">
+            <a:pPr marL="0" indent="0">
               <a:buNone/>
             </a:pPr>
             <a:r>
@@ -6570,6 +7987,13 @@
           </a:solidFill>
           <a:ln/>
         </p:spPr>
+        <p:txBody>
+          <a:bodyPr/>
+          <a:lstStyle/>
+          <a:p>
+            <a:endParaRPr/>
+          </a:p>
+        </p:txBody>
       </p:sp>
       <p:sp>
         <p:nvSpPr>
@@ -6590,286 +8014,17 @@
           </a:solidFill>
           <a:ln/>
         </p:spPr>
+        <p:txBody>
+          <a:bodyPr/>
+          <a:lstStyle/>
+          <a:p>
+            <a:endParaRPr/>
+          </a:p>
+        </p:txBody>
       </p:sp>
       <p:pic>
         <p:nvPicPr>
-          <p:cNvPr id="5" name="Image 0" descr="Backend retomado desde cero">    </p:cNvPr>
-          <p:cNvPicPr>
-            <a:picLocks noChangeAspect="1"/>
-          </p:cNvPicPr>
-          <p:nvPr/>
-        </p:nvPicPr>
-        <p:blipFill>
-          <a:blip r:embed="rId1"/>
-          <a:stretch>
-            <a:fillRect/>
-          </a:stretch>
-        </p:blipFill>
-        <p:spPr>
-          <a:xfrm>
-            <a:off x="768096" y="1453896"/>
-            <a:ext cx="246888" cy="246888"/>
-          </a:xfrm>
-          <a:prstGeom prst="rect">
-            <a:avLst/>
-          </a:prstGeom>
-        </p:spPr>
-      </p:pic>
-      <p:sp>
-        <p:nvSpPr>
-          <p:cNvPr id="6" name="Text 3"/>
-          <p:cNvSpPr txBox="1"/>
-          <p:nvPr/>
-        </p:nvSpPr>
-        <p:spPr>
-          <a:xfrm>
-            <a:off x="1371600" y="1188720"/>
-            <a:ext cx="2743200" cy="777240"/>
-          </a:xfrm>
-          <a:prstGeom prst="rect">
-            <a:avLst/>
-          </a:prstGeom>
-          <a:noFill/>
-          <a:ln/>
-        </p:spPr>
-        <p:txBody>
-          <a:bodyPr wrap="square" lIns="0" tIns="0" rIns="0" bIns="0" rtlCol="0" anchor="ctr"/>
-          <a:lstStyle/>
-          <a:p>
-            <a:pPr indent="0" marL="0">
-              <a:buNone/>
-            </a:pPr>
-            <a:r>
-              <a:rPr lang="en-US" sz="1600" b="1" dirty="0">
-                <a:solidFill>
-                  <a:schemeClr val="tx2"/>
-                </a:solidFill>
-              </a:rPr>
-              <a:t>Backend retomado desde cero</a:t>
-            </a:r>
-            <a:endParaRPr lang="en-US" sz="1600" dirty="0"/>
-          </a:p>
-        </p:txBody>
-      </p:sp>
-      <p:sp>
-        <p:nvSpPr>
-          <p:cNvPr id="7" name="Text 4"/>
-          <p:cNvSpPr txBox="1"/>
-          <p:nvPr/>
-        </p:nvSpPr>
-        <p:spPr>
-          <a:xfrm>
-            <a:off x="4206240" y="1188720"/>
-            <a:ext cx="4297680" cy="777240"/>
-          </a:xfrm>
-          <a:prstGeom prst="rect">
-            <a:avLst/>
-          </a:prstGeom>
-          <a:noFill/>
-          <a:ln/>
-        </p:spPr>
-        <p:txBody>
-          <a:bodyPr wrap="square" lIns="0" tIns="0" rIns="0" bIns="0" rtlCol="0" anchor="ctr"/>
-          <a:lstStyle/>
-          <a:p>
-            <a:pPr indent="0" marL="0">
-              <a:buNone/>
-            </a:pPr>
-            <a:r>
-              <a:rPr lang="en-US" sz="1400" dirty="0">
-                <a:solidFill>
-                  <a:schemeClr val="tx1"/>
-                </a:solidFill>
-              </a:rPr>
-              <a:t>Sprint 1 extendido a seis semanas; se priorizó el motor de auditoría.</a:t>
-            </a:r>
-            <a:endParaRPr lang="en-US" sz="1400" dirty="0"/>
-          </a:p>
-        </p:txBody>
-      </p:sp>
-      <p:sp>
-        <p:nvSpPr>
-          <p:cNvPr id="8" name="Fila dificultad 2"/>
-          <p:cNvSpPr/>
-          <p:nvPr/>
-        </p:nvSpPr>
-        <p:spPr>
-          <a:xfrm>
-            <a:off x="457200" y="2075688"/>
-            <a:ext cx="8229600" cy="777240"/>
-          </a:xfrm>
-          <a:prstGeom prst="roundRect">
-            <a:avLst>
-              <a:gd name="adj" fmla="val 9412"/>
-            </a:avLst>
-          </a:prstGeom>
-          <a:solidFill>
-            <a:schemeClr val="bg2"/>
-          </a:solidFill>
-          <a:ln/>
-        </p:spPr>
-      </p:sp>
-      <p:sp>
-        <p:nvSpPr>
-          <p:cNvPr id="9" name="Circulo dificultad 2"/>
-          <p:cNvSpPr/>
-          <p:nvPr/>
-        </p:nvSpPr>
-        <p:spPr>
-          <a:xfrm>
-            <a:off x="640080" y="2212848"/>
-            <a:ext cx="502920" cy="502920"/>
-          </a:xfrm>
-          <a:prstGeom prst="ellipse">
-            <a:avLst/>
-          </a:prstGeom>
-          <a:solidFill>
-            <a:schemeClr val="tx2"/>
-          </a:solidFill>
-          <a:ln/>
-        </p:spPr>
-      </p:sp>
-      <p:pic>
-        <p:nvPicPr>
-          <p:cNvPr id="10" name="Image 1" descr="Equipo de práctica bloqueado">    </p:cNvPr>
-          <p:cNvPicPr>
-            <a:picLocks noChangeAspect="1"/>
-          </p:cNvPicPr>
-          <p:nvPr/>
-        </p:nvPicPr>
-        <p:blipFill>
-          <a:blip r:embed="rId2"/>
-          <a:stretch>
-            <a:fillRect/>
-          </a:stretch>
-        </p:blipFill>
-        <p:spPr>
-          <a:xfrm>
-            <a:off x="768096" y="2340864"/>
-            <a:ext cx="246888" cy="246888"/>
-          </a:xfrm>
-          <a:prstGeom prst="rect">
-            <a:avLst/>
-          </a:prstGeom>
-        </p:spPr>
-      </p:pic>
-      <p:sp>
-        <p:nvSpPr>
-          <p:cNvPr id="11" name="Text 7"/>
-          <p:cNvSpPr txBox="1"/>
-          <p:nvPr/>
-        </p:nvSpPr>
-        <p:spPr>
-          <a:xfrm>
-            <a:off x="1371600" y="2075688"/>
-            <a:ext cx="2743200" cy="777240"/>
-          </a:xfrm>
-          <a:prstGeom prst="rect">
-            <a:avLst/>
-          </a:prstGeom>
-          <a:noFill/>
-          <a:ln/>
-        </p:spPr>
-        <p:txBody>
-          <a:bodyPr wrap="square" lIns="0" tIns="0" rIns="0" bIns="0" rtlCol="0" anchor="ctr"/>
-          <a:lstStyle/>
-          <a:p>
-            <a:pPr indent="0" marL="0">
-              <a:buNone/>
-            </a:pPr>
-            <a:r>
-              <a:rPr lang="en-US" sz="1600" b="1" dirty="0">
-                <a:solidFill>
-                  <a:schemeClr val="tx2"/>
-                </a:solidFill>
-              </a:rPr>
-              <a:t>Equipo de práctica bloqueado</a:t>
-            </a:r>
-            <a:endParaRPr lang="en-US" sz="1600" dirty="0"/>
-          </a:p>
-        </p:txBody>
-      </p:sp>
-      <p:sp>
-        <p:nvSpPr>
-          <p:cNvPr id="12" name="Text 8"/>
-          <p:cNvSpPr txBox="1"/>
-          <p:nvPr/>
-        </p:nvSpPr>
-        <p:spPr>
-          <a:xfrm>
-            <a:off x="4206240" y="2075688"/>
-            <a:ext cx="4297680" cy="777240"/>
-          </a:xfrm>
-          <a:prstGeom prst="rect">
-            <a:avLst/>
-          </a:prstGeom>
-          <a:noFill/>
-          <a:ln/>
-        </p:spPr>
-        <p:txBody>
-          <a:bodyPr wrap="square" lIns="0" tIns="0" rIns="0" bIns="0" rtlCol="0" anchor="ctr"/>
-          <a:lstStyle/>
-          <a:p>
-            <a:pPr indent="0" marL="0">
-              <a:buNone/>
-            </a:pPr>
-            <a:r>
-              <a:rPr lang="en-US" sz="1400" dirty="0">
-                <a:solidFill>
-                  <a:schemeClr val="tx1"/>
-                </a:solidFill>
-              </a:rPr>
-              <a:t>Las pruebas se hacen en equipos personales con un script de inicio (iniciar.bat).</a:t>
-            </a:r>
-            <a:endParaRPr lang="en-US" sz="1400" dirty="0"/>
-          </a:p>
-        </p:txBody>
-      </p:sp>
-      <p:sp>
-        <p:nvSpPr>
-          <p:cNvPr id="13" name="Fila dificultad 3"/>
-          <p:cNvSpPr/>
-          <p:nvPr/>
-        </p:nvSpPr>
-        <p:spPr>
-          <a:xfrm>
-            <a:off x="457200" y="2962656"/>
-            <a:ext cx="8229600" cy="777240"/>
-          </a:xfrm>
-          <a:prstGeom prst="roundRect">
-            <a:avLst>
-              <a:gd name="adj" fmla="val 9412"/>
-            </a:avLst>
-          </a:prstGeom>
-          <a:solidFill>
-            <a:schemeClr val="bg2"/>
-          </a:solidFill>
-          <a:ln/>
-        </p:spPr>
-      </p:sp>
-      <p:sp>
-        <p:nvSpPr>
-          <p:cNvPr id="14" name="Circulo dificultad 3"/>
-          <p:cNvSpPr/>
-          <p:nvPr/>
-        </p:nvSpPr>
-        <p:spPr>
-          <a:xfrm>
-            <a:off x="640080" y="3099816"/>
-            <a:ext cx="502920" cy="502920"/>
-          </a:xfrm>
-          <a:prstGeom prst="ellipse">
-            <a:avLst/>
-          </a:prstGeom>
-          <a:solidFill>
-            <a:schemeClr val="tx2"/>
-          </a:solidFill>
-          <a:ln/>
-        </p:spPr>
-      </p:sp>
-      <p:pic>
-        <p:nvPicPr>
-          <p:cNvPr id="15" name="Image 2" descr="Instalación en Windows">    </p:cNvPr>
+          <p:cNvPr id="5" name="Image 0" descr="Backend retomado desde cero"/>
           <p:cNvPicPr>
             <a:picLocks noChangeAspect="1"/>
           </p:cNvPicPr>
@@ -6883,7 +8038,7 @@
         </p:blipFill>
         <p:spPr>
           <a:xfrm>
-            <a:off x="768096" y="3227832"/>
+            <a:off x="768096" y="1453896"/>
             <a:ext cx="246888" cy="246888"/>
           </a:xfrm>
           <a:prstGeom prst="rect">
@@ -6893,13 +8048,13 @@
       </p:pic>
       <p:sp>
         <p:nvSpPr>
-          <p:cNvPr id="16" name="Text 11"/>
+          <p:cNvPr id="6" name="Text 3"/>
           <p:cNvSpPr txBox="1"/>
           <p:nvPr/>
         </p:nvSpPr>
         <p:spPr>
           <a:xfrm>
-            <a:off x="1371600" y="2962656"/>
+            <a:off x="1371600" y="1188720"/>
             <a:ext cx="2743200" cy="777240"/>
           </a:xfrm>
           <a:prstGeom prst="rect">
@@ -6912,7 +8067,7 @@
           <a:bodyPr wrap="square" lIns="0" tIns="0" rIns="0" bIns="0" rtlCol="0" anchor="ctr"/>
           <a:lstStyle/>
           <a:p>
-            <a:pPr indent="0" marL="0">
+            <a:pPr marL="0" indent="0">
               <a:buNone/>
             </a:pPr>
             <a:r>
@@ -6921,7 +8076,7 @@
                   <a:schemeClr val="tx2"/>
                 </a:solidFill>
               </a:rPr>
-              <a:t>Instalación en Windows</a:t>
+              <a:t>Backend retomado desde cero</a:t>
             </a:r>
             <a:endParaRPr lang="en-US" sz="1600" dirty="0"/>
           </a:p>
@@ -6929,13 +8084,13 @@
       </p:sp>
       <p:sp>
         <p:nvSpPr>
-          <p:cNvPr id="17" name="Text 12"/>
+          <p:cNvPr id="7" name="Text 4"/>
           <p:cNvSpPr txBox="1"/>
           <p:nvPr/>
         </p:nvSpPr>
         <p:spPr>
           <a:xfrm>
-            <a:off x="4206240" y="2962656"/>
+            <a:off x="4206240" y="1188720"/>
             <a:ext cx="4297680" cy="777240"/>
           </a:xfrm>
           <a:prstGeom prst="rect">
@@ -6948,7 +8103,7 @@
           <a:bodyPr wrap="square" lIns="0" tIns="0" rIns="0" bIns="0" rtlCol="0" anchor="ctr"/>
           <a:lstStyle/>
           <a:p>
-            <a:pPr indent="0" marL="0">
+            <a:pPr marL="0" indent="0">
               <a:buNone/>
             </a:pPr>
             <a:r>
@@ -6957,7 +8112,7 @@
                   <a:schemeClr val="tx1"/>
                 </a:solidFill>
               </a:rPr>
-              <a:t>El script verifica las versiones de Python y Node.js y guarda un registro de errores.</a:t>
+              <a:t>Sprint 1 extendido a seis semanas; se priorizó el motor de auditoría.</a:t>
             </a:r>
             <a:endParaRPr lang="en-US" sz="1400" dirty="0"/>
           </a:p>
@@ -6965,13 +8120,13 @@
       </p:sp>
       <p:sp>
         <p:nvSpPr>
-          <p:cNvPr id="18" name="Fila dificultad 4"/>
+          <p:cNvPr id="8" name="Fila dificultad 2"/>
           <p:cNvSpPr/>
           <p:nvPr/>
         </p:nvSpPr>
         <p:spPr>
           <a:xfrm>
-            <a:off x="457200" y="3849624"/>
+            <a:off x="457200" y="2075688"/>
             <a:ext cx="8229600" cy="777240"/>
           </a:xfrm>
           <a:prstGeom prst="roundRect">
@@ -6984,16 +8139,23 @@
           </a:solidFill>
           <a:ln/>
         </p:spPr>
-      </p:sp>
-      <p:sp>
-        <p:nvSpPr>
-          <p:cNvPr id="19" name="Circulo dificultad 4"/>
+        <p:txBody>
+          <a:bodyPr/>
+          <a:lstStyle/>
+          <a:p>
+            <a:endParaRPr/>
+          </a:p>
+        </p:txBody>
+      </p:sp>
+      <p:sp>
+        <p:nvSpPr>
+          <p:cNvPr id="9" name="Circulo dificultad 2"/>
           <p:cNvSpPr/>
           <p:nvPr/>
         </p:nvSpPr>
         <p:spPr>
           <a:xfrm>
-            <a:off x="640080" y="3986784"/>
+            <a:off x="640080" y="2212848"/>
             <a:ext cx="502920" cy="502920"/>
           </a:xfrm>
           <a:prstGeom prst="ellipse">
@@ -7004,10 +8166,17 @@
           </a:solidFill>
           <a:ln/>
         </p:spPr>
+        <p:txBody>
+          <a:bodyPr/>
+          <a:lstStyle/>
+          <a:p>
+            <a:endParaRPr/>
+          </a:p>
+        </p:txBody>
       </p:sp>
       <p:pic>
         <p:nvPicPr>
-          <p:cNvPr id="20" name="Image 3" descr="Dependencia de la API de IA">    </p:cNvPr>
+          <p:cNvPr id="10" name="Image 1" descr="Equipo de práctica bloqueado"/>
           <p:cNvPicPr>
             <a:picLocks noChangeAspect="1"/>
           </p:cNvPicPr>
@@ -7021,6 +8190,310 @@
         </p:blipFill>
         <p:spPr>
           <a:xfrm>
+            <a:off x="768096" y="2340864"/>
+            <a:ext cx="246888" cy="246888"/>
+          </a:xfrm>
+          <a:prstGeom prst="rect">
+            <a:avLst/>
+          </a:prstGeom>
+        </p:spPr>
+      </p:pic>
+      <p:sp>
+        <p:nvSpPr>
+          <p:cNvPr id="11" name="Text 7"/>
+          <p:cNvSpPr txBox="1"/>
+          <p:nvPr/>
+        </p:nvSpPr>
+        <p:spPr>
+          <a:xfrm>
+            <a:off x="1371600" y="2075688"/>
+            <a:ext cx="2743200" cy="777240"/>
+          </a:xfrm>
+          <a:prstGeom prst="rect">
+            <a:avLst/>
+          </a:prstGeom>
+          <a:noFill/>
+          <a:ln/>
+        </p:spPr>
+        <p:txBody>
+          <a:bodyPr wrap="square" lIns="0" tIns="0" rIns="0" bIns="0" rtlCol="0" anchor="ctr"/>
+          <a:lstStyle/>
+          <a:p>
+            <a:pPr marL="0" indent="0">
+              <a:buNone/>
+            </a:pPr>
+            <a:r>
+              <a:rPr lang="en-US" sz="1600" b="1" dirty="0">
+                <a:solidFill>
+                  <a:schemeClr val="tx2"/>
+                </a:solidFill>
+              </a:rPr>
+              <a:t>Equipo de práctica bloqueado</a:t>
+            </a:r>
+            <a:endParaRPr lang="en-US" sz="1600" dirty="0"/>
+          </a:p>
+        </p:txBody>
+      </p:sp>
+      <p:sp>
+        <p:nvSpPr>
+          <p:cNvPr id="12" name="Text 8"/>
+          <p:cNvSpPr txBox="1"/>
+          <p:nvPr/>
+        </p:nvSpPr>
+        <p:spPr>
+          <a:xfrm>
+            <a:off x="4206240" y="2075688"/>
+            <a:ext cx="4297680" cy="777240"/>
+          </a:xfrm>
+          <a:prstGeom prst="rect">
+            <a:avLst/>
+          </a:prstGeom>
+          <a:noFill/>
+          <a:ln/>
+        </p:spPr>
+        <p:txBody>
+          <a:bodyPr wrap="square" lIns="0" tIns="0" rIns="0" bIns="0" rtlCol="0" anchor="ctr"/>
+          <a:lstStyle/>
+          <a:p>
+            <a:pPr marL="0" indent="0">
+              <a:buNone/>
+            </a:pPr>
+            <a:r>
+              <a:rPr lang="en-US" sz="1400" dirty="0">
+                <a:solidFill>
+                  <a:schemeClr val="tx1"/>
+                </a:solidFill>
+              </a:rPr>
+              <a:t>Las pruebas se hacen en equipos personales con un script de inicio (iniciar.bat).</a:t>
+            </a:r>
+            <a:endParaRPr lang="en-US" sz="1400" dirty="0"/>
+          </a:p>
+        </p:txBody>
+      </p:sp>
+      <p:sp>
+        <p:nvSpPr>
+          <p:cNvPr id="13" name="Fila dificultad 3"/>
+          <p:cNvSpPr/>
+          <p:nvPr/>
+        </p:nvSpPr>
+        <p:spPr>
+          <a:xfrm>
+            <a:off x="457200" y="2962656"/>
+            <a:ext cx="8229600" cy="777240"/>
+          </a:xfrm>
+          <a:prstGeom prst="roundRect">
+            <a:avLst>
+              <a:gd name="adj" fmla="val 9412"/>
+            </a:avLst>
+          </a:prstGeom>
+          <a:solidFill>
+            <a:schemeClr val="bg2"/>
+          </a:solidFill>
+          <a:ln/>
+        </p:spPr>
+        <p:txBody>
+          <a:bodyPr/>
+          <a:lstStyle/>
+          <a:p>
+            <a:endParaRPr/>
+          </a:p>
+        </p:txBody>
+      </p:sp>
+      <p:sp>
+        <p:nvSpPr>
+          <p:cNvPr id="14" name="Circulo dificultad 3"/>
+          <p:cNvSpPr/>
+          <p:nvPr/>
+        </p:nvSpPr>
+        <p:spPr>
+          <a:xfrm>
+            <a:off x="640080" y="3099816"/>
+            <a:ext cx="502920" cy="502920"/>
+          </a:xfrm>
+          <a:prstGeom prst="ellipse">
+            <a:avLst/>
+          </a:prstGeom>
+          <a:solidFill>
+            <a:schemeClr val="tx2"/>
+          </a:solidFill>
+          <a:ln/>
+        </p:spPr>
+        <p:txBody>
+          <a:bodyPr/>
+          <a:lstStyle/>
+          <a:p>
+            <a:endParaRPr/>
+          </a:p>
+        </p:txBody>
+      </p:sp>
+      <p:pic>
+        <p:nvPicPr>
+          <p:cNvPr id="15" name="Image 2" descr="Instalación en Windows"/>
+          <p:cNvPicPr>
+            <a:picLocks noChangeAspect="1"/>
+          </p:cNvPicPr>
+          <p:nvPr/>
+        </p:nvPicPr>
+        <p:blipFill>
+          <a:blip r:embed="rId5"/>
+          <a:stretch>
+            <a:fillRect/>
+          </a:stretch>
+        </p:blipFill>
+        <p:spPr>
+          <a:xfrm>
+            <a:off x="768096" y="3227832"/>
+            <a:ext cx="246888" cy="246888"/>
+          </a:xfrm>
+          <a:prstGeom prst="rect">
+            <a:avLst/>
+          </a:prstGeom>
+        </p:spPr>
+      </p:pic>
+      <p:sp>
+        <p:nvSpPr>
+          <p:cNvPr id="16" name="Text 11"/>
+          <p:cNvSpPr txBox="1"/>
+          <p:nvPr/>
+        </p:nvSpPr>
+        <p:spPr>
+          <a:xfrm>
+            <a:off x="1371600" y="2962656"/>
+            <a:ext cx="2743200" cy="777240"/>
+          </a:xfrm>
+          <a:prstGeom prst="rect">
+            <a:avLst/>
+          </a:prstGeom>
+          <a:noFill/>
+          <a:ln/>
+        </p:spPr>
+        <p:txBody>
+          <a:bodyPr wrap="square" lIns="0" tIns="0" rIns="0" bIns="0" rtlCol="0" anchor="ctr"/>
+          <a:lstStyle/>
+          <a:p>
+            <a:pPr marL="0" indent="0">
+              <a:buNone/>
+            </a:pPr>
+            <a:r>
+              <a:rPr lang="en-US" sz="1600" b="1" dirty="0">
+                <a:solidFill>
+                  <a:schemeClr val="tx2"/>
+                </a:solidFill>
+              </a:rPr>
+              <a:t>Instalación en Windows</a:t>
+            </a:r>
+            <a:endParaRPr lang="en-US" sz="1600" dirty="0"/>
+          </a:p>
+        </p:txBody>
+      </p:sp>
+      <p:sp>
+        <p:nvSpPr>
+          <p:cNvPr id="17" name="Text 12"/>
+          <p:cNvSpPr txBox="1"/>
+          <p:nvPr/>
+        </p:nvSpPr>
+        <p:spPr>
+          <a:xfrm>
+            <a:off x="4206240" y="2962656"/>
+            <a:ext cx="4297680" cy="777240"/>
+          </a:xfrm>
+          <a:prstGeom prst="rect">
+            <a:avLst/>
+          </a:prstGeom>
+          <a:noFill/>
+          <a:ln/>
+        </p:spPr>
+        <p:txBody>
+          <a:bodyPr wrap="square" lIns="0" tIns="0" rIns="0" bIns="0" rtlCol="0" anchor="ctr"/>
+          <a:lstStyle/>
+          <a:p>
+            <a:pPr marL="0" indent="0">
+              <a:buNone/>
+            </a:pPr>
+            <a:r>
+              <a:rPr lang="en-US" sz="1400" dirty="0">
+                <a:solidFill>
+                  <a:schemeClr val="tx1"/>
+                </a:solidFill>
+              </a:rPr>
+              <a:t>El script verifica las versiones de Python y Node.js y guarda un registro de errores.</a:t>
+            </a:r>
+            <a:endParaRPr lang="en-US" sz="1400" dirty="0"/>
+          </a:p>
+        </p:txBody>
+      </p:sp>
+      <p:sp>
+        <p:nvSpPr>
+          <p:cNvPr id="18" name="Fila dificultad 4"/>
+          <p:cNvSpPr/>
+          <p:nvPr/>
+        </p:nvSpPr>
+        <p:spPr>
+          <a:xfrm>
+            <a:off x="457200" y="3849624"/>
+            <a:ext cx="8229600" cy="777240"/>
+          </a:xfrm>
+          <a:prstGeom prst="roundRect">
+            <a:avLst>
+              <a:gd name="adj" fmla="val 9412"/>
+            </a:avLst>
+          </a:prstGeom>
+          <a:solidFill>
+            <a:schemeClr val="bg2"/>
+          </a:solidFill>
+          <a:ln/>
+        </p:spPr>
+        <p:txBody>
+          <a:bodyPr/>
+          <a:lstStyle/>
+          <a:p>
+            <a:endParaRPr/>
+          </a:p>
+        </p:txBody>
+      </p:sp>
+      <p:sp>
+        <p:nvSpPr>
+          <p:cNvPr id="19" name="Circulo dificultad 4"/>
+          <p:cNvSpPr/>
+          <p:nvPr/>
+        </p:nvSpPr>
+        <p:spPr>
+          <a:xfrm>
+            <a:off x="640080" y="3986784"/>
+            <a:ext cx="502920" cy="502920"/>
+          </a:xfrm>
+          <a:prstGeom prst="ellipse">
+            <a:avLst/>
+          </a:prstGeom>
+          <a:solidFill>
+            <a:schemeClr val="tx2"/>
+          </a:solidFill>
+          <a:ln/>
+        </p:spPr>
+        <p:txBody>
+          <a:bodyPr/>
+          <a:lstStyle/>
+          <a:p>
+            <a:endParaRPr/>
+          </a:p>
+        </p:txBody>
+      </p:sp>
+      <p:pic>
+        <p:nvPicPr>
+          <p:cNvPr id="20" name="Icono sobrecompromiso" descr="Dependencia de la API de IA"/>
+          <p:cNvPicPr>
+            <a:picLocks noChangeAspect="1"/>
+          </p:cNvPicPr>
+          <p:nvPr/>
+        </p:nvPicPr>
+        <p:blipFill>
+          <a:blip r:embed="rId6"/>
+          <a:stretch>
+            <a:fillRect/>
+          </a:stretch>
+        </p:blipFill>
+        <p:spPr>
+          <a:xfrm>
             <a:off x="768096" y="4114800"/>
             <a:ext cx="246888" cy="246888"/>
           </a:xfrm>
@@ -7050,7 +8523,7 @@
           <a:bodyPr wrap="square" lIns="0" tIns="0" rIns="0" bIns="0" rtlCol="0" anchor="ctr"/>
           <a:lstStyle/>
           <a:p>
-            <a:pPr indent="0" marL="0">
+            <a:pPr marL="0" indent="0">
               <a:buNone/>
             </a:pPr>
             <a:r>
@@ -7059,7 +8532,7 @@
                   <a:schemeClr val="tx2"/>
                 </a:solidFill>
               </a:rPr>
-              <a:t>Dependencia de la API de IA</a:t>
+              <a:t>Sobrecompromiso del Sprint 3</a:t>
             </a:r>
             <a:endParaRPr lang="en-US" sz="1600" dirty="0"/>
           </a:p>
@@ -7086,7 +8559,7 @@
           <a:bodyPr wrap="square" lIns="0" tIns="0" rIns="0" bIns="0" rtlCol="0" anchor="ctr"/>
           <a:lstStyle/>
           <a:p>
-            <a:pPr indent="0" marL="0">
+            <a:pPr marL="0" indent="0">
               <a:buNone/>
             </a:pPr>
             <a:r>
@@ -7095,7 +8568,7 @@
                   <a:schemeClr val="tx1"/>
                 </a:solidFill>
               </a:rPr>
-              <a:t>Tiempo máximo de espera configurable y plantilla de respaldo.</a:t>
+              <a:t>Se cerró con 20 de 36 puntos; gráficos e IA pasan al Sprint 4 y se planifica con la velocidad real.</a:t>
             </a:r>
             <a:endParaRPr lang="en-US" sz="1400" dirty="0"/>
           </a:p>
@@ -7121,7 +8594,7 @@
           </a:prstGeom>
           <a:extLst>
             <a:ext uri="{C572A759-6A51-4108-AA02-DFA0A04FC94B}">
-              <ma14:wrappingTextBoxFlag xmlns:ma14="http://schemas.microsoft.com/office/mac/drawingml/2011/main" val="0"/>
+              <ma14:wrappingTextBoxFlag xmlns:ma14="http://schemas.microsoft.com/office/mac/drawingml/2011/main" xmlns="" val="0"/>
             </a:ext>
           </a:extLst>
         </p:spPr>
@@ -7139,455 +8612,7 @@
           <a:p>
             <a:pPr algn="r"/>
             <a:fld id="{F7021451-1387-4CA6-816F-3879F97B5CBC}" type="slidenum">
-              <a:rPr b="0" lang="en-US"/>
-              <a:t>8</a:t>
-            </a:fld>
-            <a:endParaRPr lang="en-US"/>
-          </a:p>
-        </p:txBody>
-      </p:sp>
-    </p:spTree>
-  </p:cSld>
-  <p:clrMapOvr>
-    <a:masterClrMapping/>
-  </p:clrMapOvr>
-</p:sld>
-</file>
-
-<file path=ppt/slides/slide9.xml><?xml version="1.0" encoding="utf-8"?>
-<p:sld xmlns:a="http://schemas.openxmlformats.org/drawingml/2006/main" xmlns:r="http://schemas.openxmlformats.org/officeDocument/2006/relationships" xmlns:p="http://schemas.openxmlformats.org/presentationml/2006/main">
-  <p:cSld name="Slide 9">
-    <p:spTree>
-      <p:nvGrpSpPr>
-        <p:cNvPr id="1" name=""/>
-        <p:cNvGrpSpPr/>
-        <p:nvPr/>
-      </p:nvGrpSpPr>
-      <p:grpSpPr>
-        <a:xfrm>
-          <a:off x="0" y="0"/>
-          <a:ext cx="0" cy="0"/>
-          <a:chOff x="0" y="0"/>
-          <a:chExt cx="0" cy="0"/>
-        </a:xfrm>
-      </p:grpSpPr>
-      <p:sp>
-        <p:nvSpPr>
-          <p:cNvPr id="2" name="Text 1"/>
-          <p:cNvSpPr/>
-          <p:nvPr>
-            <p:ph idx="101" type="title" hasCustomPrompt="1"/>
-          </p:nvPr>
-        </p:nvSpPr>
-        <p:spPr>
-          <a:xfrm>
-            <a:off x="457200" y="320040"/>
-            <a:ext cx="8229600" cy="685800"/>
-          </a:xfrm>
-          <a:prstGeom prst="rect">
-            <a:avLst/>
-          </a:prstGeom>
-          <a:noFill/>
-          <a:ln/>
-        </p:spPr>
-        <p:txBody>
-          <a:bodyPr wrap="square" lIns="0" tIns="0" rIns="0" bIns="0" rtlCol="0" anchor="ctr"/>
-          <a:lstStyle/>
-          <a:p>
-            <a:pPr indent="0" marL="0">
-              <a:buNone/>
-            </a:pPr>
-            <a:r>
-              <a:rPr lang="en-US" sz="3400" b="1" dirty="0">
-                <a:solidFill>
-                  <a:schemeClr val="tx2"/>
-                </a:solidFill>
-              </a:rPr>
-              <a:t>Próximos pasos: Sprints 4 y 5</a:t>
-            </a:r>
-            <a:endParaRPr lang="en-US" sz="3400" dirty="0"/>
-          </a:p>
-        </p:txBody>
-      </p:sp>
-      <p:sp>
-        <p:nvSpPr>
-          <p:cNvPr id="3" name="Tarjeta Sprint 4 · Semanas 11 y 12"/>
-          <p:cNvSpPr/>
-          <p:nvPr/>
-        </p:nvSpPr>
-        <p:spPr>
-          <a:xfrm>
-            <a:off x="457200" y="1188720"/>
-            <a:ext cx="4114800" cy="1691640"/>
-          </a:xfrm>
-          <a:prstGeom prst="roundRect">
-            <a:avLst>
-              <a:gd name="adj" fmla="val 5405"/>
-            </a:avLst>
-          </a:prstGeom>
-          <a:solidFill>
-            <a:schemeClr val="bg2"/>
-          </a:solidFill>
-          <a:ln/>
-        </p:spPr>
-      </p:sp>
-      <p:sp>
-        <p:nvSpPr>
-          <p:cNvPr id="4" name="Text 2"/>
-          <p:cNvSpPr txBox="1"/>
-          <p:nvPr/>
-        </p:nvSpPr>
-        <p:spPr>
-          <a:xfrm>
-            <a:off x="640080" y="1298448"/>
-            <a:ext cx="3749040" cy="365760"/>
-          </a:xfrm>
-          <a:prstGeom prst="rect">
-            <a:avLst/>
-          </a:prstGeom>
-          <a:noFill/>
-          <a:ln/>
-        </p:spPr>
-        <p:txBody>
-          <a:bodyPr wrap="square" lIns="0" tIns="0" rIns="0" bIns="0" rtlCol="0" anchor="ctr"/>
-          <a:lstStyle/>
-          <a:p>
-            <a:pPr indent="0" marL="0">
-              <a:buNone/>
-            </a:pPr>
-            <a:r>
-              <a:rPr lang="en-US" sz="1600" b="1" dirty="0">
-                <a:solidFill>
-                  <a:schemeClr val="tx2"/>
-                </a:solidFill>
-              </a:rPr>
-              <a:t>Sprint 4 · Semanas 11 y 12</a:t>
-            </a:r>
-            <a:endParaRPr lang="en-US" sz="1600" dirty="0"/>
-          </a:p>
-        </p:txBody>
-      </p:sp>
-      <p:sp>
-        <p:nvSpPr>
-          <p:cNvPr id="5" name="Text 3"/>
-          <p:cNvSpPr txBox="1"/>
-          <p:nvPr/>
-        </p:nvSpPr>
-        <p:spPr>
-          <a:xfrm>
-            <a:off x="640080" y="1737360"/>
-            <a:ext cx="3749040" cy="1051560"/>
-          </a:xfrm>
-          <a:prstGeom prst="rect">
-            <a:avLst/>
-          </a:prstGeom>
-          <a:noFill/>
-          <a:ln/>
-        </p:spPr>
-        <p:txBody>
-          <a:bodyPr wrap="square" lIns="0" tIns="0" rIns="0" bIns="0" rtlCol="0" anchor="t"/>
-          <a:lstStyle/>
-          <a:p>
-            <a:pPr indent="0" marL="0">
-              <a:buNone/>
-            </a:pPr>
-            <a:r>
-              <a:rPr lang="en-US" sz="1400" dirty="0">
-                <a:solidFill>
-                  <a:schemeClr val="tx1"/>
-                </a:solidFill>
-              </a:rPr>
-              <a:t>Docker, Cloud Run, Cloud SQL y Secret Manager. GitHub Actions. Pruebas E2E con Playwright y migraciones con Alembic.</a:t>
-            </a:r>
-            <a:endParaRPr lang="en-US" sz="1400" dirty="0"/>
-          </a:p>
-        </p:txBody>
-      </p:sp>
-      <p:sp>
-        <p:nvSpPr>
-          <p:cNvPr id="6" name="Tarjeta Sprint 5 · Semanas 13 a 15"/>
-          <p:cNvSpPr/>
-          <p:nvPr/>
-        </p:nvSpPr>
-        <p:spPr>
-          <a:xfrm>
-            <a:off x="457200" y="3017520"/>
-            <a:ext cx="4114800" cy="1691640"/>
-          </a:xfrm>
-          <a:prstGeom prst="roundRect">
-            <a:avLst>
-              <a:gd name="adj" fmla="val 5405"/>
-            </a:avLst>
-          </a:prstGeom>
-          <a:solidFill>
-            <a:schemeClr val="bg2"/>
-          </a:solidFill>
-          <a:ln/>
-        </p:spPr>
-      </p:sp>
-      <p:sp>
-        <p:nvSpPr>
-          <p:cNvPr id="7" name="Text 5"/>
-          <p:cNvSpPr txBox="1"/>
-          <p:nvPr/>
-        </p:nvSpPr>
-        <p:spPr>
-          <a:xfrm>
-            <a:off x="640080" y="3127248"/>
-            <a:ext cx="3749040" cy="365760"/>
-          </a:xfrm>
-          <a:prstGeom prst="rect">
-            <a:avLst/>
-          </a:prstGeom>
-          <a:noFill/>
-          <a:ln/>
-        </p:spPr>
-        <p:txBody>
-          <a:bodyPr wrap="square" lIns="0" tIns="0" rIns="0" bIns="0" rtlCol="0" anchor="ctr"/>
-          <a:lstStyle/>
-          <a:p>
-            <a:pPr indent="0" marL="0">
-              <a:buNone/>
-            </a:pPr>
-            <a:r>
-              <a:rPr lang="en-US" sz="1600" b="1" dirty="0">
-                <a:solidFill>
-                  <a:schemeClr val="tx2"/>
-                </a:solidFill>
-              </a:rPr>
-              <a:t>Sprint 5 · Semanas 13 a 15</a:t>
-            </a:r>
-            <a:endParaRPr lang="en-US" sz="1600" dirty="0"/>
-          </a:p>
-        </p:txBody>
-      </p:sp>
-      <p:sp>
-        <p:nvSpPr>
-          <p:cNvPr id="8" name="Text 6"/>
-          <p:cNvSpPr txBox="1"/>
-          <p:nvPr/>
-        </p:nvSpPr>
-        <p:spPr>
-          <a:xfrm>
-            <a:off x="640080" y="3566160"/>
-            <a:ext cx="3749040" cy="1051560"/>
-          </a:xfrm>
-          <a:prstGeom prst="rect">
-            <a:avLst/>
-          </a:prstGeom>
-          <a:noFill/>
-          <a:ln/>
-        </p:spPr>
-        <p:txBody>
-          <a:bodyPr wrap="square" lIns="0" tIns="0" rIns="0" bIns="0" rtlCol="0" anchor="t"/>
-          <a:lstStyle/>
-          <a:p>
-            <a:pPr indent="0" marL="0">
-              <a:buNone/>
-            </a:pPr>
-            <a:r>
-              <a:rPr lang="en-US" sz="1400" dirty="0">
-                <a:solidFill>
-                  <a:schemeClr val="tx1"/>
-                </a:solidFill>
-              </a:rPr>
-              <a:t>Cierre y documentación, reporte de pruebas consolidado y preparación de la defensa.</a:t>
-            </a:r>
-            <a:endParaRPr lang="en-US" sz="1400" dirty="0"/>
-          </a:p>
-        </p:txBody>
-      </p:sp>
-      <p:sp>
-        <p:nvSpPr>
-          <p:cNvPr id="9" name="Tarjeta riesgo GCP"/>
-          <p:cNvSpPr/>
-          <p:nvPr/>
-        </p:nvSpPr>
-        <p:spPr>
-          <a:xfrm>
-            <a:off x="4800600" y="1188720"/>
-            <a:ext cx="3886200" cy="3520440"/>
-          </a:xfrm>
-          <a:prstGeom prst="roundRect">
-            <a:avLst>
-              <a:gd name="adj" fmla="val 2597"/>
-            </a:avLst>
-          </a:prstGeom>
-          <a:solidFill>
-            <a:schemeClr val="tx2"/>
-          </a:solidFill>
-          <a:ln/>
-        </p:spPr>
-      </p:sp>
-      <p:sp>
-        <p:nvSpPr>
-          <p:cNvPr id="10" name="Text 8"/>
-          <p:cNvSpPr txBox="1"/>
-          <p:nvPr/>
-        </p:nvSpPr>
-        <p:spPr>
-          <a:xfrm>
-            <a:off x="4983480" y="1298448"/>
-            <a:ext cx="3520440" cy="411480"/>
-          </a:xfrm>
-          <a:prstGeom prst="rect">
-            <a:avLst/>
-          </a:prstGeom>
-          <a:noFill/>
-          <a:ln/>
-        </p:spPr>
-        <p:txBody>
-          <a:bodyPr wrap="square" lIns="0" tIns="0" rIns="0" bIns="0" rtlCol="0" anchor="ctr"/>
-          <a:lstStyle/>
-          <a:p>
-            <a:pPr indent="0" marL="0">
-              <a:buNone/>
-            </a:pPr>
-            <a:r>
-              <a:rPr lang="en-US" sz="1600" b="1" dirty="0">
-                <a:solidFill>
-                  <a:schemeClr val="accent1"/>
-                </a:solidFill>
-              </a:rPr>
-              <a:t>Medidas ante el riesgo de GCP</a:t>
-            </a:r>
-            <a:endParaRPr lang="en-US" sz="1600" dirty="0"/>
-          </a:p>
-        </p:txBody>
-      </p:sp>
-      <p:sp>
-        <p:nvSpPr>
-          <p:cNvPr id="11" name="Text 9"/>
-          <p:cNvSpPr txBox="1"/>
-          <p:nvPr/>
-        </p:nvSpPr>
-        <p:spPr>
-          <a:xfrm>
-            <a:off x="4983480" y="1783080"/>
-            <a:ext cx="3520440" cy="2788920"/>
-          </a:xfrm>
-          <a:prstGeom prst="rect">
-            <a:avLst/>
-          </a:prstGeom>
-          <a:noFill/>
-          <a:ln/>
-        </p:spPr>
-        <p:txBody>
-          <a:bodyPr wrap="square" lIns="0" tIns="0" rIns="0" bIns="0" rtlCol="0" anchor="t"/>
-          <a:lstStyle/>
-          <a:p>
-            <a:pPr marL="342900" indent="-342900">
-              <a:spcAft>
-                <a:spcPts val="800"/>
-              </a:spcAft>
-              <a:buSzPct val="100000"/>
-              <a:buChar char="•"/>
-            </a:pPr>
-            <a:r>
-              <a:rPr lang="en-US" sz="1400" dirty="0">
-                <a:solidFill>
-                  <a:schemeClr val="bg1"/>
-                </a:solidFill>
-              </a:rPr>
-              <a:t>Semana 11: Dockerfile y GitHub Actions antes de configurar Cloud Run</a:t>
-            </a:r>
-            <a:endParaRPr lang="en-US" sz="1400" dirty="0"/>
-          </a:p>
-          <a:p>
-            <a:pPr marL="342900" indent="-342900">
-              <a:spcAft>
-                <a:spcPts val="800"/>
-              </a:spcAft>
-              <a:buSzPct val="100000"/>
-              <a:buChar char="•"/>
-            </a:pPr>
-            <a:r>
-              <a:rPr lang="en-US" sz="1400" dirty="0">
-                <a:solidFill>
-                  <a:schemeClr val="bg1"/>
-                </a:solidFill>
-              </a:rPr>
-              <a:t>Capa gratuita de GCP y API key en Secret Manager</a:t>
-            </a:r>
-            <a:endParaRPr lang="en-US" sz="1400" dirty="0"/>
-          </a:p>
-          <a:p>
-            <a:pPr marL="342900" indent="-342900">
-              <a:spcAft>
-                <a:spcPts val="800"/>
-              </a:spcAft>
-              <a:buSzPct val="100000"/>
-              <a:buChar char="•"/>
-            </a:pPr>
-            <a:r>
-              <a:rPr lang="en-US" sz="1400" dirty="0">
-                <a:solidFill>
-                  <a:schemeClr val="bg1"/>
-                </a:solidFill>
-              </a:rPr>
-              <a:t>Pruebas E2E primero en local y luego en lo desplegado</a:t>
-            </a:r>
-            <a:endParaRPr lang="en-US" sz="1400" dirty="0"/>
-          </a:p>
-          <a:p>
-            <a:pPr marL="342900" indent="-342900">
-              <a:spcAft>
-                <a:spcPts val="800"/>
-              </a:spcAft>
-              <a:buSzPct val="100000"/>
-              <a:buChar char="•"/>
-            </a:pPr>
-            <a:r>
-              <a:rPr lang="en-US" sz="1400" dirty="0">
-                <a:solidFill>
-                  <a:schemeClr val="bg1"/>
-                </a:solidFill>
-              </a:rPr>
-              <a:t>Demostración local como respaldo para la defensa</a:t>
-            </a:r>
-            <a:endParaRPr lang="en-US" sz="1400" dirty="0"/>
-          </a:p>
-        </p:txBody>
-      </p:sp>
-      <p:sp>
-        <p:nvSpPr>
-          <p:cNvPr id="25" name="Slide Number Placeholder 0"/>
-          <p:cNvSpPr>
-            <a:spLocks noGrp="1"/>
-          </p:cNvSpPr>
-          <p:nvPr>
-            <p:ph type="sldNum" sz="quarter" idx="4294967295"/>
-          </p:nvPr>
-        </p:nvSpPr>
-        <p:spPr>
-          <a:xfrm>
-            <a:off x="8229600" y="4846320"/>
-            <a:ext cx="457200" cy="228600"/>
-          </a:xfrm>
-          <a:prstGeom prst="rect">
-            <a:avLst/>
-          </a:prstGeom>
-          <a:extLst>
-            <a:ext uri="{C572A759-6A51-4108-AA02-DFA0A04FC94B}">
-              <ma14:wrappingTextBoxFlag xmlns:ma14="http://schemas.microsoft.com/office/mac/drawingml/2011/main" val="0"/>
-            </a:ext>
-          </a:extLst>
-        </p:spPr>
-        <p:txBody>
-          <a:bodyPr/>
-          <a:lstStyle>
-            <a:lvl1pPr>
-              <a:defRPr sz="1000">
-                <a:solidFill>
-                  <a:schemeClr val="accent5"/>
-                </a:solidFill>
-              </a:defRPr>
-            </a:lvl1pPr>
-          </a:lstStyle>
-          <a:p>
-            <a:pPr algn="r"/>
-            <a:fld id="{F7021451-1387-4CA6-816F-3879F97B5CBC}" type="slidenum">
-              <a:rPr b="0" lang="en-US"/>
+              <a:rPr lang="en-US" b="0"/>
               <a:t>9</a:t>
             </a:fld>
             <a:endParaRPr lang="en-US"/>
@@ -7895,4 +8920,319 @@
     </a:ext>
   </a:extLst>
 </a:theme>
+</file>
+
+<file path=ppt/theme/theme2.xml><?xml version="1.0" encoding="utf-8"?>
+<a:theme xmlns:a="http://schemas.openxmlformats.org/drawingml/2006/main" name="Tema de Office">
+  <a:themeElements>
+    <a:clrScheme name="Office">
+      <a:dk1>
+        <a:sysClr val="windowText" lastClr="000000"/>
+      </a:dk1>
+      <a:lt1>
+        <a:sysClr val="window" lastClr="FFFFFF"/>
+      </a:lt1>
+      <a:dk2>
+        <a:srgbClr val="0E2841"/>
+      </a:dk2>
+      <a:lt2>
+        <a:srgbClr val="E8E8E8"/>
+      </a:lt2>
+      <a:accent1>
+        <a:srgbClr val="156082"/>
+      </a:accent1>
+      <a:accent2>
+        <a:srgbClr val="E97132"/>
+      </a:accent2>
+      <a:accent3>
+        <a:srgbClr val="196B24"/>
+      </a:accent3>
+      <a:accent4>
+        <a:srgbClr val="0F9ED5"/>
+      </a:accent4>
+      <a:accent5>
+        <a:srgbClr val="A02B93"/>
+      </a:accent5>
+      <a:accent6>
+        <a:srgbClr val="4EA72E"/>
+      </a:accent6>
+      <a:hlink>
+        <a:srgbClr val="467886"/>
+      </a:hlink>
+      <a:folHlink>
+        <a:srgbClr val="96607D"/>
+      </a:folHlink>
+    </a:clrScheme>
+    <a:fontScheme name="Office">
+      <a:majorFont>
+        <a:latin typeface="Aptos Display" panose="02110004020202020204"/>
+        <a:ea typeface=""/>
+        <a:cs typeface=""/>
+        <a:font script="Jpan" typeface="游ゴシック Light"/>
+        <a:font script="Hang" typeface="맑은 고딕"/>
+        <a:font script="Hans" typeface="等线 Light"/>
+        <a:font script="Hant" typeface="新細明體"/>
+        <a:font script="Arab" typeface="Times New Roman"/>
+        <a:font script="Hebr" typeface="Times New Roman"/>
+        <a:font script="Thai" typeface="Angsana New"/>
+        <a:font script="Ethi" typeface="Nyala"/>
+        <a:font script="Beng" typeface="Vrinda"/>
+        <a:font script="Gujr" typeface="Shruti"/>
+        <a:font script="Khmr" typeface="MoolBoran"/>
+        <a:font script="Knda" typeface="Tunga"/>
+        <a:font script="Guru" typeface="Raavi"/>
+        <a:font script="Cans" typeface="Euphemia"/>
+        <a:font script="Cher" typeface="Plantagenet Cherokee"/>
+        <a:font script="Yiii" typeface="Microsoft Yi Baiti"/>
+        <a:font script="Tibt" typeface="Microsoft Himalaya"/>
+        <a:font script="Thaa" typeface="MV Boli"/>
+        <a:font script="Deva" typeface="Mangal"/>
+        <a:font script="Telu" typeface="Gautami"/>
+        <a:font script="Taml" typeface="Latha"/>
+        <a:font script="Syrc" typeface="Estrangelo Edessa"/>
+        <a:font script="Orya" typeface="Kalinga"/>
+        <a:font script="Mlym" typeface="Kartika"/>
+        <a:font script="Laoo" typeface="DokChampa"/>
+        <a:font script="Sinh" typeface="Iskoola Pota"/>
+        <a:font script="Mong" typeface="Mongolian Baiti"/>
+        <a:font script="Viet" typeface="Times New Roman"/>
+        <a:font script="Uigh" typeface="Microsoft Uighur"/>
+        <a:font script="Geor" typeface="Sylfaen"/>
+        <a:font script="Armn" typeface="Arial"/>
+        <a:font script="Bugi" typeface="Leelawadee UI"/>
+        <a:font script="Bopo" typeface="Microsoft JhengHei"/>
+        <a:font script="Java" typeface="Javanese Text"/>
+        <a:font script="Lisu" typeface="Segoe UI"/>
+        <a:font script="Mymr" typeface="Myanmar Text"/>
+        <a:font script="Nkoo" typeface="Ebrima"/>
+        <a:font script="Olck" typeface="Nirmala UI"/>
+        <a:font script="Osma" typeface="Ebrima"/>
+        <a:font script="Phag" typeface="Phagspa"/>
+        <a:font script="Syrn" typeface="Estrangelo Edessa"/>
+        <a:font script="Syrj" typeface="Estrangelo Edessa"/>
+        <a:font script="Syre" typeface="Estrangelo Edessa"/>
+        <a:font script="Sora" typeface="Nirmala UI"/>
+        <a:font script="Tale" typeface="Microsoft Tai Le"/>
+        <a:font script="Talu" typeface="Microsoft New Tai Lue"/>
+        <a:font script="Tfng" typeface="Ebrima"/>
+      </a:majorFont>
+      <a:minorFont>
+        <a:latin typeface="Aptos" panose="02110004020202020204"/>
+        <a:ea typeface=""/>
+        <a:cs typeface=""/>
+        <a:font script="Jpan" typeface="游ゴシック"/>
+        <a:font script="Hang" typeface="맑은 고딕"/>
+        <a:font script="Hans" typeface="等线"/>
+        <a:font script="Hant" typeface="新細明體"/>
+        <a:font script="Arab" typeface="Arial"/>
+        <a:font script="Hebr" typeface="Arial"/>
+        <a:font script="Thai" typeface="Cordia New"/>
+        <a:font script="Ethi" typeface="Nyala"/>
+        <a:font script="Beng" typeface="Vrinda"/>
+        <a:font script="Gujr" typeface="Shruti"/>
+        <a:font script="Khmr" typeface="DaunPenh"/>
+        <a:font script="Knda" typeface="Tunga"/>
+        <a:font script="Guru" typeface="Raavi"/>
+        <a:font script="Cans" typeface="Euphemia"/>
+        <a:font script="Cher" typeface="Plantagenet Cherokee"/>
+        <a:font script="Yiii" typeface="Microsoft Yi Baiti"/>
+        <a:font script="Tibt" typeface="Microsoft Himalaya"/>
+        <a:font script="Thaa" typeface="MV Boli"/>
+        <a:font script="Deva" typeface="Mangal"/>
+        <a:font script="Telu" typeface="Gautami"/>
+        <a:font script="Taml" typeface="Latha"/>
+        <a:font script="Syrc" typeface="Estrangelo Edessa"/>
+        <a:font script="Orya" typeface="Kalinga"/>
+        <a:font script="Mlym" typeface="Kartika"/>
+        <a:font script="Laoo" typeface="DokChampa"/>
+        <a:font script="Sinh" typeface="Iskoola Pota"/>
+        <a:font script="Mong" typeface="Mongolian Baiti"/>
+        <a:font script="Viet" typeface="Arial"/>
+        <a:font script="Uigh" typeface="Microsoft Uighur"/>
+        <a:font script="Geor" typeface="Sylfaen"/>
+        <a:font script="Armn" typeface="Arial"/>
+        <a:font script="Bugi" typeface="Leelawadee UI"/>
+        <a:font script="Bopo" typeface="Microsoft JhengHei"/>
+        <a:font script="Java" typeface="Javanese Text"/>
+        <a:font script="Lisu" typeface="Segoe UI"/>
+        <a:font script="Mymr" typeface="Myanmar Text"/>
+        <a:font script="Nkoo" typeface="Ebrima"/>
+        <a:font script="Olck" typeface="Nirmala UI"/>
+        <a:font script="Osma" typeface="Ebrima"/>
+        <a:font script="Phag" typeface="Phagspa"/>
+        <a:font script="Syrn" typeface="Estrangelo Edessa"/>
+        <a:font script="Syrj" typeface="Estrangelo Edessa"/>
+        <a:font script="Syre" typeface="Estrangelo Edessa"/>
+        <a:font script="Sora" typeface="Nirmala UI"/>
+        <a:font script="Tale" typeface="Microsoft Tai Le"/>
+        <a:font script="Talu" typeface="Microsoft New Tai Lue"/>
+        <a:font script="Tfng" typeface="Ebrima"/>
+      </a:minorFont>
+    </a:fontScheme>
+    <a:fmtScheme name="Office">
+      <a:fillStyleLst>
+        <a:solidFill>
+          <a:schemeClr val="phClr"/>
+        </a:solidFill>
+        <a:gradFill rotWithShape="1">
+          <a:gsLst>
+            <a:gs pos="0">
+              <a:schemeClr val="phClr">
+                <a:lumMod val="110000"/>
+                <a:satMod val="105000"/>
+                <a:tint val="67000"/>
+              </a:schemeClr>
+            </a:gs>
+            <a:gs pos="50000">
+              <a:schemeClr val="phClr">
+                <a:lumMod val="105000"/>
+                <a:satMod val="103000"/>
+                <a:tint val="73000"/>
+              </a:schemeClr>
+            </a:gs>
+            <a:gs pos="100000">
+              <a:schemeClr val="phClr">
+                <a:lumMod val="105000"/>
+                <a:satMod val="109000"/>
+                <a:tint val="81000"/>
+              </a:schemeClr>
+            </a:gs>
+          </a:gsLst>
+          <a:lin ang="5400000" scaled="0"/>
+        </a:gradFill>
+        <a:gradFill rotWithShape="1">
+          <a:gsLst>
+            <a:gs pos="0">
+              <a:schemeClr val="phClr">
+                <a:satMod val="103000"/>
+                <a:lumMod val="102000"/>
+                <a:tint val="94000"/>
+              </a:schemeClr>
+            </a:gs>
+            <a:gs pos="50000">
+              <a:schemeClr val="phClr">
+                <a:satMod val="110000"/>
+                <a:lumMod val="100000"/>
+                <a:shade val="100000"/>
+              </a:schemeClr>
+            </a:gs>
+            <a:gs pos="100000">
+              <a:schemeClr val="phClr">
+                <a:lumMod val="99000"/>
+                <a:satMod val="120000"/>
+                <a:shade val="78000"/>
+              </a:schemeClr>
+            </a:gs>
+          </a:gsLst>
+          <a:lin ang="5400000" scaled="0"/>
+        </a:gradFill>
+      </a:fillStyleLst>
+      <a:lnStyleLst>
+        <a:ln w="12700" cap="flat" cmpd="sng" algn="ctr">
+          <a:solidFill>
+            <a:schemeClr val="phClr"/>
+          </a:solidFill>
+          <a:prstDash val="solid"/>
+          <a:miter lim="800000"/>
+        </a:ln>
+        <a:ln w="19050" cap="flat" cmpd="sng" algn="ctr">
+          <a:solidFill>
+            <a:schemeClr val="phClr"/>
+          </a:solidFill>
+          <a:prstDash val="solid"/>
+          <a:miter lim="800000"/>
+        </a:ln>
+        <a:ln w="25400" cap="flat" cmpd="sng" algn="ctr">
+          <a:solidFill>
+            <a:schemeClr val="phClr"/>
+          </a:solidFill>
+          <a:prstDash val="solid"/>
+          <a:miter lim="800000"/>
+        </a:ln>
+      </a:lnStyleLst>
+      <a:effectStyleLst>
+        <a:effectStyle>
+          <a:effectLst/>
+        </a:effectStyle>
+        <a:effectStyle>
+          <a:effectLst/>
+        </a:effectStyle>
+        <a:effectStyle>
+          <a:effectLst>
+            <a:outerShdw blurRad="57150" dist="19050" dir="5400000" algn="ctr" rotWithShape="0">
+              <a:srgbClr val="000000">
+                <a:alpha val="63000"/>
+              </a:srgbClr>
+            </a:outerShdw>
+          </a:effectLst>
+        </a:effectStyle>
+      </a:effectStyleLst>
+      <a:bgFillStyleLst>
+        <a:solidFill>
+          <a:schemeClr val="phClr"/>
+        </a:solidFill>
+        <a:solidFill>
+          <a:schemeClr val="phClr">
+            <a:tint val="95000"/>
+            <a:satMod val="170000"/>
+          </a:schemeClr>
+        </a:solidFill>
+        <a:gradFill rotWithShape="1">
+          <a:gsLst>
+            <a:gs pos="0">
+              <a:schemeClr val="phClr">
+                <a:tint val="93000"/>
+                <a:satMod val="150000"/>
+                <a:shade val="98000"/>
+                <a:lumMod val="102000"/>
+              </a:schemeClr>
+            </a:gs>
+            <a:gs pos="50000">
+              <a:schemeClr val="phClr">
+                <a:tint val="98000"/>
+                <a:satMod val="130000"/>
+                <a:shade val="90000"/>
+                <a:lumMod val="103000"/>
+              </a:schemeClr>
+            </a:gs>
+            <a:gs pos="100000">
+              <a:schemeClr val="phClr">
+                <a:shade val="63000"/>
+                <a:satMod val="120000"/>
+              </a:schemeClr>
+            </a:gs>
+          </a:gsLst>
+          <a:lin ang="5400000" scaled="0"/>
+        </a:gradFill>
+      </a:bgFillStyleLst>
+    </a:fmtScheme>
+  </a:themeElements>
+  <a:objectDefaults>
+    <a:lnDef>
+      <a:spPr/>
+      <a:bodyPr/>
+      <a:lstStyle/>
+      <a:style>
+        <a:lnRef idx="2">
+          <a:schemeClr val="accent1"/>
+        </a:lnRef>
+        <a:fillRef idx="0">
+          <a:schemeClr val="accent1"/>
+        </a:fillRef>
+        <a:effectRef idx="1">
+          <a:schemeClr val="accent1"/>
+        </a:effectRef>
+        <a:fontRef idx="minor">
+          <a:schemeClr val="tx1"/>
+        </a:fontRef>
+      </a:style>
+    </a:lnDef>
+  </a:objectDefaults>
+  <a:extraClrSchemeLst/>
+  <a:extLst>
+    <a:ext uri="{05A4C25C-085E-4340-85A3-A5531E510DB2}">
+      <thm15:themeFamily xmlns:thm15="http://schemas.microsoft.com/office/thememl/2012/main" name="Office Theme" id="{2E142A2C-CD16-42D6-873A-C26D2A0506FA}" vid="{1BDDFF52-6CD6-40A5-AB3C-68EB2F1E4D0A}"/>
+    </a:ext>
+  </a:extLst>
+</a:theme>
 </file>